--- a/docs/NextRole-Presentation.pptx
+++ b/docs/NextRole-Presentation.pptx
@@ -1658,7 +1658,7 @@
     <p:bg>
       <p:bgPr>
         <a:solidFill>
-          <a:srgbClr val="11372A"/>
+          <a:srgbClr val="123A2B"/>
         </a:solidFill>
       </p:bgPr>
     </p:bg>
@@ -1691,7 +1691,7 @@
             <a:avLst/>
           </a:prstGeom>
           <a:solidFill>
-            <a:srgbClr val="E2603B"/>
+            <a:srgbClr val="E2603C"/>
           </a:solidFill>
           <a:ln/>
         </p:spPr>
@@ -1704,7 +1704,7 @@
         </p:nvSpPr>
         <p:spPr>
           <a:xfrm>
-            <a:off x="822960" y="1828800"/>
+            <a:off x="822960" y="1600200"/>
             <a:ext cx="10515600" cy="1005840"/>
           </a:xfrm>
           <a:prstGeom prst="rect">
@@ -1743,7 +1743,7 @@
         </p:nvSpPr>
         <p:spPr>
           <a:xfrm>
-            <a:off x="822960" y="2788920"/>
+            <a:off x="822960" y="2560320"/>
             <a:ext cx="10515600" cy="731520"/>
           </a:xfrm>
           <a:prstGeom prst="rect">
@@ -1762,7 +1762,7 @@
             <a:r>
               <a:rPr lang="en-US" sz="3000" dirty="0">
                 <a:solidFill>
-                  <a:srgbClr val="ECE9DB"/>
+                  <a:srgbClr val="F1EFE6"/>
                 </a:solidFill>
                 <a:latin typeface="Segoe UI" pitchFamily="34" charset="0"/>
                 <a:ea typeface="Segoe UI" pitchFamily="34" charset="-122"/>
@@ -1782,7 +1782,7 @@
         </p:nvSpPr>
         <p:spPr>
           <a:xfrm>
-            <a:off x="822960" y="3611880"/>
+            <a:off x="822960" y="3383280"/>
             <a:ext cx="9601200" cy="548640"/>
           </a:xfrm>
           <a:prstGeom prst="rect">
@@ -1821,7 +1821,7 @@
         </p:nvSpPr>
         <p:spPr>
           <a:xfrm>
-            <a:off x="822960" y="4663440"/>
+            <a:off x="822960" y="4343400"/>
             <a:ext cx="1371600" cy="502920"/>
           </a:xfrm>
           <a:prstGeom prst="roundRect">
@@ -1830,7 +1830,7 @@
             </a:avLst>
           </a:prstGeom>
           <a:solidFill>
-            <a:srgbClr val="0C2419"/>
+            <a:srgbClr val="0D2C20"/>
           </a:solidFill>
           <a:ln/>
         </p:spPr>
@@ -1843,7 +1843,7 @@
         </p:nvSpPr>
         <p:spPr>
           <a:xfrm>
-            <a:off x="822960" y="4663440"/>
+            <a:off x="822960" y="4343400"/>
             <a:ext cx="1371600" cy="502920"/>
           </a:xfrm>
           <a:prstGeom prst="rect">
@@ -1862,7 +1862,7 @@
             <a:r>
               <a:rPr lang="en-US" sz="1300" b="1" dirty="0">
                 <a:solidFill>
-                  <a:srgbClr val="ECE9DB"/>
+                  <a:srgbClr val="F1EFE6"/>
                 </a:solidFill>
                 <a:latin typeface="Segoe UI" pitchFamily="34" charset="0"/>
                 <a:ea typeface="Segoe UI" pitchFamily="34" charset="-122"/>
@@ -1882,7 +1882,7 @@
         </p:nvSpPr>
         <p:spPr>
           <a:xfrm>
-            <a:off x="2331720" y="4663440"/>
+            <a:off x="2331720" y="4343400"/>
             <a:ext cx="2011680" cy="502920"/>
           </a:xfrm>
           <a:prstGeom prst="roundRect">
@@ -1891,7 +1891,7 @@
             </a:avLst>
           </a:prstGeom>
           <a:solidFill>
-            <a:srgbClr val="0C2419"/>
+            <a:srgbClr val="0D2C20"/>
           </a:solidFill>
           <a:ln/>
         </p:spPr>
@@ -1904,7 +1904,7 @@
         </p:nvSpPr>
         <p:spPr>
           <a:xfrm>
-            <a:off x="2331720" y="4663440"/>
+            <a:off x="2331720" y="4343400"/>
             <a:ext cx="2011680" cy="502920"/>
           </a:xfrm>
           <a:prstGeom prst="rect">
@@ -1923,7 +1923,7 @@
             <a:r>
               <a:rPr lang="en-US" sz="1300" b="1" dirty="0">
                 <a:solidFill>
-                  <a:srgbClr val="ECE9DB"/>
+                  <a:srgbClr val="F1EFE6"/>
                 </a:solidFill>
                 <a:latin typeface="Segoe UI" pitchFamily="34" charset="0"/>
                 <a:ea typeface="Segoe UI" pitchFamily="34" charset="-122"/>
@@ -1943,7 +1943,7 @@
         </p:nvSpPr>
         <p:spPr>
           <a:xfrm>
-            <a:off x="4480560" y="4663440"/>
+            <a:off x="4480560" y="4343400"/>
             <a:ext cx="1645920" cy="502920"/>
           </a:xfrm>
           <a:prstGeom prst="roundRect">
@@ -1952,7 +1952,7 @@
             </a:avLst>
           </a:prstGeom>
           <a:solidFill>
-            <a:srgbClr val="0C2419"/>
+            <a:srgbClr val="0D2C20"/>
           </a:solidFill>
           <a:ln/>
         </p:spPr>
@@ -1965,7 +1965,7 @@
         </p:nvSpPr>
         <p:spPr>
           <a:xfrm>
-            <a:off x="4480560" y="4663440"/>
+            <a:off x="4480560" y="4343400"/>
             <a:ext cx="1645920" cy="502920"/>
           </a:xfrm>
           <a:prstGeom prst="rect">
@@ -1984,7 +1984,7 @@
             <a:r>
               <a:rPr lang="en-US" sz="1300" b="1" dirty="0">
                 <a:solidFill>
-                  <a:srgbClr val="ECE9DB"/>
+                  <a:srgbClr val="F1EFE6"/>
                 </a:solidFill>
                 <a:latin typeface="Segoe UI" pitchFamily="34" charset="0"/>
                 <a:ea typeface="Segoe UI" pitchFamily="34" charset="-122"/>
@@ -2004,7 +2004,7 @@
         </p:nvSpPr>
         <p:spPr>
           <a:xfrm>
-            <a:off x="6263640" y="4663440"/>
+            <a:off x="6263640" y="4343400"/>
             <a:ext cx="1828800" cy="502920"/>
           </a:xfrm>
           <a:prstGeom prst="roundRect">
@@ -2013,7 +2013,7 @@
             </a:avLst>
           </a:prstGeom>
           <a:solidFill>
-            <a:srgbClr val="0C2419"/>
+            <a:srgbClr val="0D2C20"/>
           </a:solidFill>
           <a:ln/>
         </p:spPr>
@@ -2026,7 +2026,7 @@
         </p:nvSpPr>
         <p:spPr>
           <a:xfrm>
-            <a:off x="6263640" y="4663440"/>
+            <a:off x="6263640" y="4343400"/>
             <a:ext cx="1828800" cy="502920"/>
           </a:xfrm>
           <a:prstGeom prst="rect">
@@ -2045,7 +2045,7 @@
             <a:r>
               <a:rPr lang="en-US" sz="1300" b="1" dirty="0">
                 <a:solidFill>
-                  <a:srgbClr val="ECE9DB"/>
+                  <a:srgbClr val="F1EFE6"/>
                 </a:solidFill>
                 <a:latin typeface="Segoe UI" pitchFamily="34" charset="0"/>
                 <a:ea typeface="Segoe UI" pitchFamily="34" charset="-122"/>
@@ -2065,7 +2065,7 @@
         </p:nvSpPr>
         <p:spPr>
           <a:xfrm>
-            <a:off x="8229600" y="4663440"/>
+            <a:off x="8229600" y="4343400"/>
             <a:ext cx="1463040" cy="502920"/>
           </a:xfrm>
           <a:prstGeom prst="roundRect">
@@ -2074,7 +2074,7 @@
             </a:avLst>
           </a:prstGeom>
           <a:solidFill>
-            <a:srgbClr val="0C2419"/>
+            <a:srgbClr val="0D2C20"/>
           </a:solidFill>
           <a:ln/>
         </p:spPr>
@@ -2087,7 +2087,7 @@
         </p:nvSpPr>
         <p:spPr>
           <a:xfrm>
-            <a:off x="8229600" y="4663440"/>
+            <a:off x="8229600" y="4343400"/>
             <a:ext cx="1463040" cy="502920"/>
           </a:xfrm>
           <a:prstGeom prst="rect">
@@ -2106,7 +2106,7 @@
             <a:r>
               <a:rPr lang="en-US" sz="1300" b="1" dirty="0">
                 <a:solidFill>
-                  <a:srgbClr val="ECE9DB"/>
+                  <a:srgbClr val="F1EFE6"/>
                 </a:solidFill>
                 <a:latin typeface="Segoe UI" pitchFamily="34" charset="0"/>
                 <a:ea typeface="Segoe UI" pitchFamily="34" charset="-122"/>
@@ -2126,7 +2126,7 @@
         </p:nvSpPr>
         <p:spPr>
           <a:xfrm>
-            <a:off x="9829800" y="4663440"/>
+            <a:off x="9829800" y="4343400"/>
             <a:ext cx="1371600" cy="502920"/>
           </a:xfrm>
           <a:prstGeom prst="roundRect">
@@ -2135,7 +2135,7 @@
             </a:avLst>
           </a:prstGeom>
           <a:solidFill>
-            <a:srgbClr val="E2603B"/>
+            <a:srgbClr val="E2603C"/>
           </a:solidFill>
           <a:ln/>
         </p:spPr>
@@ -2148,7 +2148,7 @@
         </p:nvSpPr>
         <p:spPr>
           <a:xfrm>
-            <a:off x="9829800" y="4663440"/>
+            <a:off x="9829800" y="4343400"/>
             <a:ext cx="1371600" cy="502920"/>
           </a:xfrm>
           <a:prstGeom prst="rect">
@@ -2182,6 +2182,45 @@
       <p:sp>
         <p:nvSpPr>
           <p:cNvPr id="18" name="Text 16"/>
+          <p:cNvSpPr/>
+          <p:nvPr/>
+        </p:nvSpPr>
+        <p:spPr>
+          <a:xfrm>
+            <a:off x="822960" y="5394960"/>
+            <a:ext cx="10515600" cy="457200"/>
+          </a:xfrm>
+          <a:prstGeom prst="rect">
+            <a:avLst/>
+          </a:prstGeom>
+          <a:noFill/>
+          <a:ln/>
+        </p:spPr>
+        <p:txBody>
+          <a:bodyPr wrap="square" rtlCol="0" anchor="ctr"/>
+          <a:lstStyle/>
+          <a:p>
+            <a:pPr indent="0" marL="0">
+              <a:buNone/>
+            </a:pPr>
+            <a:r>
+              <a:rPr lang="en-US" sz="1500" dirty="0">
+                <a:solidFill>
+                  <a:srgbClr val="9FB89B"/>
+                </a:solidFill>
+                <a:latin typeface="Segoe UI" pitchFamily="34" charset="0"/>
+                <a:ea typeface="Segoe UI" pitchFamily="34" charset="-122"/>
+                <a:cs typeface="Segoe UI" pitchFamily="34" charset="-120"/>
+              </a:rPr>
+              <a:t>Live on the web  ·  One-click Windows installer  ·  Open source on GitHub</a:t>
+            </a:r>
+            <a:endParaRPr lang="en-US" sz="1500" dirty="0"/>
+          </a:p>
+        </p:txBody>
+      </p:sp>
+      <p:sp>
+        <p:nvSpPr>
+          <p:cNvPr id="19" name="Text 17"/>
           <p:cNvSpPr/>
           <p:nvPr/>
         </p:nvSpPr>
@@ -2206,7 +2245,7 @@
             <a:r>
               <a:rPr lang="en-US" sz="1000" dirty="0">
                 <a:solidFill>
-                  <a:srgbClr val="ECE9DB"/>
+                  <a:srgbClr val="F1EFE6"/>
                 </a:solidFill>
               </a:rPr>
               <a:t>nextrole  ·  1/10</a:t>
@@ -2832,6 +2871,41 @@
                                         <p:cTn id="54" dur="500"/>
                                         <p:tgtEl>
                                           <p:spTgt spid="18"/>
+                                        </p:tgtEl>
+                                      </p:cBhvr>
+                                    </p:animEffect>
+                                  </p:childTnLst>
+                                </p:cTn>
+                              </p:par>
+                              <p:par>
+                                <p:cTn id="56" presetID="10" presetClass="entr" presetSubtype="0" fill="hold" grpId="0" nodeType="withEffect">
+                                  <p:stCondLst>
+                                    <p:cond delay="5950"/>
+                                  </p:stCondLst>
+                                  <p:childTnLst>
+                                    <p:set>
+                                      <p:cBhvr>
+                                        <p:cTn id="55" dur="1" fill="hold">
+                                          <p:stCondLst>
+                                            <p:cond delay="0"/>
+                                          </p:stCondLst>
+                                        </p:cTn>
+                                        <p:tgtEl>
+                                          <p:spTgt spid="19"/>
+                                        </p:tgtEl>
+                                        <p:attrNameLst>
+                                          <p:attrName>style.visibility</p:attrName>
+                                        </p:attrNameLst>
+                                      </p:cBhvr>
+                                      <p:to>
+                                        <p:strVal val="visible"/>
+                                      </p:to>
+                                    </p:set>
+                                    <p:animEffect transition="in" filter="fade">
+                                      <p:cBhvr>
+                                        <p:cTn id="57" dur="500"/>
+                                        <p:tgtEl>
+                                          <p:spTgt spid="19"/>
                                         </p:tgtEl>
                                       </p:cBhvr>
                                     </p:animEffect>
@@ -2875,7 +2949,7 @@
     <p:bg>
       <p:bgPr>
         <a:solidFill>
-          <a:srgbClr val="11372A"/>
+          <a:srgbClr val="123A2B"/>
         </a:solidFill>
       </p:bgPr>
     </p:bg>
@@ -2908,7 +2982,7 @@
             <a:avLst/>
           </a:prstGeom>
           <a:solidFill>
-            <a:srgbClr val="E2603B"/>
+            <a:srgbClr val="E2603C"/>
           </a:solidFill>
           <a:ln/>
         </p:spPr>
@@ -2921,7 +2995,7 @@
         </p:nvSpPr>
         <p:spPr>
           <a:xfrm>
-            <a:off x="822960" y="1280160"/>
+            <a:off x="822960" y="914400"/>
             <a:ext cx="10515600" cy="822960"/>
           </a:xfrm>
           <a:prstGeom prst="rect">
@@ -2946,7 +3020,7 @@
                 <a:ea typeface="Segoe UI" pitchFamily="34" charset="-122"/>
                 <a:cs typeface="Segoe UI" pitchFamily="34" charset="-120"/>
               </a:rPr>
-              <a:t>Live on GitHub</a:t>
+              <a:t>Try it now</a:t>
             </a:r>
             <a:endParaRPr lang="en-US" sz="4000" dirty="0"/>
           </a:p>
@@ -2960,8 +3034,8 @@
         </p:nvSpPr>
         <p:spPr>
           <a:xfrm>
-            <a:off x="822960" y="2194560"/>
-            <a:ext cx="10515600" cy="548640"/>
+            <a:off x="822960" y="1920240"/>
+            <a:ext cx="10789920" cy="457200"/>
           </a:xfrm>
           <a:prstGeom prst="rect">
             <a:avLst/>
@@ -2977,17 +3051,17 @@
               <a:buNone/>
             </a:pPr>
             <a:r>
-              <a:rPr lang="en-US" sz="2200" dirty="0">
+              <a:rPr lang="en-US" sz="1800" dirty="0">
                 <a:solidFill>
-                  <a:srgbClr val="E2603B"/>
+                  <a:srgbClr val="F1EFE6"/>
                 </a:solidFill>
                 <a:latin typeface="Consolas" pitchFamily="34" charset="0"/>
                 <a:ea typeface="Consolas" pitchFamily="34" charset="-122"/>
                 <a:cs typeface="Consolas" pitchFamily="34" charset="-120"/>
               </a:rPr>
-              <a:t>github.com/saxenavansh070-droid/nextrole</a:t>
-            </a:r>
-            <a:endParaRPr lang="en-US" sz="2200" dirty="0"/>
+              <a:t>App:      https://saxenavansh070-droid.github.io/nextrole/</a:t>
+            </a:r>
+            <a:endParaRPr lang="en-US" sz="1800" dirty="0"/>
           </a:p>
         </p:txBody>
       </p:sp>
@@ -2999,7 +3073,85 @@
         </p:nvSpPr>
         <p:spPr>
           <a:xfrm>
-            <a:off x="777240" y="3017520"/>
+            <a:off x="822960" y="2468880"/>
+            <a:ext cx="10789920" cy="457200"/>
+          </a:xfrm>
+          <a:prstGeom prst="rect">
+            <a:avLst/>
+          </a:prstGeom>
+          <a:noFill/>
+          <a:ln/>
+        </p:spPr>
+        <p:txBody>
+          <a:bodyPr wrap="square" rtlCol="0" anchor="ctr"/>
+          <a:lstStyle/>
+          <a:p>
+            <a:pPr indent="0" marL="0">
+              <a:buNone/>
+            </a:pPr>
+            <a:r>
+              <a:rPr lang="en-US" sz="1400" dirty="0">
+                <a:solidFill>
+                  <a:srgbClr val="F1EFE6"/>
+                </a:solidFill>
+                <a:latin typeface="Consolas" pitchFamily="34" charset="0"/>
+                <a:ea typeface="Consolas" pitchFamily="34" charset="-122"/>
+                <a:cs typeface="Consolas" pitchFamily="34" charset="-120"/>
+              </a:rPr>
+              <a:t>Install:  https://github.com/saxenavansh070-droid/nextrole/releases/download/v1.0.0/NextRole-Setup-1.0.0.exe</a:t>
+            </a:r>
+            <a:endParaRPr lang="en-US" sz="1400" dirty="0"/>
+          </a:p>
+        </p:txBody>
+      </p:sp>
+      <p:sp>
+        <p:nvSpPr>
+          <p:cNvPr id="6" name="Text 4"/>
+          <p:cNvSpPr/>
+          <p:nvPr/>
+        </p:nvSpPr>
+        <p:spPr>
+          <a:xfrm>
+            <a:off x="822960" y="3017520"/>
+            <a:ext cx="10789920" cy="457200"/>
+          </a:xfrm>
+          <a:prstGeom prst="rect">
+            <a:avLst/>
+          </a:prstGeom>
+          <a:noFill/>
+          <a:ln/>
+        </p:spPr>
+        <p:txBody>
+          <a:bodyPr wrap="square" rtlCol="0" anchor="ctr"/>
+          <a:lstStyle/>
+          <a:p>
+            <a:pPr indent="0" marL="0">
+              <a:buNone/>
+            </a:pPr>
+            <a:r>
+              <a:rPr lang="en-US" sz="1800" dirty="0">
+                <a:solidFill>
+                  <a:srgbClr val="F1EFE6"/>
+                </a:solidFill>
+                <a:latin typeface="Consolas" pitchFamily="34" charset="0"/>
+                <a:ea typeface="Consolas" pitchFamily="34" charset="-122"/>
+                <a:cs typeface="Consolas" pitchFamily="34" charset="-120"/>
+              </a:rPr>
+              <a:t>Repo:     https://github.com/saxenavansh070-droid/nextrole</a:t>
+            </a:r>
+            <a:endParaRPr lang="en-US" sz="1800" dirty="0"/>
+          </a:p>
+        </p:txBody>
+      </p:sp>
+      <p:sp>
+        <p:nvSpPr>
+          <p:cNvPr id="7" name="Text 5"/>
+          <p:cNvSpPr/>
+          <p:nvPr/>
+        </p:nvSpPr>
+        <p:spPr>
+          <a:xfrm>
+            <a:off x="777240" y="3794760"/>
             <a:ext cx="10515600" cy="4023360"/>
           </a:xfrm>
           <a:prstGeom prst="rect">
@@ -3020,17 +3172,17 @@
               <a:buChar char="•"/>
             </a:pPr>
             <a:r>
-              <a:rPr lang="en-US" sz="1800" dirty="0">
+              <a:rPr lang="en-US" sz="1600" dirty="0">
                 <a:solidFill>
-                  <a:srgbClr val="ECE9DB"/>
+                  <a:srgbClr val="F1EFE6"/>
                 </a:solidFill>
                 <a:latin typeface="Segoe UI" pitchFamily="34" charset="0"/>
                 <a:ea typeface="Segoe UI" pitchFamily="34" charset="-122"/>
                 <a:cs typeface="Segoe UI" pitchFamily="34" charset="-120"/>
               </a:rPr>
-              <a:t>Web app: http://localhost:4000 after npm run build &amp;&amp; npm start</a:t>
-            </a:r>
-            <a:endParaRPr lang="en-US" sz="1800" dirty="0"/>
+              <a:t>Web app runs fully in your browser - sign in, upload, explore, save to your profile.</a:t>
+            </a:r>
+            <a:endParaRPr lang="en-US" sz="1600" dirty="0"/>
           </a:p>
           <a:p>
             <a:pPr marL="228600" indent="-228600">
@@ -3041,17 +3193,17 @@
               <a:buChar char="•"/>
             </a:pPr>
             <a:r>
-              <a:rPr lang="en-US" sz="1800" dirty="0">
+              <a:rPr lang="en-US" sz="1600" dirty="0">
                 <a:solidFill>
-                  <a:srgbClr val="ECE9DB"/>
+                  <a:srgbClr val="F1EFE6"/>
                 </a:solidFill>
                 <a:latin typeface="Segoe UI" pitchFamily="34" charset="0"/>
                 <a:ea typeface="Segoe UI" pitchFamily="34" charset="-122"/>
                 <a:cs typeface="Segoe UI" pitchFamily="34" charset="-120"/>
               </a:rPr>
-              <a:t>Desktop: Next Role.exe (release/win-unpacked) or npm run desktop</a:t>
-            </a:r>
-            <a:endParaRPr lang="en-US" sz="1800" dirty="0"/>
+              <a:t>Installer sets up the desktop app on Windows in one click.</a:t>
+            </a:r>
+            <a:endParaRPr lang="en-US" sz="1600" dirty="0"/>
           </a:p>
           <a:p>
             <a:pPr marL="228600" indent="-228600">
@@ -3062,23 +3214,23 @@
               <a:buChar char="•"/>
             </a:pPr>
             <a:r>
-              <a:rPr lang="en-US" sz="1800" dirty="0">
+              <a:rPr lang="en-US" sz="1600" dirty="0">
                 <a:solidFill>
-                  <a:srgbClr val="ECE9DB"/>
+                  <a:srgbClr val="F1EFE6"/>
                 </a:solidFill>
                 <a:latin typeface="Segoe UI" pitchFamily="34" charset="0"/>
                 <a:ea typeface="Segoe UI" pitchFamily="34" charset="-122"/>
                 <a:cs typeface="Segoe UI" pitchFamily="34" charset="-120"/>
               </a:rPr>
-              <a:t>Docs: README.md with full setup, env vars, and architecture.</a:t>
-            </a:r>
-            <a:endParaRPr lang="en-US" sz="1800" dirty="0"/>
+              <a:t>Docs: README.md with full setup, env vars, and architecture; docs/ has the source-code PDF.</a:t>
+            </a:r>
+            <a:endParaRPr lang="en-US" sz="1600" dirty="0"/>
           </a:p>
         </p:txBody>
       </p:sp>
       <p:sp>
         <p:nvSpPr>
-          <p:cNvPr id="6" name="Text 4"/>
+          <p:cNvPr id="8" name="Text 6"/>
           <p:cNvSpPr/>
           <p:nvPr/>
         </p:nvSpPr>
@@ -3103,7 +3255,7 @@
             <a:r>
               <a:rPr lang="en-US" sz="1800" i="1" dirty="0">
                 <a:solidFill>
-                  <a:srgbClr val="ECE9DB"/>
+                  <a:srgbClr val="F1EFE6"/>
                 </a:solidFill>
                 <a:latin typeface="Segoe UI" pitchFamily="34" charset="0"/>
                 <a:ea typeface="Segoe UI" pitchFamily="34" charset="-122"/>
@@ -3117,7 +3269,7 @@
       </p:sp>
       <p:sp>
         <p:nvSpPr>
-          <p:cNvPr id="7" name="Text 5"/>
+          <p:cNvPr id="9" name="Text 7"/>
           <p:cNvSpPr/>
           <p:nvPr/>
         </p:nvSpPr>
@@ -3142,7 +3294,7 @@
             <a:r>
               <a:rPr lang="en-US" sz="1000" dirty="0">
                 <a:solidFill>
-                  <a:srgbClr val="ECE9DB"/>
+                  <a:srgbClr val="F1EFE6"/>
                 </a:solidFill>
               </a:rPr>
               <a:t>nextrole  ·  10/10</a:t>
@@ -3383,6 +3535,76 @@
                                         <p:cTn id="21" dur="500"/>
                                         <p:tgtEl>
                                           <p:spTgt spid="7"/>
+                                        </p:tgtEl>
+                                      </p:cBhvr>
+                                    </p:animEffect>
+                                  </p:childTnLst>
+                                </p:cTn>
+                              </p:par>
+                              <p:par>
+                                <p:cTn id="23" presetID="10" presetClass="entr" presetSubtype="0" fill="hold" grpId="0" nodeType="withEffect">
+                                  <p:stCondLst>
+                                    <p:cond delay="2100"/>
+                                  </p:stCondLst>
+                                  <p:childTnLst>
+                                    <p:set>
+                                      <p:cBhvr>
+                                        <p:cTn id="22" dur="1" fill="hold">
+                                          <p:stCondLst>
+                                            <p:cond delay="0"/>
+                                          </p:stCondLst>
+                                        </p:cTn>
+                                        <p:tgtEl>
+                                          <p:spTgt spid="8"/>
+                                        </p:tgtEl>
+                                        <p:attrNameLst>
+                                          <p:attrName>style.visibility</p:attrName>
+                                        </p:attrNameLst>
+                                      </p:cBhvr>
+                                      <p:to>
+                                        <p:strVal val="visible"/>
+                                      </p:to>
+                                    </p:set>
+                                    <p:animEffect transition="in" filter="fade">
+                                      <p:cBhvr>
+                                        <p:cTn id="24" dur="500"/>
+                                        <p:tgtEl>
+                                          <p:spTgt spid="8"/>
+                                        </p:tgtEl>
+                                      </p:cBhvr>
+                                    </p:animEffect>
+                                  </p:childTnLst>
+                                </p:cTn>
+                              </p:par>
+                              <p:par>
+                                <p:cTn id="26" presetID="10" presetClass="entr" presetSubtype="0" fill="hold" grpId="0" nodeType="withEffect">
+                                  <p:stCondLst>
+                                    <p:cond delay="2450"/>
+                                  </p:stCondLst>
+                                  <p:childTnLst>
+                                    <p:set>
+                                      <p:cBhvr>
+                                        <p:cTn id="25" dur="1" fill="hold">
+                                          <p:stCondLst>
+                                            <p:cond delay="0"/>
+                                          </p:stCondLst>
+                                        </p:cTn>
+                                        <p:tgtEl>
+                                          <p:spTgt spid="9"/>
+                                        </p:tgtEl>
+                                        <p:attrNameLst>
+                                          <p:attrName>style.visibility</p:attrName>
+                                        </p:attrNameLst>
+                                      </p:cBhvr>
+                                      <p:to>
+                                        <p:strVal val="visible"/>
+                                      </p:to>
+                                    </p:set>
+                                    <p:animEffect transition="in" filter="fade">
+                                      <p:cBhvr>
+                                        <p:cTn id="27" dur="500"/>
+                                        <p:tgtEl>
+                                          <p:spTgt spid="9"/>
                                         </p:tgtEl>
                                       </p:cBhvr>
                                     </p:animEffect>
@@ -3459,7 +3681,7 @@
             <a:avLst/>
           </a:prstGeom>
           <a:solidFill>
-            <a:srgbClr val="E2603B"/>
+            <a:srgbClr val="E2603C"/>
           </a:solidFill>
           <a:ln/>
         </p:spPr>
@@ -3491,7 +3713,7 @@
             <a:r>
               <a:rPr lang="en-US" sz="1300" b="1" spc="300" kern="0" dirty="0">
                 <a:solidFill>
-                  <a:srgbClr val="E2603B"/>
+                  <a:srgbClr val="E2603C"/>
                 </a:solidFill>
                 <a:latin typeface="Segoe UI" pitchFamily="34" charset="0"/>
                 <a:ea typeface="Segoe UI" pitchFamily="34" charset="-122"/>
@@ -3530,7 +3752,7 @@
             <a:r>
               <a:rPr lang="en-US" sz="3400" b="1" dirty="0">
                 <a:solidFill>
-                  <a:srgbClr val="13211B"/>
+                  <a:srgbClr val="11372A"/>
                 </a:solidFill>
                 <a:latin typeface="Segoe UI" pitchFamily="34" charset="0"/>
                 <a:ea typeface="Segoe UI" pitchFamily="34" charset="-122"/>
@@ -3573,7 +3795,7 @@
             <a:r>
               <a:rPr lang="en-US" sz="1800" dirty="0">
                 <a:solidFill>
-                  <a:srgbClr val="13211B"/>
+                  <a:srgbClr val="11372A"/>
                 </a:solidFill>
                 <a:latin typeface="Segoe UI" pitchFamily="34" charset="0"/>
                 <a:ea typeface="Segoe UI" pitchFamily="34" charset="-122"/>
@@ -3594,7 +3816,7 @@
             <a:r>
               <a:rPr lang="en-US" sz="1800" dirty="0">
                 <a:solidFill>
-                  <a:srgbClr val="13211B"/>
+                  <a:srgbClr val="11372A"/>
                 </a:solidFill>
                 <a:latin typeface="Segoe UI" pitchFamily="34" charset="0"/>
                 <a:ea typeface="Segoe UI" pitchFamily="34" charset="-122"/>
@@ -3615,7 +3837,7 @@
             <a:r>
               <a:rPr lang="en-US" sz="1800" dirty="0">
                 <a:solidFill>
-                  <a:srgbClr val="13211B"/>
+                  <a:srgbClr val="11372A"/>
                 </a:solidFill>
                 <a:latin typeface="Segoe UI" pitchFamily="34" charset="0"/>
                 <a:ea typeface="Segoe UI" pitchFamily="34" charset="-122"/>
@@ -3636,7 +3858,7 @@
             <a:r>
               <a:rPr lang="en-US" sz="1800" dirty="0">
                 <a:solidFill>
-                  <a:srgbClr val="13211B"/>
+                  <a:srgbClr val="11372A"/>
                 </a:solidFill>
                 <a:latin typeface="Segoe UI" pitchFamily="34" charset="0"/>
                 <a:ea typeface="Segoe UI" pitchFamily="34" charset="-122"/>
@@ -3675,7 +3897,7 @@
             <a:r>
               <a:rPr lang="en-US" sz="1000" dirty="0">
                 <a:solidFill>
-                  <a:srgbClr val="6C7F6B"/>
+                  <a:srgbClr val="75897D"/>
                 </a:solidFill>
               </a:rPr>
               <a:t>nextrole  ·  2/10</a:t>
@@ -3957,7 +4179,7 @@
             <a:avLst/>
           </a:prstGeom>
           <a:solidFill>
-            <a:srgbClr val="E2603B"/>
+            <a:srgbClr val="E2603C"/>
           </a:solidFill>
           <a:ln/>
         </p:spPr>
@@ -3989,7 +4211,7 @@
             <a:r>
               <a:rPr lang="en-US" sz="1300" b="1" spc="300" kern="0" dirty="0">
                 <a:solidFill>
-                  <a:srgbClr val="E2603B"/>
+                  <a:srgbClr val="E2603C"/>
                 </a:solidFill>
                 <a:latin typeface="Segoe UI" pitchFamily="34" charset="0"/>
                 <a:ea typeface="Segoe UI" pitchFamily="34" charset="-122"/>
@@ -4028,7 +4250,7 @@
             <a:r>
               <a:rPr lang="en-US" sz="3400" b="1" dirty="0">
                 <a:solidFill>
-                  <a:srgbClr val="13211B"/>
+                  <a:srgbClr val="11372A"/>
                 </a:solidFill>
                 <a:latin typeface="Segoe UI" pitchFamily="34" charset="0"/>
                 <a:ea typeface="Segoe UI" pitchFamily="34" charset="-122"/>
@@ -4061,7 +4283,7 @@
           </a:solidFill>
           <a:ln w="19050">
             <a:solidFill>
-              <a:srgbClr val="ECE9DB"/>
+              <a:srgbClr val="F1EFE6"/>
             </a:solidFill>
             <a:prstDash val="solid"/>
           </a:ln>
@@ -4094,7 +4316,7 @@
             <a:r>
               <a:rPr lang="en-US" sz="2000" b="1" dirty="0">
                 <a:solidFill>
-                  <a:srgbClr val="E2603B"/>
+                  <a:srgbClr val="E2603C"/>
                 </a:solidFill>
                 <a:latin typeface="Segoe UI" pitchFamily="34" charset="0"/>
                 <a:ea typeface="Segoe UI" pitchFamily="34" charset="-122"/>
@@ -4133,13 +4355,13 @@
             <a:r>
               <a:rPr lang="en-US" sz="1400" dirty="0">
                 <a:solidFill>
-                  <a:srgbClr val="13211B"/>
+                  <a:srgbClr val="11372A"/>
                 </a:solidFill>
                 <a:latin typeface="Segoe UI" pitchFamily="34" charset="0"/>
                 <a:ea typeface="Segoe UI" pitchFamily="34" charset="-122"/>
                 <a:cs typeface="Segoe UI" pitchFamily="34" charset="-120"/>
               </a:rPr>
-              <a:t>PDF, DOCX, TXT - or paste text. Scans are read with OCR.</a:t>
+              <a:t>PDF, DOCX, TXT - or paste text. Scanned pages are read with OCR, right in the browser.</a:t>
             </a:r>
             <a:endParaRPr lang="en-US" sz="1400" dirty="0"/>
           </a:p>
@@ -4166,7 +4388,7 @@
           </a:solidFill>
           <a:ln w="19050">
             <a:solidFill>
-              <a:srgbClr val="ECE9DB"/>
+              <a:srgbClr val="F1EFE6"/>
             </a:solidFill>
             <a:prstDash val="solid"/>
           </a:ln>
@@ -4199,7 +4421,7 @@
             <a:r>
               <a:rPr lang="en-US" sz="2000" b="1" dirty="0">
                 <a:solidFill>
-                  <a:srgbClr val="E2603B"/>
+                  <a:srgbClr val="E2603C"/>
                 </a:solidFill>
                 <a:latin typeface="Segoe UI" pitchFamily="34" charset="0"/>
                 <a:ea typeface="Segoe UI" pitchFamily="34" charset="-122"/>
@@ -4238,13 +4460,13 @@
             <a:r>
               <a:rPr lang="en-US" sz="1400" dirty="0">
                 <a:solidFill>
-                  <a:srgbClr val="13211B"/>
+                  <a:srgbClr val="11372A"/>
                 </a:solidFill>
                 <a:latin typeface="Segoe UI" pitchFamily="34" charset="0"/>
                 <a:ea typeface="Segoe UI" pitchFamily="34" charset="-122"/>
                 <a:cs typeface="Segoe UI" pitchFamily="34" charset="-120"/>
               </a:rPr>
-              <a:t>163-skill catalogue + 30-role library scored in seconds. Grok AI optional.</a:t>
+              <a:t>163-skill catalogue + 30-role library scored in seconds. Grok AI upgrades it when a key is set.</a:t>
             </a:r>
             <a:endParaRPr lang="en-US" sz="1400" dirty="0"/>
           </a:p>
@@ -4271,7 +4493,7 @@
           </a:solidFill>
           <a:ln w="19050">
             <a:solidFill>
-              <a:srgbClr val="ECE9DB"/>
+              <a:srgbClr val="F1EFE6"/>
             </a:solidFill>
             <a:prstDash val="solid"/>
           </a:ln>
@@ -4304,7 +4526,7 @@
             <a:r>
               <a:rPr lang="en-US" sz="2000" b="1" dirty="0">
                 <a:solidFill>
-                  <a:srgbClr val="E2603B"/>
+                  <a:srgbClr val="E2603C"/>
                 </a:solidFill>
                 <a:latin typeface="Segoe UI" pitchFamily="34" charset="0"/>
                 <a:ea typeface="Segoe UI" pitchFamily="34" charset="-122"/>
@@ -4343,13 +4565,13 @@
             <a:r>
               <a:rPr lang="en-US" sz="1400" dirty="0">
                 <a:solidFill>
-                  <a:srgbClr val="13211B"/>
+                  <a:srgbClr val="11372A"/>
                 </a:solidFill>
                 <a:latin typeface="Segoe UI" pitchFamily="34" charset="0"/>
                 <a:ea typeface="Segoe UI" pitchFamily="34" charset="-122"/>
                 <a:cs typeface="Segoe UI" pitchFamily="34" charset="-120"/>
               </a:rPr>
-              <a:t>Ranked roles with match %, plain-English reasons, and skill checklists.</a:t>
+              <a:t>Ranked roles with match %, plain-English reasons, and a required-skills checklist per role.</a:t>
             </a:r>
             <a:endParaRPr lang="en-US" sz="1400" dirty="0"/>
           </a:p>
@@ -4382,7 +4604,7 @@
             <a:r>
               <a:rPr lang="en-US" sz="1700" i="1" dirty="0">
                 <a:solidFill>
-                  <a:srgbClr val="6C7F6B"/>
+                  <a:srgbClr val="75897D"/>
                 </a:solidFill>
                 <a:latin typeface="Segoe UI" pitchFamily="34" charset="0"/>
                 <a:ea typeface="Segoe UI" pitchFamily="34" charset="-122"/>
@@ -4421,7 +4643,7 @@
             <a:r>
               <a:rPr lang="en-US" sz="1000" dirty="0">
                 <a:solidFill>
-                  <a:srgbClr val="6C7F6B"/>
+                  <a:srgbClr val="75897D"/>
                 </a:solidFill>
               </a:rPr>
               <a:t>nextrole  ·  3/10</a:t>
@@ -5018,7 +5240,7 @@
             <a:avLst/>
           </a:prstGeom>
           <a:solidFill>
-            <a:srgbClr val="E2603B"/>
+            <a:srgbClr val="E2603C"/>
           </a:solidFill>
           <a:ln/>
         </p:spPr>
@@ -5050,7 +5272,7 @@
             <a:r>
               <a:rPr lang="en-US" sz="1300" b="1" spc="300" kern="0" dirty="0">
                 <a:solidFill>
-                  <a:srgbClr val="E2603B"/>
+                  <a:srgbClr val="E2603C"/>
                 </a:solidFill>
                 <a:latin typeface="Segoe UI" pitchFamily="34" charset="0"/>
                 <a:ea typeface="Segoe UI" pitchFamily="34" charset="-122"/>
@@ -5089,7 +5311,7 @@
             <a:r>
               <a:rPr lang="en-US" sz="3400" b="1" dirty="0">
                 <a:solidFill>
-                  <a:srgbClr val="13211B"/>
+                  <a:srgbClr val="11372A"/>
                 </a:solidFill>
                 <a:latin typeface="Segoe UI" pitchFamily="34" charset="0"/>
                 <a:ea typeface="Segoe UI" pitchFamily="34" charset="-122"/>
@@ -5132,7 +5354,7 @@
             <a:r>
               <a:rPr lang="en-US" sz="1800" dirty="0">
                 <a:solidFill>
-                  <a:srgbClr val="13211B"/>
+                  <a:srgbClr val="11372A"/>
                 </a:solidFill>
                 <a:latin typeface="Segoe UI" pitchFamily="34" charset="0"/>
                 <a:ea typeface="Segoe UI" pitchFamily="34" charset="-122"/>
@@ -5153,7 +5375,7 @@
             <a:r>
               <a:rPr lang="en-US" sz="1800" dirty="0">
                 <a:solidFill>
-                  <a:srgbClr val="13211B"/>
+                  <a:srgbClr val="11372A"/>
                 </a:solidFill>
                 <a:latin typeface="Segoe UI" pitchFamily="34" charset="0"/>
                 <a:ea typeface="Segoe UI" pitchFamily="34" charset="-122"/>
@@ -5174,13 +5396,13 @@
             <a:r>
               <a:rPr lang="en-US" sz="1800" dirty="0">
                 <a:solidFill>
-                  <a:srgbClr val="13211B"/>
+                  <a:srgbClr val="11372A"/>
                 </a:solidFill>
                 <a:latin typeface="Segoe UI" pitchFamily="34" charset="0"/>
                 <a:ea typeface="Segoe UI" pitchFamily="34" charset="-122"/>
                 <a:cs typeface="Segoe UI" pitchFamily="34" charset="-120"/>
               </a:rPr>
-              <a:t>Engine 3 - Tesseract OCR: renders each page as an image and reads it like eyes - rescues scanned / photographed resumes with no text layer.</a:t>
+              <a:t>Engine 3 - Tesseract OCR: renders each page as an image and reads it like eyes - rescues scanned or photographed resumes with no text layer.</a:t>
             </a:r>
             <a:endParaRPr lang="en-US" sz="1800" dirty="0"/>
           </a:p>
@@ -5195,7 +5417,7 @@
             <a:r>
               <a:rPr lang="en-US" sz="1800" dirty="0">
                 <a:solidFill>
-                  <a:srgbClr val="13211B"/>
+                  <a:srgbClr val="11372A"/>
                 </a:solidFill>
                 <a:latin typeface="Segoe UI" pitchFamily="34" charset="0"/>
                 <a:ea typeface="Segoe UI" pitchFamily="34" charset="-122"/>
@@ -5216,7 +5438,7 @@
             <a:r>
               <a:rPr lang="en-US" sz="1800" dirty="0">
                 <a:solidFill>
-                  <a:srgbClr val="13211B"/>
+                  <a:srgbClr val="11372A"/>
                 </a:solidFill>
                 <a:latin typeface="Segoe UI" pitchFamily="34" charset="0"/>
                 <a:ea typeface="Segoe UI" pitchFamily="34" charset="-122"/>
@@ -5255,7 +5477,7 @@
             <a:r>
               <a:rPr lang="en-US" sz="1000" dirty="0">
                 <a:solidFill>
-                  <a:srgbClr val="6C7F6B"/>
+                  <a:srgbClr val="75897D"/>
                 </a:solidFill>
               </a:rPr>
               <a:t>nextrole  ·  4/10</a:t>
@@ -5537,7 +5759,7 @@
             <a:avLst/>
           </a:prstGeom>
           <a:solidFill>
-            <a:srgbClr val="E2603B"/>
+            <a:srgbClr val="E2603C"/>
           </a:solidFill>
           <a:ln/>
         </p:spPr>
@@ -5569,7 +5791,7 @@
             <a:r>
               <a:rPr lang="en-US" sz="1300" b="1" spc="300" kern="0" dirty="0">
                 <a:solidFill>
-                  <a:srgbClr val="E2603B"/>
+                  <a:srgbClr val="E2603C"/>
                 </a:solidFill>
                 <a:latin typeface="Segoe UI" pitchFamily="34" charset="0"/>
                 <a:ea typeface="Segoe UI" pitchFamily="34" charset="-122"/>
@@ -5608,7 +5830,7 @@
             <a:r>
               <a:rPr lang="en-US" sz="3400" b="1" dirty="0">
                 <a:solidFill>
-                  <a:srgbClr val="13211B"/>
+                  <a:srgbClr val="11372A"/>
                 </a:solidFill>
                 <a:latin typeface="Segoe UI" pitchFamily="34" charset="0"/>
                 <a:ea typeface="Segoe UI" pitchFamily="34" charset="-122"/>
@@ -5651,7 +5873,7 @@
             <a:r>
               <a:rPr lang="en-US" sz="1800" dirty="0">
                 <a:solidFill>
-                  <a:srgbClr val="13211B"/>
+                  <a:srgbClr val="11372A"/>
                 </a:solidFill>
                 <a:latin typeface="Segoe UI" pitchFamily="34" charset="0"/>
                 <a:ea typeface="Segoe UI" pitchFamily="34" charset="-122"/>
@@ -5672,7 +5894,7 @@
             <a:r>
               <a:rPr lang="en-US" sz="1800" dirty="0">
                 <a:solidFill>
-                  <a:srgbClr val="13211B"/>
+                  <a:srgbClr val="11372A"/>
                 </a:solidFill>
                 <a:latin typeface="Segoe UI" pitchFamily="34" charset="0"/>
                 <a:ea typeface="Segoe UI" pitchFamily="34" charset="-122"/>
@@ -5693,7 +5915,7 @@
             <a:r>
               <a:rPr lang="en-US" sz="1800" dirty="0">
                 <a:solidFill>
-                  <a:srgbClr val="13211B"/>
+                  <a:srgbClr val="11372A"/>
                 </a:solidFill>
                 <a:latin typeface="Segoe UI" pitchFamily="34" charset="0"/>
                 <a:ea typeface="Segoe UI" pitchFamily="34" charset="-122"/>
@@ -5714,7 +5936,7 @@
             <a:r>
               <a:rPr lang="en-US" sz="1800" dirty="0">
                 <a:solidFill>
-                  <a:srgbClr val="13211B"/>
+                  <a:srgbClr val="11372A"/>
                 </a:solidFill>
                 <a:latin typeface="Segoe UI" pitchFamily="34" charset="0"/>
                 <a:ea typeface="Segoe UI" pitchFamily="34" charset="-122"/>
@@ -5735,13 +5957,13 @@
             <a:r>
               <a:rPr lang="en-US" sz="1800" dirty="0">
                 <a:solidFill>
-                  <a:srgbClr val="13211B"/>
+                  <a:srgbClr val="11372A"/>
                 </a:solidFill>
                 <a:latin typeface="Segoe UI" pitchFamily="34" charset="0"/>
                 <a:ea typeface="Segoe UI" pitchFamily="34" charset="-122"/>
                 <a:cs typeface="Segoe UI" pitchFamily="34" charset="-120"/>
               </a:rPr>
-              <a:t>Grok AI upgrades the same flow when GROK_API_KEY is set - local matcher is the safety net.</a:t>
+              <a:t>Grok AI upgrades the same flow when GROK_API_KEY is set - the local matcher is the safety net.</a:t>
             </a:r>
             <a:endParaRPr lang="en-US" sz="1800" dirty="0"/>
           </a:p>
@@ -5774,7 +5996,7 @@
             <a:r>
               <a:rPr lang="en-US" sz="1000" dirty="0">
                 <a:solidFill>
-                  <a:srgbClr val="6C7F6B"/>
+                  <a:srgbClr val="75897D"/>
                 </a:solidFill>
               </a:rPr>
               <a:t>nextrole  ·  5/10</a:t>
@@ -6056,7 +6278,7 @@
             <a:avLst/>
           </a:prstGeom>
           <a:solidFill>
-            <a:srgbClr val="E2603B"/>
+            <a:srgbClr val="E2603C"/>
           </a:solidFill>
           <a:ln/>
         </p:spPr>
@@ -6088,7 +6310,7 @@
             <a:r>
               <a:rPr lang="en-US" sz="1300" b="1" spc="300" kern="0" dirty="0">
                 <a:solidFill>
-                  <a:srgbClr val="E2603B"/>
+                  <a:srgbClr val="E2603C"/>
                 </a:solidFill>
                 <a:latin typeface="Segoe UI" pitchFamily="34" charset="0"/>
                 <a:ea typeface="Segoe UI" pitchFamily="34" charset="-122"/>
@@ -6127,7 +6349,7 @@
             <a:r>
               <a:rPr lang="en-US" sz="3400" b="1" dirty="0">
                 <a:solidFill>
-                  <a:srgbClr val="13211B"/>
+                  <a:srgbClr val="11372A"/>
                 </a:solidFill>
                 <a:latin typeface="Segoe UI" pitchFamily="34" charset="0"/>
                 <a:ea typeface="Segoe UI" pitchFamily="34" charset="-122"/>
@@ -6160,7 +6382,7 @@
           </a:solidFill>
           <a:ln w="19050">
             <a:solidFill>
-              <a:srgbClr val="ECE9DB"/>
+              <a:srgbClr val="F1EFE6"/>
             </a:solidFill>
             <a:prstDash val="solid"/>
           </a:ln>
@@ -6193,7 +6415,7 @@
             <a:r>
               <a:rPr lang="en-US" sz="2000" b="1" dirty="0">
                 <a:solidFill>
-                  <a:srgbClr val="11372A"/>
+                  <a:srgbClr val="123A2B"/>
                 </a:solidFill>
                 <a:latin typeface="Segoe UI" pitchFamily="34" charset="0"/>
                 <a:ea typeface="Segoe UI" pitchFamily="34" charset="-122"/>
@@ -6232,13 +6454,13 @@
             <a:r>
               <a:rPr lang="en-US" sz="1400" dirty="0">
                 <a:solidFill>
-                  <a:srgbClr val="13211B"/>
+                  <a:srgbClr val="11372A"/>
                 </a:solidFill>
                 <a:latin typeface="Segoe UI" pitchFamily="34" charset="0"/>
                 <a:ea typeface="Segoe UI" pitchFamily="34" charset="-122"/>
                 <a:cs typeface="Segoe UI" pitchFamily="34" charset="-120"/>
               </a:rPr>
-              <a:t>The landing interface: hero, dark-green upload card, and "Roles for you" results panel.</a:t>
+              <a:t>The landing interface: hero, dark-green upload card, and the "Roles for you" results panel.</a:t>
             </a:r>
             <a:endParaRPr lang="en-US" sz="1400" dirty="0"/>
           </a:p>
@@ -6265,7 +6487,7 @@
           </a:solidFill>
           <a:ln w="19050">
             <a:solidFill>
-              <a:srgbClr val="ECE9DB"/>
+              <a:srgbClr val="F1EFE6"/>
             </a:solidFill>
             <a:prstDash val="solid"/>
           </a:ln>
@@ -6298,7 +6520,7 @@
             <a:r>
               <a:rPr lang="en-US" sz="2000" b="1" dirty="0">
                 <a:solidFill>
-                  <a:srgbClr val="11372A"/>
+                  <a:srgbClr val="123A2B"/>
                 </a:solidFill>
                 <a:latin typeface="Segoe UI" pitchFamily="34" charset="0"/>
                 <a:ea typeface="Segoe UI" pitchFamily="34" charset="-122"/>
@@ -6337,7 +6559,7 @@
             <a:r>
               <a:rPr lang="en-US" sz="1400" dirty="0">
                 <a:solidFill>
-                  <a:srgbClr val="13211B"/>
+                  <a:srgbClr val="11372A"/>
                 </a:solidFill>
                 <a:latin typeface="Segoe UI" pitchFamily="34" charset="0"/>
                 <a:ea typeface="Segoe UI" pitchFamily="34" charset="-122"/>
@@ -6370,7 +6592,7 @@
           </a:solidFill>
           <a:ln w="19050">
             <a:solidFill>
-              <a:srgbClr val="ECE9DB"/>
+              <a:srgbClr val="F1EFE6"/>
             </a:solidFill>
             <a:prstDash val="solid"/>
           </a:ln>
@@ -6403,7 +6625,7 @@
             <a:r>
               <a:rPr lang="en-US" sz="2000" b="1" dirty="0">
                 <a:solidFill>
-                  <a:srgbClr val="11372A"/>
+                  <a:srgbClr val="123A2B"/>
                 </a:solidFill>
                 <a:latin typeface="Segoe UI" pitchFamily="34" charset="0"/>
                 <a:ea typeface="Segoe UI" pitchFamily="34" charset="-122"/>
@@ -6442,13 +6664,13 @@
             <a:r>
               <a:rPr lang="en-US" sz="1400" dirty="0">
                 <a:solidFill>
-                  <a:srgbClr val="13211B"/>
+                  <a:srgbClr val="11372A"/>
                 </a:solidFill>
                 <a:latin typeface="Segoe UI" pitchFamily="34" charset="0"/>
                 <a:ea typeface="Segoe UI" pitchFamily="34" charset="-122"/>
                 <a:cs typeface="Segoe UI" pitchFamily="34" charset="-120"/>
               </a:rPr>
-              <a:t>Saved analyses, top match, dates, filenames - history you control, deletable anytime.</a:t>
+              <a:t>Sign in with email + password, then find saved analyses, top match, dates and filenames - deletable anytime.</a:t>
             </a:r>
             <a:endParaRPr lang="en-US" sz="1400" dirty="0"/>
           </a:p>
@@ -6481,7 +6703,7 @@
             <a:r>
               <a:rPr lang="en-US" sz="1000" dirty="0">
                 <a:solidFill>
-                  <a:srgbClr val="6C7F6B"/>
+                  <a:srgbClr val="75897D"/>
                 </a:solidFill>
               </a:rPr>
               <a:t>nextrole  ·  6/10</a:t>
@@ -7043,7 +7265,7 @@
             <a:avLst/>
           </a:prstGeom>
           <a:solidFill>
-            <a:srgbClr val="E2603B"/>
+            <a:srgbClr val="E2603C"/>
           </a:solidFill>
           <a:ln/>
         </p:spPr>
@@ -7075,7 +7297,7 @@
             <a:r>
               <a:rPr lang="en-US" sz="1300" b="1" spc="300" kern="0" dirty="0">
                 <a:solidFill>
-                  <a:srgbClr val="E2603B"/>
+                  <a:srgbClr val="E2603C"/>
                 </a:solidFill>
                 <a:latin typeface="Segoe UI" pitchFamily="34" charset="0"/>
                 <a:ea typeface="Segoe UI" pitchFamily="34" charset="-122"/>
@@ -7114,7 +7336,7 @@
             <a:r>
               <a:rPr lang="en-US" sz="3400" b="1" dirty="0">
                 <a:solidFill>
-                  <a:srgbClr val="13211B"/>
+                  <a:srgbClr val="11372A"/>
                 </a:solidFill>
                 <a:latin typeface="Segoe UI" pitchFamily="34" charset="0"/>
                 <a:ea typeface="Segoe UI" pitchFamily="34" charset="-122"/>
@@ -7157,7 +7379,7 @@
             <a:r>
               <a:rPr lang="en-US" sz="1800" dirty="0">
                 <a:solidFill>
-                  <a:srgbClr val="13211B"/>
+                  <a:srgbClr val="11372A"/>
                 </a:solidFill>
                 <a:latin typeface="Segoe UI" pitchFamily="34" charset="0"/>
                 <a:ea typeface="Segoe UI" pitchFamily="34" charset="-122"/>
@@ -7178,13 +7400,13 @@
             <a:r>
               <a:rPr lang="en-US" sz="1800" dirty="0">
                 <a:solidFill>
-                  <a:srgbClr val="13211B"/>
+                  <a:srgbClr val="11372A"/>
                 </a:solidFill>
                 <a:latin typeface="Segoe UI" pitchFamily="34" charset="0"/>
                 <a:ea typeface="Segoe UI" pitchFamily="34" charset="-122"/>
                 <a:cs typeface="Segoe UI" pitchFamily="34" charset="-120"/>
               </a:rPr>
-              <a:t>Roles matched to your resume float to the top with an orange % match badge.</a:t>
+              <a:t>Match percentages appear ONLY after you upload or paste a resume - never before.</a:t>
             </a:r>
             <a:endParaRPr lang="en-US" sz="1800" dirty="0"/>
           </a:p>
@@ -7199,13 +7421,13 @@
             <a:r>
               <a:rPr lang="en-US" sz="1800" dirty="0">
                 <a:solidFill>
-                  <a:srgbClr val="13211B"/>
+                  <a:srgbClr val="11372A"/>
                 </a:solidFill>
                 <a:latin typeface="Segoe UI" pitchFamily="34" charset="0"/>
                 <a:ea typeface="Segoe UI" pitchFamily="34" charset="-122"/>
                 <a:cs typeface="Segoe UI" pitchFamily="34" charset="-120"/>
               </a:rPr>
-              <a:t>The selector lists every role; choosing one reveals its full required-skills checklist.</a:t>
+              <a:t>Once analysed, matched roles float to the top with an orange % match badge.</a:t>
             </a:r>
             <a:endParaRPr lang="en-US" sz="1800" dirty="0"/>
           </a:p>
@@ -7220,13 +7442,13 @@
             <a:r>
               <a:rPr lang="en-US" sz="1800" dirty="0">
                 <a:solidFill>
-                  <a:srgbClr val="13211B"/>
+                  <a:srgbClr val="11372A"/>
                 </a:solidFill>
                 <a:latin typeface="Segoe UI" pitchFamily="34" charset="0"/>
                 <a:ea typeface="Segoe UI" pitchFamily="34" charset="-122"/>
                 <a:cs typeface="Segoe UI" pitchFamily="34" charset="-120"/>
               </a:rPr>
-              <a:t>Skills you already have are ticked: "You have 4 of 9 skills" with a progress line.</a:t>
+              <a:t>The selector lists every role; choosing one reveals its full required-skills checklist.</a:t>
             </a:r>
             <a:endParaRPr lang="en-US" sz="1800" dirty="0"/>
           </a:p>
@@ -7241,13 +7463,13 @@
             <a:r>
               <a:rPr lang="en-US" sz="1800" dirty="0">
                 <a:solidFill>
-                  <a:srgbClr val="13211B"/>
+                  <a:srgbClr val="11372A"/>
                 </a:solidFill>
                 <a:latin typeface="Segoe UI" pitchFamily="34" charset="0"/>
                 <a:ea typeface="Segoe UI" pitchFamily="34" charset="-122"/>
                 <a:cs typeface="Segoe UI" pitchFamily="34" charset="-120"/>
               </a:rPr>
-              <a:t>Every card links to a full detail page with fit breakdown and next-step CTA.</a:t>
+              <a:t>Skills you already have are ticked: "You have 4 of 9 skills" with a progress line.</a:t>
             </a:r>
             <a:endParaRPr lang="en-US" sz="1800" dirty="0"/>
           </a:p>
@@ -7280,7 +7502,7 @@
             <a:r>
               <a:rPr lang="en-US" sz="1000" dirty="0">
                 <a:solidFill>
-                  <a:srgbClr val="6C7F6B"/>
+                  <a:srgbClr val="75897D"/>
                 </a:solidFill>
               </a:rPr>
               <a:t>nextrole  ·  7/10</a:t>
@@ -7562,7 +7784,7 @@
             <a:avLst/>
           </a:prstGeom>
           <a:solidFill>
-            <a:srgbClr val="E2603B"/>
+            <a:srgbClr val="E2603C"/>
           </a:solidFill>
           <a:ln/>
         </p:spPr>
@@ -7594,7 +7816,7 @@
             <a:r>
               <a:rPr lang="en-US" sz="1300" b="1" spc="300" kern="0" dirty="0">
                 <a:solidFill>
-                  <a:srgbClr val="E2603B"/>
+                  <a:srgbClr val="E2603C"/>
                 </a:solidFill>
                 <a:latin typeface="Segoe UI" pitchFamily="34" charset="0"/>
                 <a:ea typeface="Segoe UI" pitchFamily="34" charset="-122"/>
@@ -7633,13 +7855,13 @@
             <a:r>
               <a:rPr lang="en-US" sz="3400" b="1" dirty="0">
                 <a:solidFill>
-                  <a:srgbClr val="13211B"/>
+                  <a:srgbClr val="11372A"/>
                 </a:solidFill>
                 <a:latin typeface="Segoe UI" pitchFamily="34" charset="0"/>
                 <a:ea typeface="Segoe UI" pitchFamily="34" charset="-122"/>
                 <a:cs typeface="Segoe UI" pitchFamily="34" charset="-120"/>
               </a:rPr>
-              <a:t>Secure sign-in, zero lock-in</a:t>
+              <a:t>Secure sign-in, everywhere</a:t>
             </a:r>
             <a:endParaRPr lang="en-US" sz="3400" dirty="0"/>
           </a:p>
@@ -7676,13 +7898,13 @@
             <a:r>
               <a:rPr lang="en-US" sz="1800" dirty="0">
                 <a:solidFill>
-                  <a:srgbClr val="13211B"/>
+                  <a:srgbClr val="11372A"/>
                 </a:solidFill>
                 <a:latin typeface="Segoe UI" pitchFamily="34" charset="0"/>
                 <a:ea typeface="Segoe UI" pitchFamily="34" charset="-122"/>
                 <a:cs typeface="Segoe UI" pitchFamily="34" charset="-120"/>
               </a:rPr>
-              <a:t>Sign up: name + email + password. Sign in: email + password.</a:t>
+              <a:t>Sign up: name + email + password. Sign in: email + password - on the web app AND the desktop app.</a:t>
             </a:r>
             <a:endParaRPr lang="en-US" sz="1800" dirty="0"/>
           </a:p>
@@ -7697,13 +7919,13 @@
             <a:r>
               <a:rPr lang="en-US" sz="1800" dirty="0">
                 <a:solidFill>
-                  <a:srgbClr val="13211B"/>
+                  <a:srgbClr val="11372A"/>
                 </a:solidFill>
                 <a:latin typeface="Segoe UI" pitchFamily="34" charset="0"/>
                 <a:ea typeface="Segoe UI" pitchFamily="34" charset="-122"/>
                 <a:cs typeface="Segoe UI" pitchFamily="34" charset="-120"/>
               </a:rPr>
-              <a:t>Passwords hashed with scrypt (salted, constant-time compare) - never stored raw.</a:t>
+              <a:t>Full app: passwords hashed with scrypt (salted, constant-time compare); JWT sessions; MongoDB or file store.</a:t>
             </a:r>
             <a:endParaRPr lang="en-US" sz="1800" dirty="0"/>
           </a:p>
@@ -7718,13 +7940,13 @@
             <a:r>
               <a:rPr lang="en-US" sz="1800" dirty="0">
                 <a:solidFill>
-                  <a:srgbClr val="13211B"/>
+                  <a:srgbClr val="11372A"/>
                 </a:solidFill>
                 <a:latin typeface="Segoe UI" pitchFamily="34" charset="0"/>
                 <a:ea typeface="Segoe UI" pitchFamily="34" charset="-122"/>
                 <a:cs typeface="Segoe UI" pitchFamily="34" charset="-120"/>
               </a:rPr>
-              <a:t>Clear handling of wrong password, duplicate sign-up, and unknown email.</a:t>
+              <a:t>Hosted app: browser-local accounts hashed with salted SHA-256 via WebCrypto - resumes never leave the device.</a:t>
             </a:r>
             <a:endParaRPr lang="en-US" sz="1800" dirty="0"/>
           </a:p>
@@ -7739,7 +7961,7 @@
             <a:r>
               <a:rPr lang="en-US" sz="1800" dirty="0">
                 <a:solidFill>
-                  <a:srgbClr val="13211B"/>
+                  <a:srgbClr val="11372A"/>
                 </a:solidFill>
                 <a:latin typeface="Segoe UI" pitchFamily="34" charset="0"/>
                 <a:ea typeface="Segoe UI" pitchFamily="34" charset="-122"/>
@@ -7760,13 +7982,13 @@
             <a:r>
               <a:rPr lang="en-US" sz="1800" dirty="0">
                 <a:solidFill>
-                  <a:srgbClr val="13211B"/>
+                  <a:srgbClr val="11372A"/>
                 </a:solidFill>
                 <a:latin typeface="Segoe UI" pitchFamily="34" charset="0"/>
                 <a:ea typeface="Segoe UI" pitchFamily="34" charset="-122"/>
                 <a:cs typeface="Segoe UI" pitchFamily="34" charset="-120"/>
               </a:rPr>
-              <a:t>JWT sessions; MongoDB when configured, else a file store inside nextrole.json.</a:t>
+              <a:t>Session-scoped results: percentages never linger across visits.</a:t>
             </a:r>
             <a:endParaRPr lang="en-US" sz="1800" dirty="0"/>
           </a:p>
@@ -7799,7 +8021,7 @@
             <a:r>
               <a:rPr lang="en-US" sz="1000" dirty="0">
                 <a:solidFill>
-                  <a:srgbClr val="6C7F6B"/>
+                  <a:srgbClr val="75897D"/>
                 </a:solidFill>
               </a:rPr>
               <a:t>nextrole  ·  8/10</a:t>
@@ -8081,7 +8303,7 @@
             <a:avLst/>
           </a:prstGeom>
           <a:solidFill>
-            <a:srgbClr val="E2603B"/>
+            <a:srgbClr val="E2603C"/>
           </a:solidFill>
           <a:ln/>
         </p:spPr>
@@ -8113,7 +8335,7 @@
             <a:r>
               <a:rPr lang="en-US" sz="1300" b="1" spc="300" kern="0" dirty="0">
                 <a:solidFill>
-                  <a:srgbClr val="E2603B"/>
+                  <a:srgbClr val="E2603C"/>
                 </a:solidFill>
                 <a:latin typeface="Segoe UI" pitchFamily="34" charset="0"/>
                 <a:ea typeface="Segoe UI" pitchFamily="34" charset="-122"/>
@@ -8152,13 +8374,13 @@
             <a:r>
               <a:rPr lang="en-US" sz="3400" b="1" dirty="0">
                 <a:solidFill>
-                  <a:srgbClr val="13211B"/>
+                  <a:srgbClr val="11372A"/>
                 </a:solidFill>
                 <a:latin typeface="Segoe UI" pitchFamily="34" charset="0"/>
                 <a:ea typeface="Segoe UI" pitchFamily="34" charset="-122"/>
                 <a:cs typeface="Segoe UI" pitchFamily="34" charset="-120"/>
               </a:rPr>
-              <a:t>Web app + desktop app</a:t>
+              <a:t>Web, hosted, and desktop</a:t>
             </a:r>
             <a:endParaRPr lang="en-US" sz="3400" dirty="0"/>
           </a:p>
@@ -8195,13 +8417,13 @@
             <a:r>
               <a:rPr lang="en-US" sz="1800" dirty="0">
                 <a:solidFill>
-                  <a:srgbClr val="13211B"/>
+                  <a:srgbClr val="11372A"/>
                 </a:solidFill>
                 <a:latin typeface="Segoe UI" pitchFamily="34" charset="0"/>
                 <a:ea typeface="Segoe UI" pitchFamily="34" charset="-122"/>
                 <a:cs typeface="Segoe UI" pitchFamily="34" charset="-120"/>
               </a:rPr>
-              <a:t>Dev mode: Vite dev server + API (npm run dev).</a:t>
+              <a:t>Live web app: saxenavansh070-droid.github.io/nextrole - full analysis in the browser, zero setup.</a:t>
             </a:r>
             <a:endParaRPr lang="en-US" sz="1800" dirty="0"/>
           </a:p>
@@ -8216,13 +8438,13 @@
             <a:r>
               <a:rPr lang="en-US" sz="1800" dirty="0">
                 <a:solidFill>
-                  <a:srgbClr val="13211B"/>
+                  <a:srgbClr val="11372A"/>
                 </a:solidFill>
                 <a:latin typeface="Segoe UI" pitchFamily="34" charset="0"/>
                 <a:ea typeface="Segoe UI" pitchFamily="34" charset="-122"/>
                 <a:cs typeface="Segoe UI" pitchFamily="34" charset="-120"/>
               </a:rPr>
-              <a:t>Production: one Node process serves UI + API from the same origin.</a:t>
+              <a:t>Local full stack: one Node process serves UI + API (npm run dev, or build + start).</a:t>
             </a:r>
             <a:endParaRPr lang="en-US" sz="1800" dirty="0"/>
           </a:p>
@@ -8237,13 +8459,13 @@
             <a:r>
               <a:rPr lang="en-US" sz="1800" dirty="0">
                 <a:solidFill>
-                  <a:srgbClr val="13211B"/>
+                  <a:srgbClr val="11372A"/>
                 </a:solidFill>
                 <a:latin typeface="Segoe UI" pitchFamily="34" charset="0"/>
                 <a:ea typeface="Segoe UI" pitchFamily="34" charset="-122"/>
                 <a:cs typeface="Segoe UI" pitchFamily="34" charset="-120"/>
               </a:rPr>
-              <a:t>Desktop: Electron wrapper - Next Role.exe opens the app in its own window, bundled server included.</a:t>
+              <a:t>Desktop: Electron wrapper - installs in one click via NextRole-Setup.exe, bundled server included.</a:t>
             </a:r>
             <a:endParaRPr lang="en-US" sz="1800" dirty="0"/>
           </a:p>
@@ -8258,13 +8480,13 @@
             <a:r>
               <a:rPr lang="en-US" sz="1800" dirty="0">
                 <a:solidFill>
-                  <a:srgbClr val="13211B"/>
+                  <a:srgbClr val="11372A"/>
                 </a:solidFill>
                 <a:latin typeface="Segoe UI" pitchFamily="34" charset="0"/>
                 <a:ea typeface="Segoe UI" pitchFamily="34" charset="-122"/>
                 <a:cs typeface="Segoe UI" pitchFamily="34" charset="-120"/>
               </a:rPr>
-              <a:t>Portable Windows build via electron-builder (no installer, no signing needed).</a:t>
+              <a:t>Icons, fonts and OCR language data bundle offline; Grok and MongoDB stay optional.</a:t>
             </a:r>
             <a:endParaRPr lang="en-US" sz="1800" dirty="0"/>
           </a:p>
@@ -8279,13 +8501,13 @@
             <a:r>
               <a:rPr lang="en-US" sz="1800" dirty="0">
                 <a:solidFill>
-                  <a:srgbClr val="13211B"/>
+                  <a:srgbClr val="11372A"/>
                 </a:solidFill>
                 <a:latin typeface="Segoe UI" pitchFamily="34" charset="0"/>
                 <a:ea typeface="Segoe UI" pitchFamily="34" charset="-122"/>
                 <a:cs typeface="Segoe UI" pitchFamily="34" charset="-120"/>
               </a:rPr>
-              <a:t>Graceful everywhere: runs fully without MongoDB, Grok, or Google keys.</a:t>
+              <a:t>Same codebase, same matching engine, three surfaces.</a:t>
             </a:r>
             <a:endParaRPr lang="en-US" sz="1800" dirty="0"/>
           </a:p>
@@ -8318,7 +8540,7 @@
             <a:r>
               <a:rPr lang="en-US" sz="1000" dirty="0">
                 <a:solidFill>
-                  <a:srgbClr val="6C7F6B"/>
+                  <a:srgbClr val="75897D"/>
                 </a:solidFill>
               </a:rPr>
               <a:t>nextrole  ·  9/10</a:t>

--- a/docs/NextRole-Presentation.pptx
+++ b/docs/NextRole-Presentation.pptx
@@ -1698,14 +1698,82 @@
       </p:sp>
       <p:sp>
         <p:nvSpPr>
-          <p:cNvPr id="3" name="Text 1"/>
-          <p:cNvSpPr/>
-          <p:nvPr/>
-        </p:nvSpPr>
-        <p:spPr>
-          <a:xfrm>
-            <a:off x="822960" y="1600200"/>
-            <a:ext cx="10515600" cy="1005840"/>
+          <p:cNvPr id="3" name="Shape 1"/>
+          <p:cNvSpPr/>
+          <p:nvPr/>
+        </p:nvSpPr>
+        <p:spPr>
+          <a:xfrm>
+            <a:off x="9692640" y="-1463040"/>
+            <a:ext cx="4206240" cy="4206240"/>
+          </a:xfrm>
+          <a:prstGeom prst="ellipse">
+            <a:avLst/>
+          </a:prstGeom>
+          <a:solidFill>
+            <a:srgbClr val="0D2C20">
+              <a:alpha val="65000"/>
+            </a:srgbClr>
+          </a:solidFill>
+          <a:ln/>
+        </p:spPr>
+      </p:sp>
+      <p:sp>
+        <p:nvSpPr>
+          <p:cNvPr id="4" name="Shape 2"/>
+          <p:cNvSpPr/>
+          <p:nvPr/>
+        </p:nvSpPr>
+        <p:spPr>
+          <a:xfrm>
+            <a:off x="-1280160" y="5120640"/>
+            <a:ext cx="3291840" cy="3291840"/>
+          </a:xfrm>
+          <a:prstGeom prst="ellipse">
+            <a:avLst/>
+          </a:prstGeom>
+          <a:solidFill>
+            <a:srgbClr val="E2603C">
+              <a:alpha val="18000"/>
+            </a:srgbClr>
+          </a:solidFill>
+          <a:ln/>
+        </p:spPr>
+      </p:sp>
+      <p:pic>
+        <p:nvPicPr>
+          <p:cNvPr id="5" name="Image 0" descr="C:/Users/Komal Saxena/OneDrive/Documents/Default Project/build/icon.png">    </p:cNvPr>
+          <p:cNvPicPr>
+            <a:picLocks noChangeAspect="1"/>
+          </p:cNvPicPr>
+          <p:nvPr/>
+        </p:nvPicPr>
+        <p:blipFill>
+          <a:blip r:embed="rId1"/>
+          <a:stretch>
+            <a:fillRect/>
+          </a:stretch>
+        </p:blipFill>
+        <p:spPr>
+          <a:xfrm>
+            <a:off x="822960" y="1417320"/>
+            <a:ext cx="1325880" cy="1325880"/>
+          </a:xfrm>
+          <a:prstGeom prst="rect">
+            <a:avLst/>
+          </a:prstGeom>
+        </p:spPr>
+      </p:pic>
+      <p:sp>
+        <p:nvSpPr>
+          <p:cNvPr id="6" name="Text 3"/>
+          <p:cNvSpPr/>
+          <p:nvPr/>
+        </p:nvSpPr>
+        <p:spPr>
+          <a:xfrm>
+            <a:off x="2377440" y="1371600"/>
+            <a:ext cx="9144000" cy="1005840"/>
           </a:xfrm>
           <a:prstGeom prst="rect">
             <a:avLst/>
@@ -1721,7 +1789,7 @@
               <a:buNone/>
             </a:pPr>
             <a:r>
-              <a:rPr lang="en-US" sz="5600" b="1" dirty="0">
+              <a:rPr lang="en-US" sz="5400" b="1" dirty="0">
                 <a:solidFill>
                   <a:srgbClr val="FFFFFF"/>
                 </a:solidFill>
@@ -1731,20 +1799,20 @@
               </a:rPr>
               <a:t>NEXT ROLE</a:t>
             </a:r>
-            <a:endParaRPr lang="en-US" sz="5600" dirty="0"/>
+            <a:endParaRPr lang="en-US" sz="5400" dirty="0"/>
           </a:p>
         </p:txBody>
       </p:sp>
       <p:sp>
         <p:nvSpPr>
-          <p:cNvPr id="4" name="Text 2"/>
-          <p:cNvSpPr/>
-          <p:nvPr/>
-        </p:nvSpPr>
-        <p:spPr>
-          <a:xfrm>
-            <a:off x="822960" y="2560320"/>
-            <a:ext cx="10515600" cy="731520"/>
+          <p:cNvPr id="7" name="Text 4"/>
+          <p:cNvSpPr/>
+          <p:nvPr/>
+        </p:nvSpPr>
+        <p:spPr>
+          <a:xfrm>
+            <a:off x="2395728" y="2331720"/>
+            <a:ext cx="9144000" cy="640080"/>
           </a:xfrm>
           <a:prstGeom prst="rect">
             <a:avLst/>
@@ -1760,7 +1828,7 @@
               <a:buNone/>
             </a:pPr>
             <a:r>
-              <a:rPr lang="en-US" sz="3000" dirty="0">
+              <a:rPr lang="en-US" sz="2800" dirty="0">
                 <a:solidFill>
                   <a:srgbClr val="F1EFE6"/>
                 </a:solidFill>
@@ -1770,20 +1838,20 @@
               </a:rPr>
               <a:t>Find work that fits.</a:t>
             </a:r>
-            <a:endParaRPr lang="en-US" sz="3000" dirty="0"/>
+            <a:endParaRPr lang="en-US" sz="2800" dirty="0"/>
           </a:p>
         </p:txBody>
       </p:sp>
       <p:sp>
         <p:nvSpPr>
-          <p:cNvPr id="5" name="Text 3"/>
-          <p:cNvSpPr/>
-          <p:nvPr/>
-        </p:nvSpPr>
-        <p:spPr>
-          <a:xfrm>
-            <a:off x="822960" y="3383280"/>
-            <a:ext cx="9601200" cy="548640"/>
+          <p:cNvPr id="8" name="Text 5"/>
+          <p:cNvSpPr/>
+          <p:nvPr/>
+        </p:nvSpPr>
+        <p:spPr>
+          <a:xfrm>
+            <a:off x="841248" y="3291840"/>
+            <a:ext cx="8778240" cy="822960"/>
           </a:xfrm>
           <a:prstGeom prst="rect">
             <a:avLst/>
@@ -1807,7 +1875,7 @@
                 <a:ea typeface="Segoe UI" pitchFamily="34" charset="-122"/>
                 <a:cs typeface="Segoe UI" pitchFamily="34" charset="-120"/>
               </a:rPr>
-              <a:t>Upload a resume - get ranked job roles with the exact skills each one needs.</a:t>
+              <a:t>Upload a resume - get ranked job roles with the exact skills each one needs. Even scanned resumes, read with OCR right in your browser.</a:t>
             </a:r>
             <a:endParaRPr lang="en-US" sz="1600" dirty="0"/>
           </a:p>
@@ -1815,18 +1883,18 @@
       </p:sp>
       <p:sp>
         <p:nvSpPr>
-          <p:cNvPr id="6" name="Shape 4"/>
-          <p:cNvSpPr/>
-          <p:nvPr/>
-        </p:nvSpPr>
-        <p:spPr>
-          <a:xfrm>
-            <a:off x="822960" y="4343400"/>
-            <a:ext cx="1371600" cy="502920"/>
+          <p:cNvPr id="9" name="Shape 6"/>
+          <p:cNvSpPr/>
+          <p:nvPr/>
+        </p:nvSpPr>
+        <p:spPr>
+          <a:xfrm>
+            <a:off x="841248" y="4389120"/>
+            <a:ext cx="1280160" cy="457200"/>
           </a:xfrm>
           <a:prstGeom prst="roundRect">
             <a:avLst>
-              <a:gd name="adj" fmla="val 21818"/>
+              <a:gd name="adj" fmla="val 20000"/>
             </a:avLst>
           </a:prstGeom>
           <a:solidFill>
@@ -1837,14 +1905,14 @@
       </p:sp>
       <p:sp>
         <p:nvSpPr>
-          <p:cNvPr id="7" name="Text 5"/>
-          <p:cNvSpPr/>
-          <p:nvPr/>
-        </p:nvSpPr>
-        <p:spPr>
-          <a:xfrm>
-            <a:off x="822960" y="4343400"/>
-            <a:ext cx="1371600" cy="502920"/>
+          <p:cNvPr id="10" name="Text 7"/>
+          <p:cNvSpPr/>
+          <p:nvPr/>
+        </p:nvSpPr>
+        <p:spPr>
+          <a:xfrm>
+            <a:off x="841248" y="4389120"/>
+            <a:ext cx="1280160" cy="457200"/>
           </a:xfrm>
           <a:prstGeom prst="rect">
             <a:avLst/>
@@ -1860,7 +1928,7 @@
               <a:buNone/>
             </a:pPr>
             <a:r>
-              <a:rPr lang="en-US" sz="1300" b="1" dirty="0">
+              <a:rPr lang="en-US" sz="1250" b="1" dirty="0">
                 <a:solidFill>
                   <a:srgbClr val="F1EFE6"/>
                 </a:solidFill>
@@ -1870,24 +1938,24 @@
               </a:rPr>
               <a:t>React</a:t>
             </a:r>
-            <a:endParaRPr lang="en-US" sz="1300" dirty="0"/>
+            <a:endParaRPr lang="en-US" sz="1250" dirty="0"/>
           </a:p>
         </p:txBody>
       </p:sp>
       <p:sp>
         <p:nvSpPr>
-          <p:cNvPr id="8" name="Shape 6"/>
-          <p:cNvSpPr/>
-          <p:nvPr/>
-        </p:nvSpPr>
-        <p:spPr>
-          <a:xfrm>
-            <a:off x="2331720" y="4343400"/>
-            <a:ext cx="2011680" cy="502920"/>
+          <p:cNvPr id="11" name="Shape 8"/>
+          <p:cNvSpPr/>
+          <p:nvPr/>
+        </p:nvSpPr>
+        <p:spPr>
+          <a:xfrm>
+            <a:off x="2258568" y="4389120"/>
+            <a:ext cx="1920240" cy="457200"/>
           </a:xfrm>
           <a:prstGeom prst="roundRect">
             <a:avLst>
-              <a:gd name="adj" fmla="val 21818"/>
+              <a:gd name="adj" fmla="val 20000"/>
             </a:avLst>
           </a:prstGeom>
           <a:solidFill>
@@ -1898,14 +1966,14 @@
       </p:sp>
       <p:sp>
         <p:nvSpPr>
-          <p:cNvPr id="9" name="Text 7"/>
-          <p:cNvSpPr/>
-          <p:nvPr/>
-        </p:nvSpPr>
-        <p:spPr>
-          <a:xfrm>
-            <a:off x="2331720" y="4343400"/>
-            <a:ext cx="2011680" cy="502920"/>
+          <p:cNvPr id="12" name="Text 9"/>
+          <p:cNvSpPr/>
+          <p:nvPr/>
+        </p:nvSpPr>
+        <p:spPr>
+          <a:xfrm>
+            <a:off x="2258568" y="4389120"/>
+            <a:ext cx="1920240" cy="457200"/>
           </a:xfrm>
           <a:prstGeom prst="rect">
             <a:avLst/>
@@ -1921,7 +1989,7 @@
               <a:buNone/>
             </a:pPr>
             <a:r>
-              <a:rPr lang="en-US" sz="1300" b="1" dirty="0">
+              <a:rPr lang="en-US" sz="1250" b="1" dirty="0">
                 <a:solidFill>
                   <a:srgbClr val="F1EFE6"/>
                 </a:solidFill>
@@ -1931,24 +1999,24 @@
               </a:rPr>
               <a:t>Node + Express</a:t>
             </a:r>
-            <a:endParaRPr lang="en-US" sz="1300" dirty="0"/>
+            <a:endParaRPr lang="en-US" sz="1250" dirty="0"/>
           </a:p>
         </p:txBody>
       </p:sp>
       <p:sp>
         <p:nvSpPr>
-          <p:cNvPr id="10" name="Shape 8"/>
-          <p:cNvSpPr/>
-          <p:nvPr/>
-        </p:nvSpPr>
-        <p:spPr>
-          <a:xfrm>
-            <a:off x="4480560" y="4343400"/>
-            <a:ext cx="1645920" cy="502920"/>
+          <p:cNvPr id="13" name="Shape 10"/>
+          <p:cNvSpPr/>
+          <p:nvPr/>
+        </p:nvSpPr>
+        <p:spPr>
+          <a:xfrm>
+            <a:off x="4315968" y="4389120"/>
+            <a:ext cx="1554480" cy="457200"/>
           </a:xfrm>
           <a:prstGeom prst="roundRect">
             <a:avLst>
-              <a:gd name="adj" fmla="val 21818"/>
+              <a:gd name="adj" fmla="val 20000"/>
             </a:avLst>
           </a:prstGeom>
           <a:solidFill>
@@ -1959,14 +2027,14 @@
       </p:sp>
       <p:sp>
         <p:nvSpPr>
-          <p:cNvPr id="11" name="Text 9"/>
-          <p:cNvSpPr/>
-          <p:nvPr/>
-        </p:nvSpPr>
-        <p:spPr>
-          <a:xfrm>
-            <a:off x="4480560" y="4343400"/>
-            <a:ext cx="1645920" cy="502920"/>
+          <p:cNvPr id="14" name="Text 11"/>
+          <p:cNvSpPr/>
+          <p:nvPr/>
+        </p:nvSpPr>
+        <p:spPr>
+          <a:xfrm>
+            <a:off x="4315968" y="4389120"/>
+            <a:ext cx="1554480" cy="457200"/>
           </a:xfrm>
           <a:prstGeom prst="rect">
             <a:avLst/>
@@ -1982,7 +2050,7 @@
               <a:buNone/>
             </a:pPr>
             <a:r>
-              <a:rPr lang="en-US" sz="1300" b="1" dirty="0">
+              <a:rPr lang="en-US" sz="1250" b="1" dirty="0">
                 <a:solidFill>
                   <a:srgbClr val="F1EFE6"/>
                 </a:solidFill>
@@ -1992,24 +2060,24 @@
               </a:rPr>
               <a:t>TypeScript</a:t>
             </a:r>
-            <a:endParaRPr lang="en-US" sz="1300" dirty="0"/>
+            <a:endParaRPr lang="en-US" sz="1250" dirty="0"/>
           </a:p>
         </p:txBody>
       </p:sp>
       <p:sp>
         <p:nvSpPr>
-          <p:cNvPr id="12" name="Shape 10"/>
-          <p:cNvSpPr/>
-          <p:nvPr/>
-        </p:nvSpPr>
-        <p:spPr>
-          <a:xfrm>
-            <a:off x="6263640" y="4343400"/>
-            <a:ext cx="1828800" cy="502920"/>
+          <p:cNvPr id="15" name="Shape 12"/>
+          <p:cNvSpPr/>
+          <p:nvPr/>
+        </p:nvSpPr>
+        <p:spPr>
+          <a:xfrm>
+            <a:off x="6007608" y="4389120"/>
+            <a:ext cx="1737360" cy="457200"/>
           </a:xfrm>
           <a:prstGeom prst="roundRect">
             <a:avLst>
-              <a:gd name="adj" fmla="val 21818"/>
+              <a:gd name="adj" fmla="val 20000"/>
             </a:avLst>
           </a:prstGeom>
           <a:solidFill>
@@ -2020,14 +2088,14 @@
       </p:sp>
       <p:sp>
         <p:nvSpPr>
-          <p:cNvPr id="13" name="Text 11"/>
-          <p:cNvSpPr/>
-          <p:nvPr/>
-        </p:nvSpPr>
-        <p:spPr>
-          <a:xfrm>
-            <a:off x="6263640" y="4343400"/>
-            <a:ext cx="1828800" cy="502920"/>
+          <p:cNvPr id="16" name="Text 13"/>
+          <p:cNvSpPr/>
+          <p:nvPr/>
+        </p:nvSpPr>
+        <p:spPr>
+          <a:xfrm>
+            <a:off x="6007608" y="4389120"/>
+            <a:ext cx="1737360" cy="457200"/>
           </a:xfrm>
           <a:prstGeom prst="rect">
             <a:avLst/>
@@ -2043,7 +2111,7 @@
               <a:buNone/>
             </a:pPr>
             <a:r>
-              <a:rPr lang="en-US" sz="1300" b="1" dirty="0">
+              <a:rPr lang="en-US" sz="1250" b="1" dirty="0">
                 <a:solidFill>
                   <a:srgbClr val="F1EFE6"/>
                 </a:solidFill>
@@ -2053,24 +2121,24 @@
               </a:rPr>
               <a:t>Tailwind CSS</a:t>
             </a:r>
-            <a:endParaRPr lang="en-US" sz="1300" dirty="0"/>
+            <a:endParaRPr lang="en-US" sz="1250" dirty="0"/>
           </a:p>
         </p:txBody>
       </p:sp>
       <p:sp>
         <p:nvSpPr>
-          <p:cNvPr id="14" name="Shape 12"/>
-          <p:cNvSpPr/>
-          <p:nvPr/>
-        </p:nvSpPr>
-        <p:spPr>
-          <a:xfrm>
-            <a:off x="8229600" y="4343400"/>
-            <a:ext cx="1463040" cy="502920"/>
+          <p:cNvPr id="17" name="Shape 14"/>
+          <p:cNvSpPr/>
+          <p:nvPr/>
+        </p:nvSpPr>
+        <p:spPr>
+          <a:xfrm>
+            <a:off x="7882128" y="4389120"/>
+            <a:ext cx="1371600" cy="457200"/>
           </a:xfrm>
           <a:prstGeom prst="roundRect">
             <a:avLst>
-              <a:gd name="adj" fmla="val 21818"/>
+              <a:gd name="adj" fmla="val 20000"/>
             </a:avLst>
           </a:prstGeom>
           <a:solidFill>
@@ -2081,14 +2149,14 @@
       </p:sp>
       <p:sp>
         <p:nvSpPr>
-          <p:cNvPr id="15" name="Text 13"/>
-          <p:cNvSpPr/>
-          <p:nvPr/>
-        </p:nvSpPr>
-        <p:spPr>
-          <a:xfrm>
-            <a:off x="8229600" y="4343400"/>
-            <a:ext cx="1463040" cy="502920"/>
+          <p:cNvPr id="18" name="Text 15"/>
+          <p:cNvSpPr/>
+          <p:nvPr/>
+        </p:nvSpPr>
+        <p:spPr>
+          <a:xfrm>
+            <a:off x="7882128" y="4389120"/>
+            <a:ext cx="1371600" cy="457200"/>
           </a:xfrm>
           <a:prstGeom prst="rect">
             <a:avLst/>
@@ -2104,7 +2172,7 @@
               <a:buNone/>
             </a:pPr>
             <a:r>
-              <a:rPr lang="en-US" sz="1300" b="1" dirty="0">
+              <a:rPr lang="en-US" sz="1250" b="1" dirty="0">
                 <a:solidFill>
                   <a:srgbClr val="F1EFE6"/>
                 </a:solidFill>
@@ -2114,24 +2182,24 @@
               </a:rPr>
               <a:t>MongoDB</a:t>
             </a:r>
-            <a:endParaRPr lang="en-US" sz="1300" dirty="0"/>
+            <a:endParaRPr lang="en-US" sz="1250" dirty="0"/>
           </a:p>
         </p:txBody>
       </p:sp>
       <p:sp>
         <p:nvSpPr>
-          <p:cNvPr id="16" name="Shape 14"/>
-          <p:cNvSpPr/>
-          <p:nvPr/>
-        </p:nvSpPr>
-        <p:spPr>
-          <a:xfrm>
-            <a:off x="9829800" y="4343400"/>
-            <a:ext cx="1371600" cy="502920"/>
+          <p:cNvPr id="19" name="Shape 16"/>
+          <p:cNvSpPr/>
+          <p:nvPr/>
+        </p:nvSpPr>
+        <p:spPr>
+          <a:xfrm>
+            <a:off x="9390888" y="4389120"/>
+            <a:ext cx="1280160" cy="457200"/>
           </a:xfrm>
           <a:prstGeom prst="roundRect">
             <a:avLst>
-              <a:gd name="adj" fmla="val 21818"/>
+              <a:gd name="adj" fmla="val 20000"/>
             </a:avLst>
           </a:prstGeom>
           <a:solidFill>
@@ -2142,14 +2210,14 @@
       </p:sp>
       <p:sp>
         <p:nvSpPr>
-          <p:cNvPr id="17" name="Text 15"/>
-          <p:cNvSpPr/>
-          <p:nvPr/>
-        </p:nvSpPr>
-        <p:spPr>
-          <a:xfrm>
-            <a:off x="9829800" y="4343400"/>
-            <a:ext cx="1371600" cy="502920"/>
+          <p:cNvPr id="20" name="Text 17"/>
+          <p:cNvSpPr/>
+          <p:nvPr/>
+        </p:nvSpPr>
+        <p:spPr>
+          <a:xfrm>
+            <a:off x="9390888" y="4389120"/>
+            <a:ext cx="1280160" cy="457200"/>
           </a:xfrm>
           <a:prstGeom prst="rect">
             <a:avLst/>
@@ -2165,7 +2233,7 @@
               <a:buNone/>
             </a:pPr>
             <a:r>
-              <a:rPr lang="en-US" sz="1300" b="1" dirty="0">
+              <a:rPr lang="en-US" sz="1250" b="1" dirty="0">
                 <a:solidFill>
                   <a:srgbClr val="FFFFFF"/>
                 </a:solidFill>
@@ -2175,19 +2243,19 @@
               </a:rPr>
               <a:t>Grok AI</a:t>
             </a:r>
-            <a:endParaRPr lang="en-US" sz="1300" dirty="0"/>
+            <a:endParaRPr lang="en-US" sz="1250" dirty="0"/>
           </a:p>
         </p:txBody>
       </p:sp>
       <p:sp>
         <p:nvSpPr>
-          <p:cNvPr id="18" name="Text 16"/>
-          <p:cNvSpPr/>
-          <p:nvPr/>
-        </p:nvSpPr>
-        <p:spPr>
-          <a:xfrm>
-            <a:off x="822960" y="5394960"/>
+          <p:cNvPr id="21" name="Text 18"/>
+          <p:cNvSpPr/>
+          <p:nvPr/>
+        </p:nvSpPr>
+        <p:spPr>
+          <a:xfrm>
+            <a:off x="841248" y="5577840"/>
             <a:ext cx="10515600" cy="457200"/>
           </a:xfrm>
           <a:prstGeom prst="rect">
@@ -2204,23 +2272,23 @@
               <a:buNone/>
             </a:pPr>
             <a:r>
-              <a:rPr lang="en-US" sz="1500" dirty="0">
+              <a:rPr lang="en-US" sz="1350" dirty="0">
                 <a:solidFill>
                   <a:srgbClr val="9FB89B"/>
                 </a:solidFill>
-                <a:latin typeface="Segoe UI" pitchFamily="34" charset="0"/>
-                <a:ea typeface="Segoe UI" pitchFamily="34" charset="-122"/>
-                <a:cs typeface="Segoe UI" pitchFamily="34" charset="-120"/>
+                <a:latin typeface="Consolas" pitchFamily="34" charset="0"/>
+                <a:ea typeface="Consolas" pitchFamily="34" charset="-122"/>
+                <a:cs typeface="Consolas" pitchFamily="34" charset="-120"/>
               </a:rPr>
-              <a:t>Live on the web  ·  One-click Windows installer  ·  Open source on GitHub</a:t>
+              <a:t>saxenavansh070-droid.github.io/nextrole  ·  one-click Windows installer  ·  open source</a:t>
             </a:r>
-            <a:endParaRPr lang="en-US" sz="1500" dirty="0"/>
+            <a:endParaRPr lang="en-US" sz="1350" dirty="0"/>
           </a:p>
         </p:txBody>
       </p:sp>
       <p:sp>
         <p:nvSpPr>
-          <p:cNvPr id="19" name="Text 17"/>
+          <p:cNvPr id="22" name="Text 19"/>
           <p:cNvSpPr/>
           <p:nvPr/>
         </p:nvSpPr>
@@ -2320,7 +2388,7 @@
                               <p:par>
                                 <p:cTn id="8" presetID="10" presetClass="entr" presetSubtype="0" fill="hold" grpId="0" nodeType="withEffect">
                                   <p:stCondLst>
-                                    <p:cond delay="350"/>
+                                    <p:cond delay="320"/>
                                   </p:stCondLst>
                                   <p:childTnLst>
                                     <p:set>
@@ -2355,7 +2423,7 @@
                               <p:par>
                                 <p:cTn id="11" presetID="10" presetClass="entr" presetSubtype="0" fill="hold" grpId="0" nodeType="withEffect">
                                   <p:stCondLst>
-                                    <p:cond delay="700"/>
+                                    <p:cond delay="640"/>
                                   </p:stCondLst>
                                   <p:childTnLst>
                                     <p:set>
@@ -2390,7 +2458,7 @@
                               <p:par>
                                 <p:cTn id="14" presetID="10" presetClass="entr" presetSubtype="0" fill="hold" grpId="0" nodeType="withEffect">
                                   <p:stCondLst>
-                                    <p:cond delay="1050"/>
+                                    <p:cond delay="960"/>
                                   </p:stCondLst>
                                   <p:childTnLst>
                                     <p:set>
@@ -2425,7 +2493,7 @@
                               <p:par>
                                 <p:cTn id="17" presetID="10" presetClass="entr" presetSubtype="0" fill="hold" grpId="0" nodeType="withEffect">
                                   <p:stCondLst>
-                                    <p:cond delay="1400"/>
+                                    <p:cond delay="1280"/>
                                   </p:stCondLst>
                                   <p:childTnLst>
                                     <p:set>
@@ -2460,7 +2528,7 @@
                               <p:par>
                                 <p:cTn id="20" presetID="10" presetClass="entr" presetSubtype="0" fill="hold" grpId="0" nodeType="withEffect">
                                   <p:stCondLst>
-                                    <p:cond delay="1750"/>
+                                    <p:cond delay="1600"/>
                                   </p:stCondLst>
                                   <p:childTnLst>
                                     <p:set>
@@ -2495,7 +2563,7 @@
                               <p:par>
                                 <p:cTn id="23" presetID="10" presetClass="entr" presetSubtype="0" fill="hold" grpId="0" nodeType="withEffect">
                                   <p:stCondLst>
-                                    <p:cond delay="2100"/>
+                                    <p:cond delay="1920"/>
                                   </p:stCondLst>
                                   <p:childTnLst>
                                     <p:set>
@@ -2530,7 +2598,7 @@
                               <p:par>
                                 <p:cTn id="26" presetID="10" presetClass="entr" presetSubtype="0" fill="hold" grpId="0" nodeType="withEffect">
                                   <p:stCondLst>
-                                    <p:cond delay="2450"/>
+                                    <p:cond delay="2240"/>
                                   </p:stCondLst>
                                   <p:childTnLst>
                                     <p:set>
@@ -2565,7 +2633,7 @@
                               <p:par>
                                 <p:cTn id="29" presetID="10" presetClass="entr" presetSubtype="0" fill="hold" grpId="0" nodeType="withEffect">
                                   <p:stCondLst>
-                                    <p:cond delay="2800"/>
+                                    <p:cond delay="2560"/>
                                   </p:stCondLst>
                                   <p:childTnLst>
                                     <p:set>
@@ -2600,7 +2668,7 @@
                               <p:par>
                                 <p:cTn id="32" presetID="10" presetClass="entr" presetSubtype="0" fill="hold" grpId="0" nodeType="withEffect">
                                   <p:stCondLst>
-                                    <p:cond delay="3150"/>
+                                    <p:cond delay="2880"/>
                                   </p:stCondLst>
                                   <p:childTnLst>
                                     <p:set>
@@ -2635,7 +2703,7 @@
                               <p:par>
                                 <p:cTn id="35" presetID="10" presetClass="entr" presetSubtype="0" fill="hold" grpId="0" nodeType="withEffect">
                                   <p:stCondLst>
-                                    <p:cond delay="3500"/>
+                                    <p:cond delay="3200"/>
                                   </p:stCondLst>
                                   <p:childTnLst>
                                     <p:set>
@@ -2670,7 +2738,7 @@
                               <p:par>
                                 <p:cTn id="38" presetID="10" presetClass="entr" presetSubtype="0" fill="hold" grpId="0" nodeType="withEffect">
                                   <p:stCondLst>
-                                    <p:cond delay="3850"/>
+                                    <p:cond delay="3520"/>
                                   </p:stCondLst>
                                   <p:childTnLst>
                                     <p:set>
@@ -2705,7 +2773,7 @@
                               <p:par>
                                 <p:cTn id="41" presetID="10" presetClass="entr" presetSubtype="0" fill="hold" grpId="0" nodeType="withEffect">
                                   <p:stCondLst>
-                                    <p:cond delay="4200"/>
+                                    <p:cond delay="3840"/>
                                   </p:stCondLst>
                                   <p:childTnLst>
                                     <p:set>
@@ -2740,7 +2808,7 @@
                               <p:par>
                                 <p:cTn id="44" presetID="10" presetClass="entr" presetSubtype="0" fill="hold" grpId="0" nodeType="withEffect">
                                   <p:stCondLst>
-                                    <p:cond delay="4550"/>
+                                    <p:cond delay="4160"/>
                                   </p:stCondLst>
                                   <p:childTnLst>
                                     <p:set>
@@ -2775,7 +2843,7 @@
                               <p:par>
                                 <p:cTn id="47" presetID="10" presetClass="entr" presetSubtype="0" fill="hold" grpId="0" nodeType="withEffect">
                                   <p:stCondLst>
-                                    <p:cond delay="4900"/>
+                                    <p:cond delay="4480"/>
                                   </p:stCondLst>
                                   <p:childTnLst>
                                     <p:set>
@@ -2810,7 +2878,7 @@
                               <p:par>
                                 <p:cTn id="50" presetID="10" presetClass="entr" presetSubtype="0" fill="hold" grpId="0" nodeType="withEffect">
                                   <p:stCondLst>
-                                    <p:cond delay="5250"/>
+                                    <p:cond delay="4800"/>
                                   </p:stCondLst>
                                   <p:childTnLst>
                                     <p:set>
@@ -2845,7 +2913,7 @@
                               <p:par>
                                 <p:cTn id="53" presetID="10" presetClass="entr" presetSubtype="0" fill="hold" grpId="0" nodeType="withEffect">
                                   <p:stCondLst>
-                                    <p:cond delay="5600"/>
+                                    <p:cond delay="5120"/>
                                   </p:stCondLst>
                                   <p:childTnLst>
                                     <p:set>
@@ -2880,7 +2948,7 @@
                               <p:par>
                                 <p:cTn id="56" presetID="10" presetClass="entr" presetSubtype="0" fill="hold" grpId="0" nodeType="withEffect">
                                   <p:stCondLst>
-                                    <p:cond delay="5950"/>
+                                    <p:cond delay="5440"/>
                                   </p:stCondLst>
                                   <p:childTnLst>
                                     <p:set>
@@ -2906,6 +2974,111 @@
                                         <p:cTn id="57" dur="500"/>
                                         <p:tgtEl>
                                           <p:spTgt spid="19"/>
+                                        </p:tgtEl>
+                                      </p:cBhvr>
+                                    </p:animEffect>
+                                  </p:childTnLst>
+                                </p:cTn>
+                              </p:par>
+                              <p:par>
+                                <p:cTn id="59" presetID="10" presetClass="entr" presetSubtype="0" fill="hold" grpId="0" nodeType="withEffect">
+                                  <p:stCondLst>
+                                    <p:cond delay="5760"/>
+                                  </p:stCondLst>
+                                  <p:childTnLst>
+                                    <p:set>
+                                      <p:cBhvr>
+                                        <p:cTn id="58" dur="1" fill="hold">
+                                          <p:stCondLst>
+                                            <p:cond delay="0"/>
+                                          </p:stCondLst>
+                                        </p:cTn>
+                                        <p:tgtEl>
+                                          <p:spTgt spid="20"/>
+                                        </p:tgtEl>
+                                        <p:attrNameLst>
+                                          <p:attrName>style.visibility</p:attrName>
+                                        </p:attrNameLst>
+                                      </p:cBhvr>
+                                      <p:to>
+                                        <p:strVal val="visible"/>
+                                      </p:to>
+                                    </p:set>
+                                    <p:animEffect transition="in" filter="fade">
+                                      <p:cBhvr>
+                                        <p:cTn id="60" dur="500"/>
+                                        <p:tgtEl>
+                                          <p:spTgt spid="20"/>
+                                        </p:tgtEl>
+                                      </p:cBhvr>
+                                    </p:animEffect>
+                                  </p:childTnLst>
+                                </p:cTn>
+                              </p:par>
+                              <p:par>
+                                <p:cTn id="62" presetID="10" presetClass="entr" presetSubtype="0" fill="hold" grpId="0" nodeType="withEffect">
+                                  <p:stCondLst>
+                                    <p:cond delay="6080"/>
+                                  </p:stCondLst>
+                                  <p:childTnLst>
+                                    <p:set>
+                                      <p:cBhvr>
+                                        <p:cTn id="61" dur="1" fill="hold">
+                                          <p:stCondLst>
+                                            <p:cond delay="0"/>
+                                          </p:stCondLst>
+                                        </p:cTn>
+                                        <p:tgtEl>
+                                          <p:spTgt spid="21"/>
+                                        </p:tgtEl>
+                                        <p:attrNameLst>
+                                          <p:attrName>style.visibility</p:attrName>
+                                        </p:attrNameLst>
+                                      </p:cBhvr>
+                                      <p:to>
+                                        <p:strVal val="visible"/>
+                                      </p:to>
+                                    </p:set>
+                                    <p:animEffect transition="in" filter="fade">
+                                      <p:cBhvr>
+                                        <p:cTn id="63" dur="500"/>
+                                        <p:tgtEl>
+                                          <p:spTgt spid="21"/>
+                                        </p:tgtEl>
+                                      </p:cBhvr>
+                                    </p:animEffect>
+                                  </p:childTnLst>
+                                </p:cTn>
+                              </p:par>
+                              <p:par>
+                                <p:cTn id="65" presetID="10" presetClass="entr" presetSubtype="0" fill="hold" grpId="0" nodeType="withEffect">
+                                  <p:stCondLst>
+                                    <p:cond delay="6400"/>
+                                  </p:stCondLst>
+                                  <p:childTnLst>
+                                    <p:set>
+                                      <p:cBhvr>
+                                        <p:cTn id="64" dur="1" fill="hold">
+                                          <p:stCondLst>
+                                            <p:cond delay="0"/>
+                                          </p:stCondLst>
+                                        </p:cTn>
+                                        <p:tgtEl>
+                                          <p:spTgt spid="22"/>
+                                        </p:tgtEl>
+                                        <p:attrNameLst>
+                                          <p:attrName>style.visibility</p:attrName>
+                                        </p:attrNameLst>
+                                      </p:cBhvr>
+                                      <p:to>
+                                        <p:strVal val="visible"/>
+                                      </p:to>
+                                    </p:set>
+                                    <p:animEffect transition="in" filter="fade">
+                                      <p:cBhvr>
+                                        <p:cTn id="66" dur="500"/>
+                                        <p:tgtEl>
+                                          <p:spTgt spid="22"/>
                                         </p:tgtEl>
                                       </p:cBhvr>
                                     </p:animEffect>
@@ -2989,14 +3162,60 @@
       </p:sp>
       <p:sp>
         <p:nvSpPr>
-          <p:cNvPr id="3" name="Text 1"/>
-          <p:cNvSpPr/>
-          <p:nvPr/>
-        </p:nvSpPr>
-        <p:spPr>
-          <a:xfrm>
-            <a:off x="822960" y="914400"/>
-            <a:ext cx="10515600" cy="822960"/>
+          <p:cNvPr id="3" name="Shape 1"/>
+          <p:cNvSpPr/>
+          <p:nvPr/>
+        </p:nvSpPr>
+        <p:spPr>
+          <a:xfrm>
+            <a:off x="10058400" y="4754880"/>
+            <a:ext cx="3474720" cy="3474720"/>
+          </a:xfrm>
+          <a:prstGeom prst="ellipse">
+            <a:avLst/>
+          </a:prstGeom>
+          <a:solidFill>
+            <a:srgbClr val="0D2C20">
+              <a:alpha val="65000"/>
+            </a:srgbClr>
+          </a:solidFill>
+          <a:ln/>
+        </p:spPr>
+      </p:sp>
+      <p:pic>
+        <p:nvPicPr>
+          <p:cNvPr id="4" name="Image 0" descr="C:/Users/Komal Saxena/OneDrive/Documents/Default Project/build/icon.png">    </p:cNvPr>
+          <p:cNvPicPr>
+            <a:picLocks noChangeAspect="1"/>
+          </p:cNvPicPr>
+          <p:nvPr/>
+        </p:nvPicPr>
+        <p:blipFill>
+          <a:blip r:embed="rId1"/>
+          <a:stretch>
+            <a:fillRect/>
+          </a:stretch>
+        </p:blipFill>
+        <p:spPr>
+          <a:xfrm>
+            <a:off x="822960" y="777240"/>
+            <a:ext cx="914400" cy="914400"/>
+          </a:xfrm>
+          <a:prstGeom prst="rect">
+            <a:avLst/>
+          </a:prstGeom>
+        </p:spPr>
+      </p:pic>
+      <p:sp>
+        <p:nvSpPr>
+          <p:cNvPr id="5" name="Text 2"/>
+          <p:cNvSpPr/>
+          <p:nvPr/>
+        </p:nvSpPr>
+        <p:spPr>
+          <a:xfrm>
+            <a:off x="1965960" y="777240"/>
+            <a:ext cx="9144000" cy="822960"/>
           </a:xfrm>
           <a:prstGeom prst="rect">
             <a:avLst/>
@@ -3012,7 +3231,7 @@
               <a:buNone/>
             </a:pPr>
             <a:r>
-              <a:rPr lang="en-US" sz="4000" b="1" dirty="0">
+              <a:rPr lang="en-US" sz="3800" b="1" dirty="0">
                 <a:solidFill>
                   <a:srgbClr val="FFFFFF"/>
                 </a:solidFill>
@@ -3022,20 +3241,20 @@
               </a:rPr>
               <a:t>Try it now</a:t>
             </a:r>
-            <a:endParaRPr lang="en-US" sz="4000" dirty="0"/>
+            <a:endParaRPr lang="en-US" sz="3800" dirty="0"/>
           </a:p>
         </p:txBody>
       </p:sp>
       <p:sp>
         <p:nvSpPr>
-          <p:cNvPr id="4" name="Text 2"/>
-          <p:cNvSpPr/>
-          <p:nvPr/>
-        </p:nvSpPr>
-        <p:spPr>
-          <a:xfrm>
-            <a:off x="822960" y="1920240"/>
-            <a:ext cx="10789920" cy="457200"/>
+          <p:cNvPr id="6" name="Text 3"/>
+          <p:cNvSpPr/>
+          <p:nvPr/>
+        </p:nvSpPr>
+        <p:spPr>
+          <a:xfrm>
+            <a:off x="868680" y="2103120"/>
+            <a:ext cx="10881360" cy="457200"/>
           </a:xfrm>
           <a:prstGeom prst="rect">
             <a:avLst/>
@@ -3051,7 +3270,7 @@
               <a:buNone/>
             </a:pPr>
             <a:r>
-              <a:rPr lang="en-US" sz="1800" dirty="0">
+              <a:rPr lang="en-US" sz="1700" dirty="0">
                 <a:solidFill>
                   <a:srgbClr val="F1EFE6"/>
                 </a:solidFill>
@@ -3061,20 +3280,20 @@
               </a:rPr>
               <a:t>App:      https://saxenavansh070-droid.github.io/nextrole/</a:t>
             </a:r>
-            <a:endParaRPr lang="en-US" sz="1800" dirty="0"/>
+            <a:endParaRPr lang="en-US" sz="1700" dirty="0"/>
           </a:p>
         </p:txBody>
       </p:sp>
       <p:sp>
         <p:nvSpPr>
-          <p:cNvPr id="5" name="Text 3"/>
-          <p:cNvSpPr/>
-          <p:nvPr/>
-        </p:nvSpPr>
-        <p:spPr>
-          <a:xfrm>
-            <a:off x="822960" y="2468880"/>
-            <a:ext cx="10789920" cy="457200"/>
+          <p:cNvPr id="7" name="Text 4"/>
+          <p:cNvSpPr/>
+          <p:nvPr/>
+        </p:nvSpPr>
+        <p:spPr>
+          <a:xfrm>
+            <a:off x="868680" y="2697480"/>
+            <a:ext cx="10881360" cy="457200"/>
           </a:xfrm>
           <a:prstGeom prst="rect">
             <a:avLst/>
@@ -3098,7 +3317,7 @@
                 <a:ea typeface="Consolas" pitchFamily="34" charset="-122"/>
                 <a:cs typeface="Consolas" pitchFamily="34" charset="-120"/>
               </a:rPr>
-              <a:t>Install:  https://github.com/saxenavansh070-droid/nextrole/releases/download/v1.0.0/NextRole-Setup-1.0.0.exe</a:t>
+              <a:t>Install:  github.com/saxenavansh070-droid/nextrole/releases/download/v1.0.0/NextRole-Setup-1.0.0.exe</a:t>
             </a:r>
             <a:endParaRPr lang="en-US" sz="1400" dirty="0"/>
           </a:p>
@@ -3106,14 +3325,14 @@
       </p:sp>
       <p:sp>
         <p:nvSpPr>
-          <p:cNvPr id="6" name="Text 4"/>
-          <p:cNvSpPr/>
-          <p:nvPr/>
-        </p:nvSpPr>
-        <p:spPr>
-          <a:xfrm>
-            <a:off x="822960" y="3017520"/>
-            <a:ext cx="10789920" cy="457200"/>
+          <p:cNvPr id="8" name="Text 5"/>
+          <p:cNvSpPr/>
+          <p:nvPr/>
+        </p:nvSpPr>
+        <p:spPr>
+          <a:xfrm>
+            <a:off x="868680" y="3291840"/>
+            <a:ext cx="10881360" cy="457200"/>
           </a:xfrm>
           <a:prstGeom prst="rect">
             <a:avLst/>
@@ -3129,7 +3348,7 @@
               <a:buNone/>
             </a:pPr>
             <a:r>
-              <a:rPr lang="en-US" sz="1800" dirty="0">
+              <a:rPr lang="en-US" sz="1700" dirty="0">
                 <a:solidFill>
                   <a:srgbClr val="F1EFE6"/>
                 </a:solidFill>
@@ -3137,21 +3356,21 @@
                 <a:ea typeface="Consolas" pitchFamily="34" charset="-122"/>
                 <a:cs typeface="Consolas" pitchFamily="34" charset="-120"/>
               </a:rPr>
-              <a:t>Repo:     https://github.com/saxenavansh070-droid/nextrole</a:t>
+              <a:t>Repo:     github.com/saxenavansh070-droid/nextrole</a:t>
             </a:r>
-            <a:endParaRPr lang="en-US" sz="1800" dirty="0"/>
+            <a:endParaRPr lang="en-US" sz="1700" dirty="0"/>
           </a:p>
         </p:txBody>
       </p:sp>
       <p:sp>
         <p:nvSpPr>
-          <p:cNvPr id="7" name="Text 5"/>
-          <p:cNvSpPr/>
-          <p:nvPr/>
-        </p:nvSpPr>
-        <p:spPr>
-          <a:xfrm>
-            <a:off x="777240" y="3794760"/>
+          <p:cNvPr id="9" name="Text 6"/>
+          <p:cNvSpPr/>
+          <p:nvPr/>
+        </p:nvSpPr>
+        <p:spPr>
+          <a:xfrm>
+            <a:off x="777240" y="4206240"/>
             <a:ext cx="10515600" cy="4023360"/>
           </a:xfrm>
           <a:prstGeom prst="rect">
@@ -3166,36 +3385,36 @@
           <a:p>
             <a:pPr marL="228600" indent="-228600">
               <a:lnSpc>
-                <a:spcPct val="135000"/>
+                <a:spcPct val="130000"/>
               </a:lnSpc>
               <a:buSzPct val="100000"/>
               <a:buChar char="•"/>
             </a:pPr>
             <a:r>
-              <a:rPr lang="en-US" sz="1600" dirty="0">
+              <a:rPr lang="en-US" sz="1500" dirty="0">
                 <a:solidFill>
-                  <a:srgbClr val="F1EFE6"/>
+                  <a:srgbClr val="C9D4C4"/>
                 </a:solidFill>
                 <a:latin typeface="Segoe UI" pitchFamily="34" charset="0"/>
                 <a:ea typeface="Segoe UI" pitchFamily="34" charset="-122"/>
                 <a:cs typeface="Segoe UI" pitchFamily="34" charset="-120"/>
               </a:rPr>
-              <a:t>Web app runs fully in your browser - sign in, upload, explore, save to your profile.</a:t>
+              <a:t>Sign in or create an account right on the hosted app.</a:t>
             </a:r>
-            <a:endParaRPr lang="en-US" sz="1600" dirty="0"/>
+            <a:endParaRPr lang="en-US" sz="1500" dirty="0"/>
           </a:p>
           <a:p>
             <a:pPr marL="228600" indent="-228600">
               <a:lnSpc>
-                <a:spcPct val="135000"/>
+                <a:spcPct val="130000"/>
               </a:lnSpc>
               <a:buSzPct val="100000"/>
               <a:buChar char="•"/>
             </a:pPr>
             <a:r>
-              <a:rPr lang="en-US" sz="1600" dirty="0">
+              <a:rPr lang="en-US" sz="1500" dirty="0">
                 <a:solidFill>
-                  <a:srgbClr val="F1EFE6"/>
+                  <a:srgbClr val="C9D4C4"/>
                 </a:solidFill>
                 <a:latin typeface="Segoe UI" pitchFamily="34" charset="0"/>
                 <a:ea typeface="Segoe UI" pitchFamily="34" charset="-122"/>
@@ -3203,41 +3422,41 @@
               </a:rPr>
               <a:t>Installer sets up the desktop app on Windows in one click.</a:t>
             </a:r>
-            <a:endParaRPr lang="en-US" sz="1600" dirty="0"/>
+            <a:endParaRPr lang="en-US" sz="1500" dirty="0"/>
           </a:p>
           <a:p>
             <a:pPr marL="228600" indent="-228600">
               <a:lnSpc>
-                <a:spcPct val="135000"/>
+                <a:spcPct val="130000"/>
               </a:lnSpc>
               <a:buSzPct val="100000"/>
               <a:buChar char="•"/>
             </a:pPr>
             <a:r>
-              <a:rPr lang="en-US" sz="1600" dirty="0">
+              <a:rPr lang="en-US" sz="1500" dirty="0">
                 <a:solidFill>
-                  <a:srgbClr val="F1EFE6"/>
+                  <a:srgbClr val="C9D4C4"/>
                 </a:solidFill>
                 <a:latin typeface="Segoe UI" pitchFamily="34" charset="0"/>
                 <a:ea typeface="Segoe UI" pitchFamily="34" charset="-122"/>
                 <a:cs typeface="Segoe UI" pitchFamily="34" charset="-120"/>
               </a:rPr>
-              <a:t>Docs: README.md with full setup, env vars, and architecture; docs/ has the source-code PDF.</a:t>
+              <a:t>Docs: README + docs/ with the source-code PDF and this deck.</a:t>
             </a:r>
-            <a:endParaRPr lang="en-US" sz="1600" dirty="0"/>
+            <a:endParaRPr lang="en-US" sz="1500" dirty="0"/>
           </a:p>
         </p:txBody>
       </p:sp>
       <p:sp>
         <p:nvSpPr>
-          <p:cNvPr id="8" name="Text 6"/>
-          <p:cNvSpPr/>
-          <p:nvPr/>
-        </p:nvSpPr>
-        <p:spPr>
-          <a:xfrm>
-            <a:off x="822960" y="5669280"/>
-            <a:ext cx="10515600" cy="548640"/>
+          <p:cNvPr id="10" name="Text 7"/>
+          <p:cNvSpPr/>
+          <p:nvPr/>
+        </p:nvSpPr>
+        <p:spPr>
+          <a:xfrm>
+            <a:off x="868680" y="5852160"/>
+            <a:ext cx="10515600" cy="457200"/>
           </a:xfrm>
           <a:prstGeom prst="rect">
             <a:avLst/>
@@ -3253,7 +3472,7 @@
               <a:buNone/>
             </a:pPr>
             <a:r>
-              <a:rPr lang="en-US" sz="1800" i="1" dirty="0">
+              <a:rPr lang="en-US" sz="1700" i="1" dirty="0">
                 <a:solidFill>
                   <a:srgbClr val="F1EFE6"/>
                 </a:solidFill>
@@ -3263,13 +3482,13 @@
               </a:rPr>
               <a:t>Next Role - find work that fits.  Thank you.</a:t>
             </a:r>
-            <a:endParaRPr lang="en-US" sz="1800" dirty="0"/>
+            <a:endParaRPr lang="en-US" sz="1700" dirty="0"/>
           </a:p>
         </p:txBody>
       </p:sp>
       <p:sp>
         <p:nvSpPr>
-          <p:cNvPr id="9" name="Text 7"/>
+          <p:cNvPr id="11" name="Text 8"/>
           <p:cNvSpPr/>
           <p:nvPr/>
         </p:nvSpPr>
@@ -3369,7 +3588,7 @@
                               <p:par>
                                 <p:cTn id="8" presetID="10" presetClass="entr" presetSubtype="0" fill="hold" grpId="0" nodeType="withEffect">
                                   <p:stCondLst>
-                                    <p:cond delay="350"/>
+                                    <p:cond delay="320"/>
                                   </p:stCondLst>
                                   <p:childTnLst>
                                     <p:set>
@@ -3404,7 +3623,7 @@
                               <p:par>
                                 <p:cTn id="11" presetID="10" presetClass="entr" presetSubtype="0" fill="hold" grpId="0" nodeType="withEffect">
                                   <p:stCondLst>
-                                    <p:cond delay="700"/>
+                                    <p:cond delay="640"/>
                                   </p:stCondLst>
                                   <p:childTnLst>
                                     <p:set>
@@ -3439,7 +3658,7 @@
                               <p:par>
                                 <p:cTn id="14" presetID="10" presetClass="entr" presetSubtype="0" fill="hold" grpId="0" nodeType="withEffect">
                                   <p:stCondLst>
-                                    <p:cond delay="1050"/>
+                                    <p:cond delay="960"/>
                                   </p:stCondLst>
                                   <p:childTnLst>
                                     <p:set>
@@ -3474,7 +3693,7 @@
                               <p:par>
                                 <p:cTn id="17" presetID="10" presetClass="entr" presetSubtype="0" fill="hold" grpId="0" nodeType="withEffect">
                                   <p:stCondLst>
-                                    <p:cond delay="1400"/>
+                                    <p:cond delay="1280"/>
                                   </p:stCondLst>
                                   <p:childTnLst>
                                     <p:set>
@@ -3509,7 +3728,7 @@
                               <p:par>
                                 <p:cTn id="20" presetID="10" presetClass="entr" presetSubtype="0" fill="hold" grpId="0" nodeType="withEffect">
                                   <p:stCondLst>
-                                    <p:cond delay="1750"/>
+                                    <p:cond delay="1600"/>
                                   </p:stCondLst>
                                   <p:childTnLst>
                                     <p:set>
@@ -3544,7 +3763,7 @@
                               <p:par>
                                 <p:cTn id="23" presetID="10" presetClass="entr" presetSubtype="0" fill="hold" grpId="0" nodeType="withEffect">
                                   <p:stCondLst>
-                                    <p:cond delay="2100"/>
+                                    <p:cond delay="1920"/>
                                   </p:stCondLst>
                                   <p:childTnLst>
                                     <p:set>
@@ -3579,7 +3798,7 @@
                               <p:par>
                                 <p:cTn id="26" presetID="10" presetClass="entr" presetSubtype="0" fill="hold" grpId="0" nodeType="withEffect">
                                   <p:stCondLst>
-                                    <p:cond delay="2450"/>
+                                    <p:cond delay="2240"/>
                                   </p:stCondLst>
                                   <p:childTnLst>
                                     <p:set>
@@ -3605,6 +3824,76 @@
                                         <p:cTn id="27" dur="500"/>
                                         <p:tgtEl>
                                           <p:spTgt spid="9"/>
+                                        </p:tgtEl>
+                                      </p:cBhvr>
+                                    </p:animEffect>
+                                  </p:childTnLst>
+                                </p:cTn>
+                              </p:par>
+                              <p:par>
+                                <p:cTn id="29" presetID="10" presetClass="entr" presetSubtype="0" fill="hold" grpId="0" nodeType="withEffect">
+                                  <p:stCondLst>
+                                    <p:cond delay="2560"/>
+                                  </p:stCondLst>
+                                  <p:childTnLst>
+                                    <p:set>
+                                      <p:cBhvr>
+                                        <p:cTn id="28" dur="1" fill="hold">
+                                          <p:stCondLst>
+                                            <p:cond delay="0"/>
+                                          </p:stCondLst>
+                                        </p:cTn>
+                                        <p:tgtEl>
+                                          <p:spTgt spid="10"/>
+                                        </p:tgtEl>
+                                        <p:attrNameLst>
+                                          <p:attrName>style.visibility</p:attrName>
+                                        </p:attrNameLst>
+                                      </p:cBhvr>
+                                      <p:to>
+                                        <p:strVal val="visible"/>
+                                      </p:to>
+                                    </p:set>
+                                    <p:animEffect transition="in" filter="fade">
+                                      <p:cBhvr>
+                                        <p:cTn id="30" dur="500"/>
+                                        <p:tgtEl>
+                                          <p:spTgt spid="10"/>
+                                        </p:tgtEl>
+                                      </p:cBhvr>
+                                    </p:animEffect>
+                                  </p:childTnLst>
+                                </p:cTn>
+                              </p:par>
+                              <p:par>
+                                <p:cTn id="32" presetID="10" presetClass="entr" presetSubtype="0" fill="hold" grpId="0" nodeType="withEffect">
+                                  <p:stCondLst>
+                                    <p:cond delay="2880"/>
+                                  </p:stCondLst>
+                                  <p:childTnLst>
+                                    <p:set>
+                                      <p:cBhvr>
+                                        <p:cTn id="31" dur="1" fill="hold">
+                                          <p:stCondLst>
+                                            <p:cond delay="0"/>
+                                          </p:stCondLst>
+                                        </p:cTn>
+                                        <p:tgtEl>
+                                          <p:spTgt spid="11"/>
+                                        </p:tgtEl>
+                                        <p:attrNameLst>
+                                          <p:attrName>style.visibility</p:attrName>
+                                        </p:attrNameLst>
+                                      </p:cBhvr>
+                                      <p:to>
+                                        <p:strVal val="visible"/>
+                                      </p:to>
+                                    </p:set>
+                                    <p:animEffect transition="in" filter="fade">
+                                      <p:cBhvr>
+                                        <p:cTn id="33" dur="500"/>
+                                        <p:tgtEl>
+                                          <p:spTgt spid="11"/>
                                         </p:tgtEl>
                                       </p:cBhvr>
                                     </p:animEffect>
@@ -3694,7 +3983,7 @@
         </p:nvSpPr>
         <p:spPr>
           <a:xfrm>
-            <a:off x="685800" y="502920"/>
+            <a:off x="685800" y="457200"/>
             <a:ext cx="10789920" cy="320040"/>
           </a:xfrm>
           <a:prstGeom prst="rect">
@@ -3733,8 +4022,74 @@
         </p:nvSpPr>
         <p:spPr>
           <a:xfrm>
-            <a:off x="685800" y="886968"/>
-            <a:ext cx="10789920" cy="914400"/>
+            <a:off x="685800" y="841248"/>
+            <a:ext cx="10789920" cy="731520"/>
+          </a:xfrm>
+          <a:prstGeom prst="rect">
+            <a:avLst/>
+          </a:prstGeom>
+          <a:noFill/>
+          <a:ln/>
+        </p:spPr>
+        <p:txBody>
+          <a:bodyPr wrap="square" rtlCol="0" anchor="ctr"/>
+          <a:lstStyle/>
+          <a:p>
+            <a:pPr indent="0" marL="0">
+              <a:buNone/>
+            </a:pPr>
+            <a:r>
+              <a:rPr lang="en-US" sz="3200" b="1" dirty="0">
+                <a:solidFill>
+                  <a:srgbClr val="11372A"/>
+                </a:solidFill>
+                <a:latin typeface="Segoe UI" pitchFamily="34" charset="0"/>
+                <a:ea typeface="Segoe UI" pitchFamily="34" charset="-122"/>
+                <a:cs typeface="Segoe UI" pitchFamily="34" charset="-120"/>
+              </a:rPr>
+              <a:t>Great resumes, wrong roles</a:t>
+            </a:r>
+            <a:endParaRPr lang="en-US" sz="3200" dirty="0"/>
+          </a:p>
+        </p:txBody>
+      </p:sp>
+      <p:sp>
+        <p:nvSpPr>
+          <p:cNvPr id="5" name="Shape 3"/>
+          <p:cNvSpPr/>
+          <p:nvPr/>
+        </p:nvSpPr>
+        <p:spPr>
+          <a:xfrm>
+            <a:off x="777240" y="1920240"/>
+            <a:ext cx="5029200" cy="1828800"/>
+          </a:xfrm>
+          <a:prstGeom prst="roundRect">
+            <a:avLst>
+              <a:gd name="adj" fmla="val 6000"/>
+            </a:avLst>
+          </a:prstGeom>
+          <a:solidFill>
+            <a:srgbClr val="FFFFFF"/>
+          </a:solidFill>
+          <a:ln w="19050">
+            <a:solidFill>
+              <a:srgbClr val="F1EFE6"/>
+            </a:solidFill>
+            <a:prstDash val="solid"/>
+          </a:ln>
+        </p:spPr>
+      </p:sp>
+      <p:sp>
+        <p:nvSpPr>
+          <p:cNvPr id="6" name="Text 4"/>
+          <p:cNvSpPr/>
+          <p:nvPr/>
+        </p:nvSpPr>
+        <p:spPr>
+          <a:xfrm>
+            <a:off x="1051560" y="2176272"/>
+            <a:ext cx="1005840" cy="822960"/>
           </a:xfrm>
           <a:prstGeom prst="rect">
             <a:avLst/>
@@ -3752,13 +4107,13 @@
             <a:r>
               <a:rPr lang="en-US" sz="3400" b="1" dirty="0">
                 <a:solidFill>
-                  <a:srgbClr val="11372A"/>
+                  <a:srgbClr val="E2603C"/>
                 </a:solidFill>
                 <a:latin typeface="Segoe UI" pitchFamily="34" charset="0"/>
                 <a:ea typeface="Segoe UI" pitchFamily="34" charset="-122"/>
                 <a:cs typeface="Segoe UI" pitchFamily="34" charset="-120"/>
               </a:rPr>
-              <a:t>Great resumes, wrong roles</a:t>
+              <a:t>01</a:t>
             </a:r>
             <a:endParaRPr lang="en-US" sz="3400" dirty="0"/>
           </a:p>
@@ -3766,14 +4121,14 @@
       </p:sp>
       <p:sp>
         <p:nvSpPr>
-          <p:cNvPr id="5" name="Text 3"/>
-          <p:cNvSpPr/>
-          <p:nvPr/>
-        </p:nvSpPr>
-        <p:spPr>
-          <a:xfrm>
-            <a:off x="777240" y="1828800"/>
-            <a:ext cx="10515600" cy="4023360"/>
+          <p:cNvPr id="7" name="Text 5"/>
+          <p:cNvSpPr/>
+          <p:nvPr/>
+        </p:nvSpPr>
+        <p:spPr>
+          <a:xfrm>
+            <a:off x="2103120" y="2194560"/>
+            <a:ext cx="3474720" cy="411480"/>
           </a:xfrm>
           <a:prstGeom prst="rect">
             <a:avLst/>
@@ -3785,15 +4140,11 @@
           <a:bodyPr wrap="square" rtlCol="0" anchor="ctr"/>
           <a:lstStyle/>
           <a:p>
-            <a:pPr marL="228600" indent="-228600">
-              <a:lnSpc>
-                <a:spcPct val="135000"/>
-              </a:lnSpc>
-              <a:buSzPct val="100000"/>
-              <a:buChar char="•"/>
+            <a:pPr indent="0" marL="0">
+              <a:buNone/>
             </a:pPr>
             <a:r>
-              <a:rPr lang="en-US" sz="1800" dirty="0">
+              <a:rPr lang="en-US" sz="1800" b="1" dirty="0">
                 <a:solidFill>
                   <a:srgbClr val="11372A"/>
                 </a:solidFill>
@@ -3801,20 +4152,143 @@
                 <a:ea typeface="Segoe UI" pitchFamily="34" charset="-122"/>
                 <a:cs typeface="Segoe UI" pitchFamily="34" charset="-120"/>
               </a:rPr>
-              <a:t>Job portals match on titles and keywords - not on what a person can actually do.</a:t>
+              <a:t>Titles, not skills</a:t>
             </a:r>
             <a:endParaRPr lang="en-US" sz="1800" dirty="0"/>
           </a:p>
+        </p:txBody>
+      </p:sp>
+      <p:sp>
+        <p:nvSpPr>
+          <p:cNvPr id="8" name="Text 6"/>
+          <p:cNvSpPr/>
+          <p:nvPr/>
+        </p:nvSpPr>
+        <p:spPr>
+          <a:xfrm>
+            <a:off x="2103120" y="2633472"/>
+            <a:ext cx="3474720" cy="914400"/>
+          </a:xfrm>
+          <a:prstGeom prst="rect">
+            <a:avLst/>
+          </a:prstGeom>
+          <a:noFill/>
+          <a:ln/>
+        </p:spPr>
+        <p:txBody>
+          <a:bodyPr wrap="square" rtlCol="0" anchor="ctr"/>
+          <a:lstStyle/>
           <a:p>
-            <a:pPr marL="228600" indent="-228600">
-              <a:lnSpc>
-                <a:spcPct val="135000"/>
-              </a:lnSpc>
-              <a:buSzPct val="100000"/>
-              <a:buChar char="•"/>
+            <a:pPr indent="0" marL="0">
+              <a:buNone/>
             </a:pPr>
             <a:r>
-              <a:rPr lang="en-US" sz="1800" dirty="0">
+              <a:rPr lang="en-US" sz="1300" dirty="0">
+                <a:solidFill>
+                  <a:srgbClr val="75897D"/>
+                </a:solidFill>
+                <a:latin typeface="Segoe UI" pitchFamily="34" charset="0"/>
+                <a:ea typeface="Segoe UI" pitchFamily="34" charset="-122"/>
+                <a:cs typeface="Segoe UI" pitchFamily="34" charset="-120"/>
+              </a:rPr>
+              <a:t>Job portals match on keywords and titles - not on what a person can actually do.</a:t>
+            </a:r>
+            <a:endParaRPr lang="en-US" sz="1300" dirty="0"/>
+          </a:p>
+        </p:txBody>
+      </p:sp>
+      <p:sp>
+        <p:nvSpPr>
+          <p:cNvPr id="9" name="Shape 7"/>
+          <p:cNvSpPr/>
+          <p:nvPr/>
+        </p:nvSpPr>
+        <p:spPr>
+          <a:xfrm>
+            <a:off x="6355080" y="1920240"/>
+            <a:ext cx="5029200" cy="1828800"/>
+          </a:xfrm>
+          <a:prstGeom prst="roundRect">
+            <a:avLst>
+              <a:gd name="adj" fmla="val 6000"/>
+            </a:avLst>
+          </a:prstGeom>
+          <a:solidFill>
+            <a:srgbClr val="FFFFFF"/>
+          </a:solidFill>
+          <a:ln w="19050">
+            <a:solidFill>
+              <a:srgbClr val="F1EFE6"/>
+            </a:solidFill>
+            <a:prstDash val="solid"/>
+          </a:ln>
+        </p:spPr>
+      </p:sp>
+      <p:sp>
+        <p:nvSpPr>
+          <p:cNvPr id="10" name="Text 8"/>
+          <p:cNvSpPr/>
+          <p:nvPr/>
+        </p:nvSpPr>
+        <p:spPr>
+          <a:xfrm>
+            <a:off x="6629400" y="2176272"/>
+            <a:ext cx="1005840" cy="822960"/>
+          </a:xfrm>
+          <a:prstGeom prst="rect">
+            <a:avLst/>
+          </a:prstGeom>
+          <a:noFill/>
+          <a:ln/>
+        </p:spPr>
+        <p:txBody>
+          <a:bodyPr wrap="square" rtlCol="0" anchor="ctr"/>
+          <a:lstStyle/>
+          <a:p>
+            <a:pPr indent="0" marL="0">
+              <a:buNone/>
+            </a:pPr>
+            <a:r>
+              <a:rPr lang="en-US" sz="3400" b="1" dirty="0">
+                <a:solidFill>
+                  <a:srgbClr val="E2603C"/>
+                </a:solidFill>
+                <a:latin typeface="Segoe UI" pitchFamily="34" charset="0"/>
+                <a:ea typeface="Segoe UI" pitchFamily="34" charset="-122"/>
+                <a:cs typeface="Segoe UI" pitchFamily="34" charset="-120"/>
+              </a:rPr>
+              <a:t>02</a:t>
+            </a:r>
+            <a:endParaRPr lang="en-US" sz="3400" dirty="0"/>
+          </a:p>
+        </p:txBody>
+      </p:sp>
+      <p:sp>
+        <p:nvSpPr>
+          <p:cNvPr id="11" name="Text 9"/>
+          <p:cNvSpPr/>
+          <p:nvPr/>
+        </p:nvSpPr>
+        <p:spPr>
+          <a:xfrm>
+            <a:off x="7680960" y="2194560"/>
+            <a:ext cx="3474720" cy="411480"/>
+          </a:xfrm>
+          <a:prstGeom prst="rect">
+            <a:avLst/>
+          </a:prstGeom>
+          <a:noFill/>
+          <a:ln/>
+        </p:spPr>
+        <p:txBody>
+          <a:bodyPr wrap="square" rtlCol="0" anchor="ctr"/>
+          <a:lstStyle/>
+          <a:p>
+            <a:pPr indent="0" marL="0">
+              <a:buNone/>
+            </a:pPr>
+            <a:r>
+              <a:rPr lang="en-US" sz="1800" b="1" dirty="0">
                 <a:solidFill>
                   <a:srgbClr val="11372A"/>
                 </a:solidFill>
@@ -3822,20 +4296,143 @@
                 <a:ea typeface="Segoe UI" pitchFamily="34" charset="-122"/>
                 <a:cs typeface="Segoe UI" pitchFamily="34" charset="-120"/>
               </a:rPr>
-              <a:t>Resumes arrive in every shape: PDF, Word, scans, photos of paper - many have no readable text.</a:t>
+              <a:t>Unreadable files</a:t>
             </a:r>
             <a:endParaRPr lang="en-US" sz="1800" dirty="0"/>
           </a:p>
+        </p:txBody>
+      </p:sp>
+      <p:sp>
+        <p:nvSpPr>
+          <p:cNvPr id="12" name="Text 10"/>
+          <p:cNvSpPr/>
+          <p:nvPr/>
+        </p:nvSpPr>
+        <p:spPr>
+          <a:xfrm>
+            <a:off x="7680960" y="2633472"/>
+            <a:ext cx="3474720" cy="914400"/>
+          </a:xfrm>
+          <a:prstGeom prst="rect">
+            <a:avLst/>
+          </a:prstGeom>
+          <a:noFill/>
+          <a:ln/>
+        </p:spPr>
+        <p:txBody>
+          <a:bodyPr wrap="square" rtlCol="0" anchor="ctr"/>
+          <a:lstStyle/>
           <a:p>
-            <a:pPr marL="228600" indent="-228600">
-              <a:lnSpc>
-                <a:spcPct val="135000"/>
-              </a:lnSpc>
-              <a:buSzPct val="100000"/>
-              <a:buChar char="•"/>
+            <a:pPr indent="0" marL="0">
+              <a:buNone/>
             </a:pPr>
             <a:r>
-              <a:rPr lang="en-US" sz="1800" dirty="0">
+              <a:rPr lang="en-US" sz="1300" dirty="0">
+                <a:solidFill>
+                  <a:srgbClr val="75897D"/>
+                </a:solidFill>
+                <a:latin typeface="Segoe UI" pitchFamily="34" charset="0"/>
+                <a:ea typeface="Segoe UI" pitchFamily="34" charset="-122"/>
+                <a:cs typeface="Segoe UI" pitchFamily="34" charset="-120"/>
+              </a:rPr>
+              <a:t>Resumes arrive as scans, photos of paper, or odd PDFs with no selectable text.</a:t>
+            </a:r>
+            <a:endParaRPr lang="en-US" sz="1300" dirty="0"/>
+          </a:p>
+        </p:txBody>
+      </p:sp>
+      <p:sp>
+        <p:nvSpPr>
+          <p:cNvPr id="13" name="Shape 11"/>
+          <p:cNvSpPr/>
+          <p:nvPr/>
+        </p:nvSpPr>
+        <p:spPr>
+          <a:xfrm>
+            <a:off x="777240" y="4160520"/>
+            <a:ext cx="5029200" cy="1828800"/>
+          </a:xfrm>
+          <a:prstGeom prst="roundRect">
+            <a:avLst>
+              <a:gd name="adj" fmla="val 6000"/>
+            </a:avLst>
+          </a:prstGeom>
+          <a:solidFill>
+            <a:srgbClr val="FFFFFF"/>
+          </a:solidFill>
+          <a:ln w="19050">
+            <a:solidFill>
+              <a:srgbClr val="F1EFE6"/>
+            </a:solidFill>
+            <a:prstDash val="solid"/>
+          </a:ln>
+        </p:spPr>
+      </p:sp>
+      <p:sp>
+        <p:nvSpPr>
+          <p:cNvPr id="14" name="Text 12"/>
+          <p:cNvSpPr/>
+          <p:nvPr/>
+        </p:nvSpPr>
+        <p:spPr>
+          <a:xfrm>
+            <a:off x="1051560" y="4416552"/>
+            <a:ext cx="1005840" cy="822960"/>
+          </a:xfrm>
+          <a:prstGeom prst="rect">
+            <a:avLst/>
+          </a:prstGeom>
+          <a:noFill/>
+          <a:ln/>
+        </p:spPr>
+        <p:txBody>
+          <a:bodyPr wrap="square" rtlCol="0" anchor="ctr"/>
+          <a:lstStyle/>
+          <a:p>
+            <a:pPr indent="0" marL="0">
+              <a:buNone/>
+            </a:pPr>
+            <a:r>
+              <a:rPr lang="en-US" sz="3400" b="1" dirty="0">
+                <a:solidFill>
+                  <a:srgbClr val="E2603C"/>
+                </a:solidFill>
+                <a:latin typeface="Segoe UI" pitchFamily="34" charset="0"/>
+                <a:ea typeface="Segoe UI" pitchFamily="34" charset="-122"/>
+                <a:cs typeface="Segoe UI" pitchFamily="34" charset="-120"/>
+              </a:rPr>
+              <a:t>03</a:t>
+            </a:r>
+            <a:endParaRPr lang="en-US" sz="3400" dirty="0"/>
+          </a:p>
+        </p:txBody>
+      </p:sp>
+      <p:sp>
+        <p:nvSpPr>
+          <p:cNvPr id="15" name="Text 13"/>
+          <p:cNvSpPr/>
+          <p:nvPr/>
+        </p:nvSpPr>
+        <p:spPr>
+          <a:xfrm>
+            <a:off x="2103120" y="4434840"/>
+            <a:ext cx="3474720" cy="411480"/>
+          </a:xfrm>
+          <a:prstGeom prst="rect">
+            <a:avLst/>
+          </a:prstGeom>
+          <a:noFill/>
+          <a:ln/>
+        </p:spPr>
+        <p:txBody>
+          <a:bodyPr wrap="square" rtlCol="0" anchor="ctr"/>
+          <a:lstStyle/>
+          <a:p>
+            <a:pPr indent="0" marL="0">
+              <a:buNone/>
+            </a:pPr>
+            <a:r>
+              <a:rPr lang="en-US" sz="1800" b="1" dirty="0">
                 <a:solidFill>
                   <a:srgbClr val="11372A"/>
                 </a:solidFill>
@@ -3843,20 +4440,143 @@
                 <a:ea typeface="Segoe UI" pitchFamily="34" charset="-122"/>
                 <a:cs typeface="Segoe UI" pitchFamily="34" charset="-120"/>
               </a:rPr>
-              <a:t>Recruiters and candidates both guess. Nobody sees the real skill-to-role fit.</a:t>
+              <a:t>Everyone guesses</a:t>
             </a:r>
             <a:endParaRPr lang="en-US" sz="1800" dirty="0"/>
           </a:p>
+        </p:txBody>
+      </p:sp>
+      <p:sp>
+        <p:nvSpPr>
+          <p:cNvPr id="16" name="Text 14"/>
+          <p:cNvSpPr/>
+          <p:nvPr/>
+        </p:nvSpPr>
+        <p:spPr>
+          <a:xfrm>
+            <a:off x="2103120" y="4873752"/>
+            <a:ext cx="3474720" cy="914400"/>
+          </a:xfrm>
+          <a:prstGeom prst="rect">
+            <a:avLst/>
+          </a:prstGeom>
+          <a:noFill/>
+          <a:ln/>
+        </p:spPr>
+        <p:txBody>
+          <a:bodyPr wrap="square" rtlCol="0" anchor="ctr"/>
+          <a:lstStyle/>
           <a:p>
-            <a:pPr marL="228600" indent="-228600">
-              <a:lnSpc>
-                <a:spcPct val="135000"/>
-              </a:lnSpc>
-              <a:buSzPct val="100000"/>
-              <a:buChar char="•"/>
+            <a:pPr indent="0" marL="0">
+              <a:buNone/>
             </a:pPr>
             <a:r>
-              <a:rPr lang="en-US" sz="1800" dirty="0">
+              <a:rPr lang="en-US" sz="1300" dirty="0">
+                <a:solidFill>
+                  <a:srgbClr val="75897D"/>
+                </a:solidFill>
+                <a:latin typeface="Segoe UI" pitchFamily="34" charset="0"/>
+                <a:ea typeface="Segoe UI" pitchFamily="34" charset="-122"/>
+                <a:cs typeface="Segoe UI" pitchFamily="34" charset="-120"/>
+              </a:rPr>
+              <a:t>Recruiters and candidates both estimate fit. Nobody sees the real skill-to-role map.</a:t>
+            </a:r>
+            <a:endParaRPr lang="en-US" sz="1300" dirty="0"/>
+          </a:p>
+        </p:txBody>
+      </p:sp>
+      <p:sp>
+        <p:nvSpPr>
+          <p:cNvPr id="17" name="Shape 15"/>
+          <p:cNvSpPr/>
+          <p:nvPr/>
+        </p:nvSpPr>
+        <p:spPr>
+          <a:xfrm>
+            <a:off x="6355080" y="4160520"/>
+            <a:ext cx="5029200" cy="1828800"/>
+          </a:xfrm>
+          <a:prstGeom prst="roundRect">
+            <a:avLst>
+              <a:gd name="adj" fmla="val 6000"/>
+            </a:avLst>
+          </a:prstGeom>
+          <a:solidFill>
+            <a:srgbClr val="FFFFFF"/>
+          </a:solidFill>
+          <a:ln w="19050">
+            <a:solidFill>
+              <a:srgbClr val="F1EFE6"/>
+            </a:solidFill>
+            <a:prstDash val="solid"/>
+          </a:ln>
+        </p:spPr>
+      </p:sp>
+      <p:sp>
+        <p:nvSpPr>
+          <p:cNvPr id="18" name="Text 16"/>
+          <p:cNvSpPr/>
+          <p:nvPr/>
+        </p:nvSpPr>
+        <p:spPr>
+          <a:xfrm>
+            <a:off x="6629400" y="4416552"/>
+            <a:ext cx="1005840" cy="822960"/>
+          </a:xfrm>
+          <a:prstGeom prst="rect">
+            <a:avLst/>
+          </a:prstGeom>
+          <a:noFill/>
+          <a:ln/>
+        </p:spPr>
+        <p:txBody>
+          <a:bodyPr wrap="square" rtlCol="0" anchor="ctr"/>
+          <a:lstStyle/>
+          <a:p>
+            <a:pPr indent="0" marL="0">
+              <a:buNone/>
+            </a:pPr>
+            <a:r>
+              <a:rPr lang="en-US" sz="3400" b="1" dirty="0">
+                <a:solidFill>
+                  <a:srgbClr val="E2603C"/>
+                </a:solidFill>
+                <a:latin typeface="Segoe UI" pitchFamily="34" charset="0"/>
+                <a:ea typeface="Segoe UI" pitchFamily="34" charset="-122"/>
+                <a:cs typeface="Segoe UI" pitchFamily="34" charset="-120"/>
+              </a:rPr>
+              <a:t>04</a:t>
+            </a:r>
+            <a:endParaRPr lang="en-US" sz="3400" dirty="0"/>
+          </a:p>
+        </p:txBody>
+      </p:sp>
+      <p:sp>
+        <p:nvSpPr>
+          <p:cNvPr id="19" name="Text 17"/>
+          <p:cNvSpPr/>
+          <p:nvPr/>
+        </p:nvSpPr>
+        <p:spPr>
+          <a:xfrm>
+            <a:off x="7680960" y="4434840"/>
+            <a:ext cx="3474720" cy="411480"/>
+          </a:xfrm>
+          <a:prstGeom prst="rect">
+            <a:avLst/>
+          </a:prstGeom>
+          <a:noFill/>
+          <a:ln/>
+        </p:spPr>
+        <p:txBody>
+          <a:bodyPr wrap="square" rtlCol="0" anchor="ctr"/>
+          <a:lstStyle/>
+          <a:p>
+            <a:pPr indent="0" marL="0">
+              <a:buNone/>
+            </a:pPr>
+            <a:r>
+              <a:rPr lang="en-US" sz="1800" b="1" dirty="0">
                 <a:solidFill>
                   <a:srgbClr val="11372A"/>
                 </a:solidFill>
@@ -3864,7 +4584,7 @@
                 <a:ea typeface="Segoe UI" pitchFamily="34" charset="-122"/>
                 <a:cs typeface="Segoe UI" pitchFamily="34" charset="-120"/>
               </a:rPr>
-              <a:t>Career switchers have the skills, but not the vocabulary of the job description.</a:t>
+              <a:t>Lost in translation</a:t>
             </a:r>
             <a:endParaRPr lang="en-US" sz="1800" dirty="0"/>
           </a:p>
@@ -3872,7 +4592,46 @@
       </p:sp>
       <p:sp>
         <p:nvSpPr>
-          <p:cNvPr id="6" name="Text 4"/>
+          <p:cNvPr id="20" name="Text 18"/>
+          <p:cNvSpPr/>
+          <p:nvPr/>
+        </p:nvSpPr>
+        <p:spPr>
+          <a:xfrm>
+            <a:off x="7680960" y="4873752"/>
+            <a:ext cx="3474720" cy="914400"/>
+          </a:xfrm>
+          <a:prstGeom prst="rect">
+            <a:avLst/>
+          </a:prstGeom>
+          <a:noFill/>
+          <a:ln/>
+        </p:spPr>
+        <p:txBody>
+          <a:bodyPr wrap="square" rtlCol="0" anchor="ctr"/>
+          <a:lstStyle/>
+          <a:p>
+            <a:pPr indent="0" marL="0">
+              <a:buNone/>
+            </a:pPr>
+            <a:r>
+              <a:rPr lang="en-US" sz="1300" dirty="0">
+                <a:solidFill>
+                  <a:srgbClr val="75897D"/>
+                </a:solidFill>
+                <a:latin typeface="Segoe UI" pitchFamily="34" charset="0"/>
+                <a:ea typeface="Segoe UI" pitchFamily="34" charset="-122"/>
+                <a:cs typeface="Segoe UI" pitchFamily="34" charset="-120"/>
+              </a:rPr>
+              <a:t>Career switchers have the skills, but not the vocabulary of the job description.</a:t>
+            </a:r>
+            <a:endParaRPr lang="en-US" sz="1300" dirty="0"/>
+          </a:p>
+        </p:txBody>
+      </p:sp>
+      <p:sp>
+        <p:nvSpPr>
+          <p:cNvPr id="21" name="Text 19"/>
           <p:cNvSpPr/>
           <p:nvPr/>
         </p:nvSpPr>
@@ -3972,7 +4731,7 @@
                               <p:par>
                                 <p:cTn id="8" presetID="10" presetClass="entr" presetSubtype="0" fill="hold" grpId="0" nodeType="withEffect">
                                   <p:stCondLst>
-                                    <p:cond delay="350"/>
+                                    <p:cond delay="320"/>
                                   </p:stCondLst>
                                   <p:childTnLst>
                                     <p:set>
@@ -4007,7 +4766,7 @@
                               <p:par>
                                 <p:cTn id="11" presetID="10" presetClass="entr" presetSubtype="0" fill="hold" grpId="0" nodeType="withEffect">
                                   <p:stCondLst>
-                                    <p:cond delay="700"/>
+                                    <p:cond delay="640"/>
                                   </p:stCondLst>
                                   <p:childTnLst>
                                     <p:set>
@@ -4042,7 +4801,7 @@
                               <p:par>
                                 <p:cTn id="14" presetID="10" presetClass="entr" presetSubtype="0" fill="hold" grpId="0" nodeType="withEffect">
                                   <p:stCondLst>
-                                    <p:cond delay="1050"/>
+                                    <p:cond delay="960"/>
                                   </p:stCondLst>
                                   <p:childTnLst>
                                     <p:set>
@@ -4077,7 +4836,7 @@
                               <p:par>
                                 <p:cTn id="17" presetID="10" presetClass="entr" presetSubtype="0" fill="hold" grpId="0" nodeType="withEffect">
                                   <p:stCondLst>
-                                    <p:cond delay="1400"/>
+                                    <p:cond delay="1280"/>
                                   </p:stCondLst>
                                   <p:childTnLst>
                                     <p:set>
@@ -4103,6 +4862,531 @@
                                         <p:cTn id="18" dur="500"/>
                                         <p:tgtEl>
                                           <p:spTgt spid="6"/>
+                                        </p:tgtEl>
+                                      </p:cBhvr>
+                                    </p:animEffect>
+                                  </p:childTnLst>
+                                </p:cTn>
+                              </p:par>
+                              <p:par>
+                                <p:cTn id="20" presetID="10" presetClass="entr" presetSubtype="0" fill="hold" grpId="0" nodeType="withEffect">
+                                  <p:stCondLst>
+                                    <p:cond delay="1600"/>
+                                  </p:stCondLst>
+                                  <p:childTnLst>
+                                    <p:set>
+                                      <p:cBhvr>
+                                        <p:cTn id="19" dur="1" fill="hold">
+                                          <p:stCondLst>
+                                            <p:cond delay="0"/>
+                                          </p:stCondLst>
+                                        </p:cTn>
+                                        <p:tgtEl>
+                                          <p:spTgt spid="7"/>
+                                        </p:tgtEl>
+                                        <p:attrNameLst>
+                                          <p:attrName>style.visibility</p:attrName>
+                                        </p:attrNameLst>
+                                      </p:cBhvr>
+                                      <p:to>
+                                        <p:strVal val="visible"/>
+                                      </p:to>
+                                    </p:set>
+                                    <p:animEffect transition="in" filter="fade">
+                                      <p:cBhvr>
+                                        <p:cTn id="21" dur="500"/>
+                                        <p:tgtEl>
+                                          <p:spTgt spid="7"/>
+                                        </p:tgtEl>
+                                      </p:cBhvr>
+                                    </p:animEffect>
+                                  </p:childTnLst>
+                                </p:cTn>
+                              </p:par>
+                              <p:par>
+                                <p:cTn id="23" presetID="10" presetClass="entr" presetSubtype="0" fill="hold" grpId="0" nodeType="withEffect">
+                                  <p:stCondLst>
+                                    <p:cond delay="1920"/>
+                                  </p:stCondLst>
+                                  <p:childTnLst>
+                                    <p:set>
+                                      <p:cBhvr>
+                                        <p:cTn id="22" dur="1" fill="hold">
+                                          <p:stCondLst>
+                                            <p:cond delay="0"/>
+                                          </p:stCondLst>
+                                        </p:cTn>
+                                        <p:tgtEl>
+                                          <p:spTgt spid="8"/>
+                                        </p:tgtEl>
+                                        <p:attrNameLst>
+                                          <p:attrName>style.visibility</p:attrName>
+                                        </p:attrNameLst>
+                                      </p:cBhvr>
+                                      <p:to>
+                                        <p:strVal val="visible"/>
+                                      </p:to>
+                                    </p:set>
+                                    <p:animEffect transition="in" filter="fade">
+                                      <p:cBhvr>
+                                        <p:cTn id="24" dur="500"/>
+                                        <p:tgtEl>
+                                          <p:spTgt spid="8"/>
+                                        </p:tgtEl>
+                                      </p:cBhvr>
+                                    </p:animEffect>
+                                  </p:childTnLst>
+                                </p:cTn>
+                              </p:par>
+                              <p:par>
+                                <p:cTn id="26" presetID="10" presetClass="entr" presetSubtype="0" fill="hold" grpId="0" nodeType="withEffect">
+                                  <p:stCondLst>
+                                    <p:cond delay="2240"/>
+                                  </p:stCondLst>
+                                  <p:childTnLst>
+                                    <p:set>
+                                      <p:cBhvr>
+                                        <p:cTn id="25" dur="1" fill="hold">
+                                          <p:stCondLst>
+                                            <p:cond delay="0"/>
+                                          </p:stCondLst>
+                                        </p:cTn>
+                                        <p:tgtEl>
+                                          <p:spTgt spid="9"/>
+                                        </p:tgtEl>
+                                        <p:attrNameLst>
+                                          <p:attrName>style.visibility</p:attrName>
+                                        </p:attrNameLst>
+                                      </p:cBhvr>
+                                      <p:to>
+                                        <p:strVal val="visible"/>
+                                      </p:to>
+                                    </p:set>
+                                    <p:animEffect transition="in" filter="fade">
+                                      <p:cBhvr>
+                                        <p:cTn id="27" dur="500"/>
+                                        <p:tgtEl>
+                                          <p:spTgt spid="9"/>
+                                        </p:tgtEl>
+                                      </p:cBhvr>
+                                    </p:animEffect>
+                                  </p:childTnLst>
+                                </p:cTn>
+                              </p:par>
+                              <p:par>
+                                <p:cTn id="29" presetID="10" presetClass="entr" presetSubtype="0" fill="hold" grpId="0" nodeType="withEffect">
+                                  <p:stCondLst>
+                                    <p:cond delay="2560"/>
+                                  </p:stCondLst>
+                                  <p:childTnLst>
+                                    <p:set>
+                                      <p:cBhvr>
+                                        <p:cTn id="28" dur="1" fill="hold">
+                                          <p:stCondLst>
+                                            <p:cond delay="0"/>
+                                          </p:stCondLst>
+                                        </p:cTn>
+                                        <p:tgtEl>
+                                          <p:spTgt spid="10"/>
+                                        </p:tgtEl>
+                                        <p:attrNameLst>
+                                          <p:attrName>style.visibility</p:attrName>
+                                        </p:attrNameLst>
+                                      </p:cBhvr>
+                                      <p:to>
+                                        <p:strVal val="visible"/>
+                                      </p:to>
+                                    </p:set>
+                                    <p:animEffect transition="in" filter="fade">
+                                      <p:cBhvr>
+                                        <p:cTn id="30" dur="500"/>
+                                        <p:tgtEl>
+                                          <p:spTgt spid="10"/>
+                                        </p:tgtEl>
+                                      </p:cBhvr>
+                                    </p:animEffect>
+                                  </p:childTnLst>
+                                </p:cTn>
+                              </p:par>
+                              <p:par>
+                                <p:cTn id="32" presetID="10" presetClass="entr" presetSubtype="0" fill="hold" grpId="0" nodeType="withEffect">
+                                  <p:stCondLst>
+                                    <p:cond delay="2880"/>
+                                  </p:stCondLst>
+                                  <p:childTnLst>
+                                    <p:set>
+                                      <p:cBhvr>
+                                        <p:cTn id="31" dur="1" fill="hold">
+                                          <p:stCondLst>
+                                            <p:cond delay="0"/>
+                                          </p:stCondLst>
+                                        </p:cTn>
+                                        <p:tgtEl>
+                                          <p:spTgt spid="11"/>
+                                        </p:tgtEl>
+                                        <p:attrNameLst>
+                                          <p:attrName>style.visibility</p:attrName>
+                                        </p:attrNameLst>
+                                      </p:cBhvr>
+                                      <p:to>
+                                        <p:strVal val="visible"/>
+                                      </p:to>
+                                    </p:set>
+                                    <p:animEffect transition="in" filter="fade">
+                                      <p:cBhvr>
+                                        <p:cTn id="33" dur="500"/>
+                                        <p:tgtEl>
+                                          <p:spTgt spid="11"/>
+                                        </p:tgtEl>
+                                      </p:cBhvr>
+                                    </p:animEffect>
+                                  </p:childTnLst>
+                                </p:cTn>
+                              </p:par>
+                              <p:par>
+                                <p:cTn id="35" presetID="10" presetClass="entr" presetSubtype="0" fill="hold" grpId="0" nodeType="withEffect">
+                                  <p:stCondLst>
+                                    <p:cond delay="3200"/>
+                                  </p:stCondLst>
+                                  <p:childTnLst>
+                                    <p:set>
+                                      <p:cBhvr>
+                                        <p:cTn id="34" dur="1" fill="hold">
+                                          <p:stCondLst>
+                                            <p:cond delay="0"/>
+                                          </p:stCondLst>
+                                        </p:cTn>
+                                        <p:tgtEl>
+                                          <p:spTgt spid="12"/>
+                                        </p:tgtEl>
+                                        <p:attrNameLst>
+                                          <p:attrName>style.visibility</p:attrName>
+                                        </p:attrNameLst>
+                                      </p:cBhvr>
+                                      <p:to>
+                                        <p:strVal val="visible"/>
+                                      </p:to>
+                                    </p:set>
+                                    <p:animEffect transition="in" filter="fade">
+                                      <p:cBhvr>
+                                        <p:cTn id="36" dur="500"/>
+                                        <p:tgtEl>
+                                          <p:spTgt spid="12"/>
+                                        </p:tgtEl>
+                                      </p:cBhvr>
+                                    </p:animEffect>
+                                  </p:childTnLst>
+                                </p:cTn>
+                              </p:par>
+                              <p:par>
+                                <p:cTn id="38" presetID="10" presetClass="entr" presetSubtype="0" fill="hold" grpId="0" nodeType="withEffect">
+                                  <p:stCondLst>
+                                    <p:cond delay="3520"/>
+                                  </p:stCondLst>
+                                  <p:childTnLst>
+                                    <p:set>
+                                      <p:cBhvr>
+                                        <p:cTn id="37" dur="1" fill="hold">
+                                          <p:stCondLst>
+                                            <p:cond delay="0"/>
+                                          </p:stCondLst>
+                                        </p:cTn>
+                                        <p:tgtEl>
+                                          <p:spTgt spid="13"/>
+                                        </p:tgtEl>
+                                        <p:attrNameLst>
+                                          <p:attrName>style.visibility</p:attrName>
+                                        </p:attrNameLst>
+                                      </p:cBhvr>
+                                      <p:to>
+                                        <p:strVal val="visible"/>
+                                      </p:to>
+                                    </p:set>
+                                    <p:animEffect transition="in" filter="fade">
+                                      <p:cBhvr>
+                                        <p:cTn id="39" dur="500"/>
+                                        <p:tgtEl>
+                                          <p:spTgt spid="13"/>
+                                        </p:tgtEl>
+                                      </p:cBhvr>
+                                    </p:animEffect>
+                                  </p:childTnLst>
+                                </p:cTn>
+                              </p:par>
+                              <p:par>
+                                <p:cTn id="41" presetID="10" presetClass="entr" presetSubtype="0" fill="hold" grpId="0" nodeType="withEffect">
+                                  <p:stCondLst>
+                                    <p:cond delay="3840"/>
+                                  </p:stCondLst>
+                                  <p:childTnLst>
+                                    <p:set>
+                                      <p:cBhvr>
+                                        <p:cTn id="40" dur="1" fill="hold">
+                                          <p:stCondLst>
+                                            <p:cond delay="0"/>
+                                          </p:stCondLst>
+                                        </p:cTn>
+                                        <p:tgtEl>
+                                          <p:spTgt spid="14"/>
+                                        </p:tgtEl>
+                                        <p:attrNameLst>
+                                          <p:attrName>style.visibility</p:attrName>
+                                        </p:attrNameLst>
+                                      </p:cBhvr>
+                                      <p:to>
+                                        <p:strVal val="visible"/>
+                                      </p:to>
+                                    </p:set>
+                                    <p:animEffect transition="in" filter="fade">
+                                      <p:cBhvr>
+                                        <p:cTn id="42" dur="500"/>
+                                        <p:tgtEl>
+                                          <p:spTgt spid="14"/>
+                                        </p:tgtEl>
+                                      </p:cBhvr>
+                                    </p:animEffect>
+                                  </p:childTnLst>
+                                </p:cTn>
+                              </p:par>
+                              <p:par>
+                                <p:cTn id="44" presetID="10" presetClass="entr" presetSubtype="0" fill="hold" grpId="0" nodeType="withEffect">
+                                  <p:stCondLst>
+                                    <p:cond delay="4160"/>
+                                  </p:stCondLst>
+                                  <p:childTnLst>
+                                    <p:set>
+                                      <p:cBhvr>
+                                        <p:cTn id="43" dur="1" fill="hold">
+                                          <p:stCondLst>
+                                            <p:cond delay="0"/>
+                                          </p:stCondLst>
+                                        </p:cTn>
+                                        <p:tgtEl>
+                                          <p:spTgt spid="15"/>
+                                        </p:tgtEl>
+                                        <p:attrNameLst>
+                                          <p:attrName>style.visibility</p:attrName>
+                                        </p:attrNameLst>
+                                      </p:cBhvr>
+                                      <p:to>
+                                        <p:strVal val="visible"/>
+                                      </p:to>
+                                    </p:set>
+                                    <p:animEffect transition="in" filter="fade">
+                                      <p:cBhvr>
+                                        <p:cTn id="45" dur="500"/>
+                                        <p:tgtEl>
+                                          <p:spTgt spid="15"/>
+                                        </p:tgtEl>
+                                      </p:cBhvr>
+                                    </p:animEffect>
+                                  </p:childTnLst>
+                                </p:cTn>
+                              </p:par>
+                              <p:par>
+                                <p:cTn id="47" presetID="10" presetClass="entr" presetSubtype="0" fill="hold" grpId="0" nodeType="withEffect">
+                                  <p:stCondLst>
+                                    <p:cond delay="4480"/>
+                                  </p:stCondLst>
+                                  <p:childTnLst>
+                                    <p:set>
+                                      <p:cBhvr>
+                                        <p:cTn id="46" dur="1" fill="hold">
+                                          <p:stCondLst>
+                                            <p:cond delay="0"/>
+                                          </p:stCondLst>
+                                        </p:cTn>
+                                        <p:tgtEl>
+                                          <p:spTgt spid="16"/>
+                                        </p:tgtEl>
+                                        <p:attrNameLst>
+                                          <p:attrName>style.visibility</p:attrName>
+                                        </p:attrNameLst>
+                                      </p:cBhvr>
+                                      <p:to>
+                                        <p:strVal val="visible"/>
+                                      </p:to>
+                                    </p:set>
+                                    <p:animEffect transition="in" filter="fade">
+                                      <p:cBhvr>
+                                        <p:cTn id="48" dur="500"/>
+                                        <p:tgtEl>
+                                          <p:spTgt spid="16"/>
+                                        </p:tgtEl>
+                                      </p:cBhvr>
+                                    </p:animEffect>
+                                  </p:childTnLst>
+                                </p:cTn>
+                              </p:par>
+                              <p:par>
+                                <p:cTn id="50" presetID="10" presetClass="entr" presetSubtype="0" fill="hold" grpId="0" nodeType="withEffect">
+                                  <p:stCondLst>
+                                    <p:cond delay="4800"/>
+                                  </p:stCondLst>
+                                  <p:childTnLst>
+                                    <p:set>
+                                      <p:cBhvr>
+                                        <p:cTn id="49" dur="1" fill="hold">
+                                          <p:stCondLst>
+                                            <p:cond delay="0"/>
+                                          </p:stCondLst>
+                                        </p:cTn>
+                                        <p:tgtEl>
+                                          <p:spTgt spid="17"/>
+                                        </p:tgtEl>
+                                        <p:attrNameLst>
+                                          <p:attrName>style.visibility</p:attrName>
+                                        </p:attrNameLst>
+                                      </p:cBhvr>
+                                      <p:to>
+                                        <p:strVal val="visible"/>
+                                      </p:to>
+                                    </p:set>
+                                    <p:animEffect transition="in" filter="fade">
+                                      <p:cBhvr>
+                                        <p:cTn id="51" dur="500"/>
+                                        <p:tgtEl>
+                                          <p:spTgt spid="17"/>
+                                        </p:tgtEl>
+                                      </p:cBhvr>
+                                    </p:animEffect>
+                                  </p:childTnLst>
+                                </p:cTn>
+                              </p:par>
+                              <p:par>
+                                <p:cTn id="53" presetID="10" presetClass="entr" presetSubtype="0" fill="hold" grpId="0" nodeType="withEffect">
+                                  <p:stCondLst>
+                                    <p:cond delay="5120"/>
+                                  </p:stCondLst>
+                                  <p:childTnLst>
+                                    <p:set>
+                                      <p:cBhvr>
+                                        <p:cTn id="52" dur="1" fill="hold">
+                                          <p:stCondLst>
+                                            <p:cond delay="0"/>
+                                          </p:stCondLst>
+                                        </p:cTn>
+                                        <p:tgtEl>
+                                          <p:spTgt spid="18"/>
+                                        </p:tgtEl>
+                                        <p:attrNameLst>
+                                          <p:attrName>style.visibility</p:attrName>
+                                        </p:attrNameLst>
+                                      </p:cBhvr>
+                                      <p:to>
+                                        <p:strVal val="visible"/>
+                                      </p:to>
+                                    </p:set>
+                                    <p:animEffect transition="in" filter="fade">
+                                      <p:cBhvr>
+                                        <p:cTn id="54" dur="500"/>
+                                        <p:tgtEl>
+                                          <p:spTgt spid="18"/>
+                                        </p:tgtEl>
+                                      </p:cBhvr>
+                                    </p:animEffect>
+                                  </p:childTnLst>
+                                </p:cTn>
+                              </p:par>
+                              <p:par>
+                                <p:cTn id="56" presetID="10" presetClass="entr" presetSubtype="0" fill="hold" grpId="0" nodeType="withEffect">
+                                  <p:stCondLst>
+                                    <p:cond delay="5440"/>
+                                  </p:stCondLst>
+                                  <p:childTnLst>
+                                    <p:set>
+                                      <p:cBhvr>
+                                        <p:cTn id="55" dur="1" fill="hold">
+                                          <p:stCondLst>
+                                            <p:cond delay="0"/>
+                                          </p:stCondLst>
+                                        </p:cTn>
+                                        <p:tgtEl>
+                                          <p:spTgt spid="19"/>
+                                        </p:tgtEl>
+                                        <p:attrNameLst>
+                                          <p:attrName>style.visibility</p:attrName>
+                                        </p:attrNameLst>
+                                      </p:cBhvr>
+                                      <p:to>
+                                        <p:strVal val="visible"/>
+                                      </p:to>
+                                    </p:set>
+                                    <p:animEffect transition="in" filter="fade">
+                                      <p:cBhvr>
+                                        <p:cTn id="57" dur="500"/>
+                                        <p:tgtEl>
+                                          <p:spTgt spid="19"/>
+                                        </p:tgtEl>
+                                      </p:cBhvr>
+                                    </p:animEffect>
+                                  </p:childTnLst>
+                                </p:cTn>
+                              </p:par>
+                              <p:par>
+                                <p:cTn id="59" presetID="10" presetClass="entr" presetSubtype="0" fill="hold" grpId="0" nodeType="withEffect">
+                                  <p:stCondLst>
+                                    <p:cond delay="5760"/>
+                                  </p:stCondLst>
+                                  <p:childTnLst>
+                                    <p:set>
+                                      <p:cBhvr>
+                                        <p:cTn id="58" dur="1" fill="hold">
+                                          <p:stCondLst>
+                                            <p:cond delay="0"/>
+                                          </p:stCondLst>
+                                        </p:cTn>
+                                        <p:tgtEl>
+                                          <p:spTgt spid="20"/>
+                                        </p:tgtEl>
+                                        <p:attrNameLst>
+                                          <p:attrName>style.visibility</p:attrName>
+                                        </p:attrNameLst>
+                                      </p:cBhvr>
+                                      <p:to>
+                                        <p:strVal val="visible"/>
+                                      </p:to>
+                                    </p:set>
+                                    <p:animEffect transition="in" filter="fade">
+                                      <p:cBhvr>
+                                        <p:cTn id="60" dur="500"/>
+                                        <p:tgtEl>
+                                          <p:spTgt spid="20"/>
+                                        </p:tgtEl>
+                                      </p:cBhvr>
+                                    </p:animEffect>
+                                  </p:childTnLst>
+                                </p:cTn>
+                              </p:par>
+                              <p:par>
+                                <p:cTn id="62" presetID="10" presetClass="entr" presetSubtype="0" fill="hold" grpId="0" nodeType="withEffect">
+                                  <p:stCondLst>
+                                    <p:cond delay="6080"/>
+                                  </p:stCondLst>
+                                  <p:childTnLst>
+                                    <p:set>
+                                      <p:cBhvr>
+                                        <p:cTn id="61" dur="1" fill="hold">
+                                          <p:stCondLst>
+                                            <p:cond delay="0"/>
+                                          </p:stCondLst>
+                                        </p:cTn>
+                                        <p:tgtEl>
+                                          <p:spTgt spid="21"/>
+                                        </p:tgtEl>
+                                        <p:attrNameLst>
+                                          <p:attrName>style.visibility</p:attrName>
+                                        </p:attrNameLst>
+                                      </p:cBhvr>
+                                      <p:to>
+                                        <p:strVal val="visible"/>
+                                      </p:to>
+                                    </p:set>
+                                    <p:animEffect transition="in" filter="fade">
+                                      <p:cBhvr>
+                                        <p:cTn id="63" dur="500"/>
+                                        <p:tgtEl>
+                                          <p:spTgt spid="21"/>
                                         </p:tgtEl>
                                       </p:cBhvr>
                                     </p:animEffect>
@@ -4192,7 +5476,7 @@
         </p:nvSpPr>
         <p:spPr>
           <a:xfrm>
-            <a:off x="685800" y="502920"/>
+            <a:off x="685800" y="457200"/>
             <a:ext cx="10789920" cy="320040"/>
           </a:xfrm>
           <a:prstGeom prst="rect">
@@ -4231,8 +5515,8 @@
         </p:nvSpPr>
         <p:spPr>
           <a:xfrm>
-            <a:off x="685800" y="886968"/>
-            <a:ext cx="10789920" cy="914400"/>
+            <a:off x="685800" y="841248"/>
+            <a:ext cx="10789920" cy="731520"/>
           </a:xfrm>
           <a:prstGeom prst="rect">
             <a:avLst/>
@@ -4248,7 +5532,7 @@
               <a:buNone/>
             </a:pPr>
             <a:r>
-              <a:rPr lang="en-US" sz="3400" b="1" dirty="0">
+              <a:rPr lang="en-US" sz="3200" b="1" dirty="0">
                 <a:solidFill>
                   <a:srgbClr val="11372A"/>
                 </a:solidFill>
@@ -4256,9 +5540,9 @@
                 <a:ea typeface="Segoe UI" pitchFamily="34" charset="-122"/>
                 <a:cs typeface="Segoe UI" pitchFamily="34" charset="-120"/>
               </a:rPr>
-              <a:t>Next Role: matching you can see</a:t>
+              <a:t>Three steps, one clean interface</a:t>
             </a:r>
-            <a:endParaRPr lang="en-US" sz="3400" dirty="0"/>
+            <a:endParaRPr lang="en-US" sz="3200" dirty="0"/>
           </a:p>
         </p:txBody>
       </p:sp>
@@ -4270,23 +5554,18 @@
         </p:nvSpPr>
         <p:spPr>
           <a:xfrm>
-            <a:off x="777240" y="1874520"/>
-            <a:ext cx="3291840" cy="2377440"/>
+            <a:off x="777240" y="2057400"/>
+            <a:ext cx="566928" cy="566928"/>
           </a:xfrm>
           <a:prstGeom prst="roundRect">
             <a:avLst>
-              <a:gd name="adj" fmla="val 3846"/>
+              <a:gd name="adj" fmla="val 22581"/>
             </a:avLst>
           </a:prstGeom>
           <a:solidFill>
-            <a:srgbClr val="FFFFFF"/>
+            <a:srgbClr val="E2603C"/>
           </a:solidFill>
-          <a:ln w="19050">
-            <a:solidFill>
-              <a:srgbClr val="F1EFE6"/>
-            </a:solidFill>
-            <a:prstDash val="solid"/>
-          </a:ln>
+          <a:ln/>
         </p:spPr>
       </p:sp>
       <p:sp>
@@ -4297,8 +5576,47 @@
         </p:nvSpPr>
         <p:spPr>
           <a:xfrm>
-            <a:off x="960120" y="2057400"/>
-            <a:ext cx="2926080" cy="457200"/>
+            <a:off x="777240" y="2057400"/>
+            <a:ext cx="566928" cy="566928"/>
+          </a:xfrm>
+          <a:prstGeom prst="rect">
+            <a:avLst/>
+          </a:prstGeom>
+          <a:noFill/>
+          <a:ln/>
+        </p:spPr>
+        <p:txBody>
+          <a:bodyPr wrap="square" rtlCol="0" anchor="ctr"/>
+          <a:lstStyle/>
+          <a:p>
+            <a:pPr algn="ctr" indent="0" marL="0">
+              <a:buNone/>
+            </a:pPr>
+            <a:r>
+              <a:rPr lang="en-US" sz="2000" b="1" dirty="0">
+                <a:solidFill>
+                  <a:srgbClr val="FFFFFF"/>
+                </a:solidFill>
+                <a:latin typeface="Segoe UI" pitchFamily="34" charset="0"/>
+                <a:ea typeface="Segoe UI" pitchFamily="34" charset="-122"/>
+                <a:cs typeface="Segoe UI" pitchFamily="34" charset="-120"/>
+              </a:rPr>
+              <a:t>1</a:t>
+            </a:r>
+            <a:endParaRPr lang="en-US" sz="2000" dirty="0"/>
+          </a:p>
+        </p:txBody>
+      </p:sp>
+      <p:sp>
+        <p:nvSpPr>
+          <p:cNvPr id="7" name="Text 5"/>
+          <p:cNvSpPr/>
+          <p:nvPr/>
+        </p:nvSpPr>
+        <p:spPr>
+          <a:xfrm>
+            <a:off x="1554480" y="2029968"/>
+            <a:ext cx="4160520" cy="365760"/>
           </a:xfrm>
           <a:prstGeom prst="rect">
             <a:avLst/>
@@ -4314,30 +5632,30 @@
               <a:buNone/>
             </a:pPr>
             <a:r>
-              <a:rPr lang="en-US" sz="2000" b="1" dirty="0">
+              <a:rPr lang="en-US" sz="1800" b="1" dirty="0">
                 <a:solidFill>
-                  <a:srgbClr val="E2603C"/>
+                  <a:srgbClr val="11372A"/>
                 </a:solidFill>
                 <a:latin typeface="Segoe UI" pitchFamily="34" charset="0"/>
                 <a:ea typeface="Segoe UI" pitchFamily="34" charset="-122"/>
                 <a:cs typeface="Segoe UI" pitchFamily="34" charset="-120"/>
               </a:rPr>
-              <a:t>1. Upload</a:t>
+              <a:t>Upload</a:t>
             </a:r>
-            <a:endParaRPr lang="en-US" sz="2000" dirty="0"/>
+            <a:endParaRPr lang="en-US" sz="1800" dirty="0"/>
           </a:p>
         </p:txBody>
       </p:sp>
       <p:sp>
         <p:nvSpPr>
-          <p:cNvPr id="7" name="Text 5"/>
-          <p:cNvSpPr/>
-          <p:nvPr/>
-        </p:nvSpPr>
-        <p:spPr>
-          <a:xfrm>
-            <a:off x="960120" y="2560320"/>
-            <a:ext cx="2926080" cy="1463040"/>
+          <p:cNvPr id="8" name="Text 6"/>
+          <p:cNvSpPr/>
+          <p:nvPr/>
+        </p:nvSpPr>
+        <p:spPr>
+          <a:xfrm>
+            <a:off x="1554480" y="2386584"/>
+            <a:ext cx="4160520" cy="685800"/>
           </a:xfrm>
           <a:prstGeom prst="rect">
             <a:avLst/>
@@ -4353,57 +5671,91 @@
               <a:buNone/>
             </a:pPr>
             <a:r>
-              <a:rPr lang="en-US" sz="1400" dirty="0">
+              <a:rPr lang="en-US" sz="1350" dirty="0">
                 <a:solidFill>
-                  <a:srgbClr val="11372A"/>
+                  <a:srgbClr val="75897D"/>
                 </a:solidFill>
                 <a:latin typeface="Segoe UI" pitchFamily="34" charset="0"/>
                 <a:ea typeface="Segoe UI" pitchFamily="34" charset="-122"/>
                 <a:cs typeface="Segoe UI" pitchFamily="34" charset="-120"/>
               </a:rPr>
-              <a:t>PDF, DOCX, TXT - or paste text. Scanned pages are read with OCR, right in the browser.</a:t>
+              <a:t>PDF, DOCX, or paste text. Scans go through OCR automatically.</a:t>
             </a:r>
-            <a:endParaRPr lang="en-US" sz="1400" dirty="0"/>
+            <a:endParaRPr lang="en-US" sz="1350" dirty="0"/>
           </a:p>
         </p:txBody>
       </p:sp>
       <p:sp>
         <p:nvSpPr>
-          <p:cNvPr id="8" name="Shape 6"/>
-          <p:cNvSpPr/>
-          <p:nvPr/>
-        </p:nvSpPr>
-        <p:spPr>
-          <a:xfrm>
-            <a:off x="4434840" y="1874520"/>
-            <a:ext cx="3291840" cy="2377440"/>
+          <p:cNvPr id="9" name="Shape 7"/>
+          <p:cNvSpPr/>
+          <p:nvPr/>
+        </p:nvSpPr>
+        <p:spPr>
+          <a:xfrm>
+            <a:off x="777240" y="3429000"/>
+            <a:ext cx="566928" cy="566928"/>
           </a:xfrm>
           <a:prstGeom prst="roundRect">
             <a:avLst>
-              <a:gd name="adj" fmla="val 3846"/>
+              <a:gd name="adj" fmla="val 22581"/>
             </a:avLst>
           </a:prstGeom>
           <a:solidFill>
-            <a:srgbClr val="FFFFFF"/>
+            <a:srgbClr val="E2603C"/>
           </a:solidFill>
-          <a:ln w="19050">
-            <a:solidFill>
-              <a:srgbClr val="F1EFE6"/>
-            </a:solidFill>
-            <a:prstDash val="solid"/>
-          </a:ln>
-        </p:spPr>
-      </p:sp>
-      <p:sp>
-        <p:nvSpPr>
-          <p:cNvPr id="9" name="Text 7"/>
-          <p:cNvSpPr/>
-          <p:nvPr/>
-        </p:nvSpPr>
-        <p:spPr>
-          <a:xfrm>
-            <a:off x="4617720" y="2057400"/>
-            <a:ext cx="2926080" cy="457200"/>
+          <a:ln/>
+        </p:spPr>
+      </p:sp>
+      <p:sp>
+        <p:nvSpPr>
+          <p:cNvPr id="10" name="Text 8"/>
+          <p:cNvSpPr/>
+          <p:nvPr/>
+        </p:nvSpPr>
+        <p:spPr>
+          <a:xfrm>
+            <a:off x="777240" y="3429000"/>
+            <a:ext cx="566928" cy="566928"/>
+          </a:xfrm>
+          <a:prstGeom prst="rect">
+            <a:avLst/>
+          </a:prstGeom>
+          <a:noFill/>
+          <a:ln/>
+        </p:spPr>
+        <p:txBody>
+          <a:bodyPr wrap="square" rtlCol="0" anchor="ctr"/>
+          <a:lstStyle/>
+          <a:p>
+            <a:pPr algn="ctr" indent="0" marL="0">
+              <a:buNone/>
+            </a:pPr>
+            <a:r>
+              <a:rPr lang="en-US" sz="2000" b="1" dirty="0">
+                <a:solidFill>
+                  <a:srgbClr val="FFFFFF"/>
+                </a:solidFill>
+                <a:latin typeface="Segoe UI" pitchFamily="34" charset="0"/>
+                <a:ea typeface="Segoe UI" pitchFamily="34" charset="-122"/>
+                <a:cs typeface="Segoe UI" pitchFamily="34" charset="-120"/>
+              </a:rPr>
+              <a:t>2</a:t>
+            </a:r>
+            <a:endParaRPr lang="en-US" sz="2000" dirty="0"/>
+          </a:p>
+        </p:txBody>
+      </p:sp>
+      <p:sp>
+        <p:nvSpPr>
+          <p:cNvPr id="11" name="Text 9"/>
+          <p:cNvSpPr/>
+          <p:nvPr/>
+        </p:nvSpPr>
+        <p:spPr>
+          <a:xfrm>
+            <a:off x="1554480" y="3401568"/>
+            <a:ext cx="4160520" cy="365760"/>
           </a:xfrm>
           <a:prstGeom prst="rect">
             <a:avLst/>
@@ -4419,30 +5771,30 @@
               <a:buNone/>
             </a:pPr>
             <a:r>
-              <a:rPr lang="en-US" sz="2000" b="1" dirty="0">
+              <a:rPr lang="en-US" sz="1800" b="1" dirty="0">
                 <a:solidFill>
-                  <a:srgbClr val="E2603C"/>
+                  <a:srgbClr val="11372A"/>
                 </a:solidFill>
                 <a:latin typeface="Segoe UI" pitchFamily="34" charset="0"/>
                 <a:ea typeface="Segoe UI" pitchFamily="34" charset="-122"/>
                 <a:cs typeface="Segoe UI" pitchFamily="34" charset="-120"/>
               </a:rPr>
-              <a:t>2. Match</a:t>
+              <a:t>Match</a:t>
             </a:r>
-            <a:endParaRPr lang="en-US" sz="2000" dirty="0"/>
+            <a:endParaRPr lang="en-US" sz="1800" dirty="0"/>
           </a:p>
         </p:txBody>
       </p:sp>
       <p:sp>
         <p:nvSpPr>
-          <p:cNvPr id="10" name="Text 8"/>
-          <p:cNvSpPr/>
-          <p:nvPr/>
-        </p:nvSpPr>
-        <p:spPr>
-          <a:xfrm>
-            <a:off x="4617720" y="2560320"/>
-            <a:ext cx="2926080" cy="1463040"/>
+          <p:cNvPr id="12" name="Text 10"/>
+          <p:cNvSpPr/>
+          <p:nvPr/>
+        </p:nvSpPr>
+        <p:spPr>
+          <a:xfrm>
+            <a:off x="1554480" y="3758184"/>
+            <a:ext cx="4160520" cy="685800"/>
           </a:xfrm>
           <a:prstGeom prst="rect">
             <a:avLst/>
@@ -4458,57 +5810,91 @@
               <a:buNone/>
             </a:pPr>
             <a:r>
-              <a:rPr lang="en-US" sz="1400" dirty="0">
+              <a:rPr lang="en-US" sz="1350" dirty="0">
                 <a:solidFill>
-                  <a:srgbClr val="11372A"/>
+                  <a:srgbClr val="75897D"/>
                 </a:solidFill>
                 <a:latin typeface="Segoe UI" pitchFamily="34" charset="0"/>
                 <a:ea typeface="Segoe UI" pitchFamily="34" charset="-122"/>
                 <a:cs typeface="Segoe UI" pitchFamily="34" charset="-120"/>
               </a:rPr>
-              <a:t>163-skill catalogue + 30-role library scored in seconds. Grok AI upgrades it when a key is set.</a:t>
+              <a:t>163-skill catalogue scored against 30 real roles in seconds.</a:t>
             </a:r>
-            <a:endParaRPr lang="en-US" sz="1400" dirty="0"/>
+            <a:endParaRPr lang="en-US" sz="1350" dirty="0"/>
           </a:p>
         </p:txBody>
       </p:sp>
       <p:sp>
         <p:nvSpPr>
-          <p:cNvPr id="11" name="Shape 9"/>
-          <p:cNvSpPr/>
-          <p:nvPr/>
-        </p:nvSpPr>
-        <p:spPr>
-          <a:xfrm>
-            <a:off x="8092440" y="1874520"/>
-            <a:ext cx="3291840" cy="2377440"/>
+          <p:cNvPr id="13" name="Shape 11"/>
+          <p:cNvSpPr/>
+          <p:nvPr/>
+        </p:nvSpPr>
+        <p:spPr>
+          <a:xfrm>
+            <a:off x="777240" y="4800600"/>
+            <a:ext cx="566928" cy="566928"/>
           </a:xfrm>
           <a:prstGeom prst="roundRect">
             <a:avLst>
-              <a:gd name="adj" fmla="val 3846"/>
+              <a:gd name="adj" fmla="val 22581"/>
             </a:avLst>
           </a:prstGeom>
           <a:solidFill>
-            <a:srgbClr val="FFFFFF"/>
+            <a:srgbClr val="E2603C"/>
           </a:solidFill>
-          <a:ln w="19050">
-            <a:solidFill>
-              <a:srgbClr val="F1EFE6"/>
-            </a:solidFill>
-            <a:prstDash val="solid"/>
-          </a:ln>
-        </p:spPr>
-      </p:sp>
-      <p:sp>
-        <p:nvSpPr>
-          <p:cNvPr id="12" name="Text 10"/>
-          <p:cNvSpPr/>
-          <p:nvPr/>
-        </p:nvSpPr>
-        <p:spPr>
-          <a:xfrm>
-            <a:off x="8275320" y="2057400"/>
-            <a:ext cx="2926080" cy="457200"/>
+          <a:ln/>
+        </p:spPr>
+      </p:sp>
+      <p:sp>
+        <p:nvSpPr>
+          <p:cNvPr id="14" name="Text 12"/>
+          <p:cNvSpPr/>
+          <p:nvPr/>
+        </p:nvSpPr>
+        <p:spPr>
+          <a:xfrm>
+            <a:off x="777240" y="4800600"/>
+            <a:ext cx="566928" cy="566928"/>
+          </a:xfrm>
+          <a:prstGeom prst="rect">
+            <a:avLst/>
+          </a:prstGeom>
+          <a:noFill/>
+          <a:ln/>
+        </p:spPr>
+        <p:txBody>
+          <a:bodyPr wrap="square" rtlCol="0" anchor="ctr"/>
+          <a:lstStyle/>
+          <a:p>
+            <a:pPr algn="ctr" indent="0" marL="0">
+              <a:buNone/>
+            </a:pPr>
+            <a:r>
+              <a:rPr lang="en-US" sz="2000" b="1" dirty="0">
+                <a:solidFill>
+                  <a:srgbClr val="FFFFFF"/>
+                </a:solidFill>
+                <a:latin typeface="Segoe UI" pitchFamily="34" charset="0"/>
+                <a:ea typeface="Segoe UI" pitchFamily="34" charset="-122"/>
+                <a:cs typeface="Segoe UI" pitchFamily="34" charset="-120"/>
+              </a:rPr>
+              <a:t>3</a:t>
+            </a:r>
+            <a:endParaRPr lang="en-US" sz="2000" dirty="0"/>
+          </a:p>
+        </p:txBody>
+      </p:sp>
+      <p:sp>
+        <p:nvSpPr>
+          <p:cNvPr id="15" name="Text 13"/>
+          <p:cNvSpPr/>
+          <p:nvPr/>
+        </p:nvSpPr>
+        <p:spPr>
+          <a:xfrm>
+            <a:off x="1554480" y="4773168"/>
+            <a:ext cx="4160520" cy="365760"/>
           </a:xfrm>
           <a:prstGeom prst="rect">
             <a:avLst/>
@@ -4524,30 +5910,30 @@
               <a:buNone/>
             </a:pPr>
             <a:r>
-              <a:rPr lang="en-US" sz="2000" b="1" dirty="0">
+              <a:rPr lang="en-US" sz="1800" b="1" dirty="0">
                 <a:solidFill>
-                  <a:srgbClr val="E2603C"/>
+                  <a:srgbClr val="11372A"/>
                 </a:solidFill>
                 <a:latin typeface="Segoe UI" pitchFamily="34" charset="0"/>
                 <a:ea typeface="Segoe UI" pitchFamily="34" charset="-122"/>
                 <a:cs typeface="Segoe UI" pitchFamily="34" charset="-120"/>
               </a:rPr>
-              <a:t>3. Explore</a:t>
+              <a:t>Explore</a:t>
             </a:r>
-            <a:endParaRPr lang="en-US" sz="2000" dirty="0"/>
+            <a:endParaRPr lang="en-US" sz="1800" dirty="0"/>
           </a:p>
         </p:txBody>
       </p:sp>
       <p:sp>
         <p:nvSpPr>
-          <p:cNvPr id="13" name="Text 11"/>
-          <p:cNvSpPr/>
-          <p:nvPr/>
-        </p:nvSpPr>
-        <p:spPr>
-          <a:xfrm>
-            <a:off x="8275320" y="2560320"/>
-            <a:ext cx="2926080" cy="1463040"/>
+          <p:cNvPr id="16" name="Text 14"/>
+          <p:cNvSpPr/>
+          <p:nvPr/>
+        </p:nvSpPr>
+        <p:spPr>
+          <a:xfrm>
+            <a:off x="1554480" y="5129784"/>
+            <a:ext cx="4160520" cy="685800"/>
           </a:xfrm>
           <a:prstGeom prst="rect">
             <a:avLst/>
@@ -4563,46 +5949,7 @@
               <a:buNone/>
             </a:pPr>
             <a:r>
-              <a:rPr lang="en-US" sz="1400" dirty="0">
-                <a:solidFill>
-                  <a:srgbClr val="11372A"/>
-                </a:solidFill>
-                <a:latin typeface="Segoe UI" pitchFamily="34" charset="0"/>
-                <a:ea typeface="Segoe UI" pitchFamily="34" charset="-122"/>
-                <a:cs typeface="Segoe UI" pitchFamily="34" charset="-120"/>
-              </a:rPr>
-              <a:t>Ranked roles with match %, plain-English reasons, and a required-skills checklist per role.</a:t>
-            </a:r>
-            <a:endParaRPr lang="en-US" sz="1400" dirty="0"/>
-          </a:p>
-        </p:txBody>
-      </p:sp>
-      <p:sp>
-        <p:nvSpPr>
-          <p:cNvPr id="14" name="Text 12"/>
-          <p:cNvSpPr/>
-          <p:nvPr/>
-        </p:nvSpPr>
-        <p:spPr>
-          <a:xfrm>
-            <a:off x="777240" y="4663440"/>
-            <a:ext cx="10515600" cy="548640"/>
-          </a:xfrm>
-          <a:prstGeom prst="rect">
-            <a:avLst/>
-          </a:prstGeom>
-          <a:noFill/>
-          <a:ln/>
-        </p:spPr>
-        <p:txBody>
-          <a:bodyPr wrap="square" rtlCol="0" anchor="ctr"/>
-          <a:lstStyle/>
-          <a:p>
-            <a:pPr indent="0" marL="0">
-              <a:buNone/>
-            </a:pPr>
-            <a:r>
-              <a:rPr lang="en-US" sz="1700" i="1" dirty="0">
+              <a:rPr lang="en-US" sz="1350" dirty="0">
                 <a:solidFill>
                   <a:srgbClr val="75897D"/>
                 </a:solidFill>
@@ -4610,15 +5957,131 @@
                 <a:ea typeface="Segoe UI" pitchFamily="34" charset="-122"/>
                 <a:cs typeface="Segoe UI" pitchFamily="34" charset="-120"/>
               </a:rPr>
-              <a:t>Always at least six roles - best fit first, every time.</a:t>
+              <a:t>Ranked roles with match %, reasons, and skill checklists.</a:t>
             </a:r>
-            <a:endParaRPr lang="en-US" sz="1700" dirty="0"/>
+            <a:endParaRPr lang="en-US" sz="1350" dirty="0"/>
           </a:p>
         </p:txBody>
       </p:sp>
       <p:sp>
         <p:nvSpPr>
-          <p:cNvPr id="15" name="Text 13"/>
+          <p:cNvPr id="17" name="Shape 15"/>
+          <p:cNvSpPr/>
+          <p:nvPr/>
+        </p:nvSpPr>
+        <p:spPr>
+          <a:xfrm>
+            <a:off x="6217920" y="2212848"/>
+            <a:ext cx="5486400" cy="2661920"/>
+          </a:xfrm>
+          <a:prstGeom prst="roundRect">
+            <a:avLst>
+              <a:gd name="adj" fmla="val 2748"/>
+            </a:avLst>
+          </a:prstGeom>
+          <a:solidFill>
+            <a:srgbClr val="0D2C20">
+              <a:alpha val="22000"/>
+            </a:srgbClr>
+          </a:solidFill>
+          <a:ln/>
+        </p:spPr>
+      </p:sp>
+      <p:pic>
+        <p:nvPicPr>
+          <p:cNvPr id="18" name="Image 0" descr="C:/Users/Komal Saxena/AppData/Local/Temp/opencode/deckimg/01-home-idle.png">    </p:cNvPr>
+          <p:cNvPicPr>
+            <a:picLocks noChangeAspect="1"/>
+          </p:cNvPicPr>
+          <p:nvPr/>
+        </p:nvPicPr>
+        <p:blipFill>
+          <a:blip r:embed="rId1"/>
+          <a:stretch>
+            <a:fillRect/>
+          </a:stretch>
+        </p:blipFill>
+        <p:spPr>
+          <a:xfrm>
+            <a:off x="6172200" y="2148840"/>
+            <a:ext cx="5486400" cy="2661920"/>
+          </a:xfrm>
+          <a:prstGeom prst="rect">
+            <a:avLst/>
+          </a:prstGeom>
+        </p:spPr>
+      </p:pic>
+      <p:sp>
+        <p:nvSpPr>
+          <p:cNvPr id="19" name="Shape 16"/>
+          <p:cNvSpPr/>
+          <p:nvPr/>
+        </p:nvSpPr>
+        <p:spPr>
+          <a:xfrm>
+            <a:off x="6172200" y="2148840"/>
+            <a:ext cx="5486400" cy="2661920"/>
+          </a:xfrm>
+          <a:prstGeom prst="roundRect">
+            <a:avLst>
+              <a:gd name="adj" fmla="val 2748"/>
+            </a:avLst>
+          </a:prstGeom>
+          <a:solidFill>
+            <a:srgbClr val="FFFFFF">
+              <a:alpha val="0"/>
+            </a:srgbClr>
+          </a:solidFill>
+          <a:ln w="12700">
+            <a:solidFill>
+              <a:srgbClr val="D8D5C8"/>
+            </a:solidFill>
+            <a:prstDash val="solid"/>
+          </a:ln>
+        </p:spPr>
+      </p:sp>
+      <p:sp>
+        <p:nvSpPr>
+          <p:cNvPr id="20" name="Text 17"/>
+          <p:cNvSpPr/>
+          <p:nvPr/>
+        </p:nvSpPr>
+        <p:spPr>
+          <a:xfrm>
+            <a:off x="6172200" y="5074920"/>
+            <a:ext cx="5486400" cy="365760"/>
+          </a:xfrm>
+          <a:prstGeom prst="rect">
+            <a:avLst/>
+          </a:prstGeom>
+          <a:noFill/>
+          <a:ln/>
+        </p:spPr>
+        <p:txBody>
+          <a:bodyPr wrap="square" rtlCol="0" anchor="ctr"/>
+          <a:lstStyle/>
+          <a:p>
+            <a:pPr algn="ctr" indent="0" marL="0">
+              <a:buNone/>
+            </a:pPr>
+            <a:r>
+              <a:rPr lang="en-US" sz="1200" b="1" dirty="0">
+                <a:solidFill>
+                  <a:srgbClr val="123A2B"/>
+                </a:solidFill>
+                <a:latin typeface="Segoe UI" pitchFamily="34" charset="0"/>
+                <a:ea typeface="Segoe UI" pitchFamily="34" charset="-122"/>
+                <a:cs typeface="Segoe UI" pitchFamily="34" charset="-120"/>
+              </a:rPr>
+              <a:t>The Next Role home interface</a:t>
+            </a:r>
+            <a:endParaRPr lang="en-US" sz="1200" dirty="0"/>
+          </a:p>
+        </p:txBody>
+      </p:sp>
+      <p:sp>
+        <p:nvSpPr>
+          <p:cNvPr id="21" name="Text 18"/>
           <p:cNvSpPr/>
           <p:nvPr/>
         </p:nvSpPr>
@@ -4718,7 +6181,7 @@
                               <p:par>
                                 <p:cTn id="8" presetID="10" presetClass="entr" presetSubtype="0" fill="hold" grpId="0" nodeType="withEffect">
                                   <p:stCondLst>
-                                    <p:cond delay="350"/>
+                                    <p:cond delay="320"/>
                                   </p:stCondLst>
                                   <p:childTnLst>
                                     <p:set>
@@ -4753,7 +6216,7 @@
                               <p:par>
                                 <p:cTn id="11" presetID="10" presetClass="entr" presetSubtype="0" fill="hold" grpId="0" nodeType="withEffect">
                                   <p:stCondLst>
-                                    <p:cond delay="700"/>
+                                    <p:cond delay="640"/>
                                   </p:stCondLst>
                                   <p:childTnLst>
                                     <p:set>
@@ -4788,7 +6251,7 @@
                               <p:par>
                                 <p:cTn id="14" presetID="10" presetClass="entr" presetSubtype="0" fill="hold" grpId="0" nodeType="withEffect">
                                   <p:stCondLst>
-                                    <p:cond delay="1050"/>
+                                    <p:cond delay="960"/>
                                   </p:stCondLst>
                                   <p:childTnLst>
                                     <p:set>
@@ -4823,7 +6286,7 @@
                               <p:par>
                                 <p:cTn id="17" presetID="10" presetClass="entr" presetSubtype="0" fill="hold" grpId="0" nodeType="withEffect">
                                   <p:stCondLst>
-                                    <p:cond delay="1400"/>
+                                    <p:cond delay="1280"/>
                                   </p:stCondLst>
                                   <p:childTnLst>
                                     <p:set>
@@ -4858,7 +6321,7 @@
                               <p:par>
                                 <p:cTn id="20" presetID="10" presetClass="entr" presetSubtype="0" fill="hold" grpId="0" nodeType="withEffect">
                                   <p:stCondLst>
-                                    <p:cond delay="1750"/>
+                                    <p:cond delay="1600"/>
                                   </p:stCondLst>
                                   <p:childTnLst>
                                     <p:set>
@@ -4893,7 +6356,7 @@
                               <p:par>
                                 <p:cTn id="23" presetID="10" presetClass="entr" presetSubtype="0" fill="hold" grpId="0" nodeType="withEffect">
                                   <p:stCondLst>
-                                    <p:cond delay="2100"/>
+                                    <p:cond delay="1920"/>
                                   </p:stCondLst>
                                   <p:childTnLst>
                                     <p:set>
@@ -4928,7 +6391,7 @@
                               <p:par>
                                 <p:cTn id="26" presetID="10" presetClass="entr" presetSubtype="0" fill="hold" grpId="0" nodeType="withEffect">
                                   <p:stCondLst>
-                                    <p:cond delay="2450"/>
+                                    <p:cond delay="2240"/>
                                   </p:stCondLst>
                                   <p:childTnLst>
                                     <p:set>
@@ -4963,7 +6426,7 @@
                               <p:par>
                                 <p:cTn id="29" presetID="10" presetClass="entr" presetSubtype="0" fill="hold" grpId="0" nodeType="withEffect">
                                   <p:stCondLst>
-                                    <p:cond delay="2800"/>
+                                    <p:cond delay="2560"/>
                                   </p:stCondLst>
                                   <p:childTnLst>
                                     <p:set>
@@ -4998,7 +6461,7 @@
                               <p:par>
                                 <p:cTn id="32" presetID="10" presetClass="entr" presetSubtype="0" fill="hold" grpId="0" nodeType="withEffect">
                                   <p:stCondLst>
-                                    <p:cond delay="3150"/>
+                                    <p:cond delay="2880"/>
                                   </p:stCondLst>
                                   <p:childTnLst>
                                     <p:set>
@@ -5033,7 +6496,7 @@
                               <p:par>
                                 <p:cTn id="35" presetID="10" presetClass="entr" presetSubtype="0" fill="hold" grpId="0" nodeType="withEffect">
                                   <p:stCondLst>
-                                    <p:cond delay="3500"/>
+                                    <p:cond delay="3200"/>
                                   </p:stCondLst>
                                   <p:childTnLst>
                                     <p:set>
@@ -5068,7 +6531,7 @@
                               <p:par>
                                 <p:cTn id="38" presetID="10" presetClass="entr" presetSubtype="0" fill="hold" grpId="0" nodeType="withEffect">
                                   <p:stCondLst>
-                                    <p:cond delay="3850"/>
+                                    <p:cond delay="3520"/>
                                   </p:stCondLst>
                                   <p:childTnLst>
                                     <p:set>
@@ -5103,7 +6566,7 @@
                               <p:par>
                                 <p:cTn id="41" presetID="10" presetClass="entr" presetSubtype="0" fill="hold" grpId="0" nodeType="withEffect">
                                   <p:stCondLst>
-                                    <p:cond delay="4200"/>
+                                    <p:cond delay="3840"/>
                                   </p:stCondLst>
                                   <p:childTnLst>
                                     <p:set>
@@ -5138,7 +6601,7 @@
                               <p:par>
                                 <p:cTn id="44" presetID="10" presetClass="entr" presetSubtype="0" fill="hold" grpId="0" nodeType="withEffect">
                                   <p:stCondLst>
-                                    <p:cond delay="4550"/>
+                                    <p:cond delay="4160"/>
                                   </p:stCondLst>
                                   <p:childTnLst>
                                     <p:set>
@@ -5164,6 +6627,216 @@
                                         <p:cTn id="45" dur="500"/>
                                         <p:tgtEl>
                                           <p:spTgt spid="15"/>
+                                        </p:tgtEl>
+                                      </p:cBhvr>
+                                    </p:animEffect>
+                                  </p:childTnLst>
+                                </p:cTn>
+                              </p:par>
+                              <p:par>
+                                <p:cTn id="47" presetID="10" presetClass="entr" presetSubtype="0" fill="hold" grpId="0" nodeType="withEffect">
+                                  <p:stCondLst>
+                                    <p:cond delay="4480"/>
+                                  </p:stCondLst>
+                                  <p:childTnLst>
+                                    <p:set>
+                                      <p:cBhvr>
+                                        <p:cTn id="46" dur="1" fill="hold">
+                                          <p:stCondLst>
+                                            <p:cond delay="0"/>
+                                          </p:stCondLst>
+                                        </p:cTn>
+                                        <p:tgtEl>
+                                          <p:spTgt spid="16"/>
+                                        </p:tgtEl>
+                                        <p:attrNameLst>
+                                          <p:attrName>style.visibility</p:attrName>
+                                        </p:attrNameLst>
+                                      </p:cBhvr>
+                                      <p:to>
+                                        <p:strVal val="visible"/>
+                                      </p:to>
+                                    </p:set>
+                                    <p:animEffect transition="in" filter="fade">
+                                      <p:cBhvr>
+                                        <p:cTn id="48" dur="500"/>
+                                        <p:tgtEl>
+                                          <p:spTgt spid="16"/>
+                                        </p:tgtEl>
+                                      </p:cBhvr>
+                                    </p:animEffect>
+                                  </p:childTnLst>
+                                </p:cTn>
+                              </p:par>
+                              <p:par>
+                                <p:cTn id="50" presetID="10" presetClass="entr" presetSubtype="0" fill="hold" grpId="0" nodeType="withEffect">
+                                  <p:stCondLst>
+                                    <p:cond delay="4800"/>
+                                  </p:stCondLst>
+                                  <p:childTnLst>
+                                    <p:set>
+                                      <p:cBhvr>
+                                        <p:cTn id="49" dur="1" fill="hold">
+                                          <p:stCondLst>
+                                            <p:cond delay="0"/>
+                                          </p:stCondLst>
+                                        </p:cTn>
+                                        <p:tgtEl>
+                                          <p:spTgt spid="17"/>
+                                        </p:tgtEl>
+                                        <p:attrNameLst>
+                                          <p:attrName>style.visibility</p:attrName>
+                                        </p:attrNameLst>
+                                      </p:cBhvr>
+                                      <p:to>
+                                        <p:strVal val="visible"/>
+                                      </p:to>
+                                    </p:set>
+                                    <p:animEffect transition="in" filter="fade">
+                                      <p:cBhvr>
+                                        <p:cTn id="51" dur="500"/>
+                                        <p:tgtEl>
+                                          <p:spTgt spid="17"/>
+                                        </p:tgtEl>
+                                      </p:cBhvr>
+                                    </p:animEffect>
+                                  </p:childTnLst>
+                                </p:cTn>
+                              </p:par>
+                              <p:par>
+                                <p:cTn id="53" presetID="10" presetClass="entr" presetSubtype="0" fill="hold" grpId="0" nodeType="withEffect">
+                                  <p:stCondLst>
+                                    <p:cond delay="5120"/>
+                                  </p:stCondLst>
+                                  <p:childTnLst>
+                                    <p:set>
+                                      <p:cBhvr>
+                                        <p:cTn id="52" dur="1" fill="hold">
+                                          <p:stCondLst>
+                                            <p:cond delay="0"/>
+                                          </p:stCondLst>
+                                        </p:cTn>
+                                        <p:tgtEl>
+                                          <p:spTgt spid="18"/>
+                                        </p:tgtEl>
+                                        <p:attrNameLst>
+                                          <p:attrName>style.visibility</p:attrName>
+                                        </p:attrNameLst>
+                                      </p:cBhvr>
+                                      <p:to>
+                                        <p:strVal val="visible"/>
+                                      </p:to>
+                                    </p:set>
+                                    <p:animEffect transition="in" filter="fade">
+                                      <p:cBhvr>
+                                        <p:cTn id="54" dur="500"/>
+                                        <p:tgtEl>
+                                          <p:spTgt spid="18"/>
+                                        </p:tgtEl>
+                                      </p:cBhvr>
+                                    </p:animEffect>
+                                  </p:childTnLst>
+                                </p:cTn>
+                              </p:par>
+                              <p:par>
+                                <p:cTn id="56" presetID="10" presetClass="entr" presetSubtype="0" fill="hold" grpId="0" nodeType="withEffect">
+                                  <p:stCondLst>
+                                    <p:cond delay="5440"/>
+                                  </p:stCondLst>
+                                  <p:childTnLst>
+                                    <p:set>
+                                      <p:cBhvr>
+                                        <p:cTn id="55" dur="1" fill="hold">
+                                          <p:stCondLst>
+                                            <p:cond delay="0"/>
+                                          </p:stCondLst>
+                                        </p:cTn>
+                                        <p:tgtEl>
+                                          <p:spTgt spid="19"/>
+                                        </p:tgtEl>
+                                        <p:attrNameLst>
+                                          <p:attrName>style.visibility</p:attrName>
+                                        </p:attrNameLst>
+                                      </p:cBhvr>
+                                      <p:to>
+                                        <p:strVal val="visible"/>
+                                      </p:to>
+                                    </p:set>
+                                    <p:animEffect transition="in" filter="fade">
+                                      <p:cBhvr>
+                                        <p:cTn id="57" dur="500"/>
+                                        <p:tgtEl>
+                                          <p:spTgt spid="19"/>
+                                        </p:tgtEl>
+                                      </p:cBhvr>
+                                    </p:animEffect>
+                                  </p:childTnLst>
+                                </p:cTn>
+                              </p:par>
+                              <p:par>
+                                <p:cTn id="59" presetID="10" presetClass="entr" presetSubtype="0" fill="hold" grpId="0" nodeType="withEffect">
+                                  <p:stCondLst>
+                                    <p:cond delay="5760"/>
+                                  </p:stCondLst>
+                                  <p:childTnLst>
+                                    <p:set>
+                                      <p:cBhvr>
+                                        <p:cTn id="58" dur="1" fill="hold">
+                                          <p:stCondLst>
+                                            <p:cond delay="0"/>
+                                          </p:stCondLst>
+                                        </p:cTn>
+                                        <p:tgtEl>
+                                          <p:spTgt spid="20"/>
+                                        </p:tgtEl>
+                                        <p:attrNameLst>
+                                          <p:attrName>style.visibility</p:attrName>
+                                        </p:attrNameLst>
+                                      </p:cBhvr>
+                                      <p:to>
+                                        <p:strVal val="visible"/>
+                                      </p:to>
+                                    </p:set>
+                                    <p:animEffect transition="in" filter="fade">
+                                      <p:cBhvr>
+                                        <p:cTn id="60" dur="500"/>
+                                        <p:tgtEl>
+                                          <p:spTgt spid="20"/>
+                                        </p:tgtEl>
+                                      </p:cBhvr>
+                                    </p:animEffect>
+                                  </p:childTnLst>
+                                </p:cTn>
+                              </p:par>
+                              <p:par>
+                                <p:cTn id="62" presetID="10" presetClass="entr" presetSubtype="0" fill="hold" grpId="0" nodeType="withEffect">
+                                  <p:stCondLst>
+                                    <p:cond delay="6080"/>
+                                  </p:stCondLst>
+                                  <p:childTnLst>
+                                    <p:set>
+                                      <p:cBhvr>
+                                        <p:cTn id="61" dur="1" fill="hold">
+                                          <p:stCondLst>
+                                            <p:cond delay="0"/>
+                                          </p:stCondLst>
+                                        </p:cTn>
+                                        <p:tgtEl>
+                                          <p:spTgt spid="21"/>
+                                        </p:tgtEl>
+                                        <p:attrNameLst>
+                                          <p:attrName>style.visibility</p:attrName>
+                                        </p:attrNameLst>
+                                      </p:cBhvr>
+                                      <p:to>
+                                        <p:strVal val="visible"/>
+                                      </p:to>
+                                    </p:set>
+                                    <p:animEffect transition="in" filter="fade">
+                                      <p:cBhvr>
+                                        <p:cTn id="63" dur="500"/>
+                                        <p:tgtEl>
+                                          <p:spTgt spid="21"/>
                                         </p:tgtEl>
                                       </p:cBhvr>
                                     </p:animEffect>
@@ -5253,7 +6926,7 @@
         </p:nvSpPr>
         <p:spPr>
           <a:xfrm>
-            <a:off x="685800" y="502920"/>
+            <a:off x="685800" y="457200"/>
             <a:ext cx="10789920" cy="320040"/>
           </a:xfrm>
           <a:prstGeom prst="rect">
@@ -5292,8 +6965,8 @@
         </p:nvSpPr>
         <p:spPr>
           <a:xfrm>
-            <a:off x="685800" y="886968"/>
-            <a:ext cx="10789920" cy="914400"/>
+            <a:off x="685800" y="841248"/>
+            <a:ext cx="10789920" cy="731520"/>
           </a:xfrm>
           <a:prstGeom prst="rect">
             <a:avLst/>
@@ -5309,7 +6982,7 @@
               <a:buNone/>
             </a:pPr>
             <a:r>
-              <a:rPr lang="en-US" sz="3400" b="1" dirty="0">
+              <a:rPr lang="en-US" sz="3200" b="1" dirty="0">
                 <a:solidFill>
                   <a:srgbClr val="11372A"/>
                 </a:solidFill>
@@ -5319,7 +6992,7 @@
               </a:rPr>
               <a:t>It reads any resume - even scans</a:t>
             </a:r>
-            <a:endParaRPr lang="en-US" sz="3400" dirty="0"/>
+            <a:endParaRPr lang="en-US" sz="3200" dirty="0"/>
           </a:p>
         </p:txBody>
       </p:sp>
@@ -5331,8 +7004,8 @@
         </p:nvSpPr>
         <p:spPr>
           <a:xfrm>
-            <a:off x="777240" y="1828800"/>
-            <a:ext cx="10515600" cy="4023360"/>
+            <a:off x="777240" y="2011680"/>
+            <a:ext cx="5120640" cy="3108960"/>
           </a:xfrm>
           <a:prstGeom prst="rect">
             <a:avLst/>
@@ -5346,13 +7019,13 @@
           <a:p>
             <a:pPr marL="228600" indent="-228600">
               <a:lnSpc>
-                <a:spcPct val="135000"/>
+                <a:spcPct val="130000"/>
               </a:lnSpc>
               <a:buSzPct val="100000"/>
               <a:buChar char="•"/>
             </a:pPr>
             <a:r>
-              <a:rPr lang="en-US" sz="1800" dirty="0">
+              <a:rPr lang="en-US" sz="1650" dirty="0">
                 <a:solidFill>
                   <a:srgbClr val="11372A"/>
                 </a:solidFill>
@@ -5360,20 +7033,20 @@
                 <a:ea typeface="Segoe UI" pitchFamily="34" charset="-122"/>
                 <a:cs typeface="Segoe UI" pitchFamily="34" charset="-120"/>
               </a:rPr>
-              <a:t>Engine 1 - pdf-parse: fast text extraction for standard PDF resumes.</a:t>
+              <a:t>Engine 1 - pdf-parse: fast text from standard PDFs.</a:t>
             </a:r>
-            <a:endParaRPr lang="en-US" sz="1800" dirty="0"/>
+            <a:endParaRPr lang="en-US" sz="1650" dirty="0"/>
           </a:p>
           <a:p>
             <a:pPr marL="228600" indent="-228600">
               <a:lnSpc>
-                <a:spcPct val="135000"/>
+                <a:spcPct val="130000"/>
               </a:lnSpc>
               <a:buSzPct val="100000"/>
               <a:buChar char="•"/>
             </a:pPr>
             <a:r>
-              <a:rPr lang="en-US" sz="1800" dirty="0">
+              <a:rPr lang="en-US" sz="1650" dirty="0">
                 <a:solidFill>
                   <a:srgbClr val="11372A"/>
                 </a:solidFill>
@@ -5381,20 +7054,20 @@
                 <a:ea typeface="Segoe UI" pitchFamily="34" charset="-122"/>
                 <a:cs typeface="Segoe UI" pitchFamily="34" charset="-120"/>
               </a:rPr>
-              <a:t>Engine 2 - pdf.js 3.x: rescues modern or unusual PDF layouts.</a:t>
+              <a:t>Engine 2 - pdf.js 3.x: rescues modern or unusual layouts.</a:t>
             </a:r>
-            <a:endParaRPr lang="en-US" sz="1800" dirty="0"/>
+            <a:endParaRPr lang="en-US" sz="1650" dirty="0"/>
           </a:p>
           <a:p>
             <a:pPr marL="228600" indent="-228600">
               <a:lnSpc>
-                <a:spcPct val="135000"/>
+                <a:spcPct val="130000"/>
               </a:lnSpc>
               <a:buSzPct val="100000"/>
               <a:buChar char="•"/>
             </a:pPr>
             <a:r>
-              <a:rPr lang="en-US" sz="1800" dirty="0">
+              <a:rPr lang="en-US" sz="1650" dirty="0">
                 <a:solidFill>
                   <a:srgbClr val="11372A"/>
                 </a:solidFill>
@@ -5402,20 +7075,20 @@
                 <a:ea typeface="Segoe UI" pitchFamily="34" charset="-122"/>
                 <a:cs typeface="Segoe UI" pitchFamily="34" charset="-120"/>
               </a:rPr>
-              <a:t>Engine 3 - Tesseract OCR: renders each page as an image and reads it like eyes - rescues scanned or photographed resumes with no text layer.</a:t>
+              <a:t>Engine 3 - Tesseract OCR: renders each page as an image and reads it like eyes.</a:t>
             </a:r>
-            <a:endParaRPr lang="en-US" sz="1800" dirty="0"/>
+            <a:endParaRPr lang="en-US" sz="1650" dirty="0"/>
           </a:p>
           <a:p>
             <a:pPr marL="228600" indent="-228600">
               <a:lnSpc>
-                <a:spcPct val="135000"/>
+                <a:spcPct val="130000"/>
               </a:lnSpc>
               <a:buSzPct val="100000"/>
               <a:buChar char="•"/>
             </a:pPr>
             <a:r>
-              <a:rPr lang="en-US" sz="1800" dirty="0">
+              <a:rPr lang="en-US" sz="1650" dirty="0">
                 <a:solidFill>
                   <a:srgbClr val="11372A"/>
                 </a:solidFill>
@@ -5423,20 +7096,20 @@
                 <a:ea typeface="Segoe UI" pitchFamily="34" charset="-122"/>
                 <a:cs typeface="Segoe UI" pitchFamily="34" charset="-120"/>
               </a:rPr>
-              <a:t>DOCX via Mammoth, plain text as-is. Clear, specific errors when a file truly cannot be read.</a:t>
+              <a:t>DOCX via Mammoth; plain text as-is.</a:t>
             </a:r>
-            <a:endParaRPr lang="en-US" sz="1800" dirty="0"/>
+            <a:endParaRPr lang="en-US" sz="1650" dirty="0"/>
           </a:p>
           <a:p>
             <a:pPr marL="228600" indent="-228600">
               <a:lnSpc>
-                <a:spcPct val="135000"/>
+                <a:spcPct val="130000"/>
               </a:lnSpc>
               <a:buSzPct val="100000"/>
               <a:buChar char="•"/>
             </a:pPr>
             <a:r>
-              <a:rPr lang="en-US" sz="1800" dirty="0">
+              <a:rPr lang="en-US" sz="1650" dirty="0">
                 <a:solidFill>
                   <a:srgbClr val="11372A"/>
                 </a:solidFill>
@@ -5446,13 +7119,190 @@
               </a:rPr>
               <a:t>Verified on a scanned resume: 3,101 characters recovered, 15 skills detected.</a:t>
             </a:r>
-            <a:endParaRPr lang="en-US" sz="1800" dirty="0"/>
+            <a:endParaRPr lang="en-US" sz="1650" dirty="0"/>
           </a:p>
         </p:txBody>
       </p:sp>
       <p:sp>
         <p:nvSpPr>
-          <p:cNvPr id="6" name="Text 4"/>
+          <p:cNvPr id="6" name="Shape 4"/>
+          <p:cNvSpPr/>
+          <p:nvPr/>
+        </p:nvSpPr>
+        <p:spPr>
+          <a:xfrm>
+            <a:off x="777240" y="5257800"/>
+            <a:ext cx="5120640" cy="777240"/>
+          </a:xfrm>
+          <a:prstGeom prst="roundRect">
+            <a:avLst>
+              <a:gd name="adj" fmla="val 11765"/>
+            </a:avLst>
+          </a:prstGeom>
+          <a:solidFill>
+            <a:srgbClr val="123A2B"/>
+          </a:solidFill>
+          <a:ln/>
+        </p:spPr>
+      </p:sp>
+      <p:sp>
+        <p:nvSpPr>
+          <p:cNvPr id="7" name="Text 5"/>
+          <p:cNvSpPr/>
+          <p:nvPr/>
+        </p:nvSpPr>
+        <p:spPr>
+          <a:xfrm>
+            <a:off x="960120" y="5257800"/>
+            <a:ext cx="4754880" cy="777240"/>
+          </a:xfrm>
+          <a:prstGeom prst="rect">
+            <a:avLst/>
+          </a:prstGeom>
+          <a:noFill/>
+          <a:ln/>
+        </p:spPr>
+        <p:txBody>
+          <a:bodyPr wrap="square" rtlCol="0" anchor="ctr"/>
+          <a:lstStyle/>
+          <a:p>
+            <a:pPr indent="0" marL="0">
+              <a:buNone/>
+            </a:pPr>
+            <a:r>
+              <a:rPr lang="en-US" sz="1350" b="1" dirty="0">
+                <a:solidFill>
+                  <a:srgbClr val="F1EFE6"/>
+                </a:solidFill>
+                <a:latin typeface="Segoe UI" pitchFamily="34" charset="0"/>
+                <a:ea typeface="Segoe UI" pitchFamily="34" charset="-122"/>
+                <a:cs typeface="Segoe UI" pitchFamily="34" charset="-120"/>
+              </a:rPr>
+              <a:t>Same engine runs server-side AND fully in the browser.</a:t>
+            </a:r>
+            <a:endParaRPr lang="en-US" sz="1350" dirty="0"/>
+          </a:p>
+        </p:txBody>
+      </p:sp>
+      <p:sp>
+        <p:nvSpPr>
+          <p:cNvPr id="8" name="Shape 6"/>
+          <p:cNvSpPr/>
+          <p:nvPr/>
+        </p:nvSpPr>
+        <p:spPr>
+          <a:xfrm>
+            <a:off x="6355080" y="2167128"/>
+            <a:ext cx="5394960" cy="2617555"/>
+          </a:xfrm>
+          <a:prstGeom prst="roundRect">
+            <a:avLst>
+              <a:gd name="adj" fmla="val 2795"/>
+            </a:avLst>
+          </a:prstGeom>
+          <a:solidFill>
+            <a:srgbClr val="0D2C20">
+              <a:alpha val="22000"/>
+            </a:srgbClr>
+          </a:solidFill>
+          <a:ln/>
+        </p:spPr>
+      </p:sp>
+      <p:pic>
+        <p:nvPicPr>
+          <p:cNvPr id="9" name="Image 0" descr="C:/Users/Komal Saxena/AppData/Local/Temp/opencode/deckimg/02-home-loading.png">    </p:cNvPr>
+          <p:cNvPicPr>
+            <a:picLocks noChangeAspect="1"/>
+          </p:cNvPicPr>
+          <p:nvPr/>
+        </p:nvPicPr>
+        <p:blipFill>
+          <a:blip r:embed="rId1"/>
+          <a:stretch>
+            <a:fillRect/>
+          </a:stretch>
+        </p:blipFill>
+        <p:spPr>
+          <a:xfrm>
+            <a:off x="6309360" y="2103120"/>
+            <a:ext cx="5394960" cy="2617555"/>
+          </a:xfrm>
+          <a:prstGeom prst="rect">
+            <a:avLst/>
+          </a:prstGeom>
+        </p:spPr>
+      </p:pic>
+      <p:sp>
+        <p:nvSpPr>
+          <p:cNvPr id="10" name="Shape 7"/>
+          <p:cNvSpPr/>
+          <p:nvPr/>
+        </p:nvSpPr>
+        <p:spPr>
+          <a:xfrm>
+            <a:off x="6309360" y="2103120"/>
+            <a:ext cx="5394960" cy="2617555"/>
+          </a:xfrm>
+          <a:prstGeom prst="roundRect">
+            <a:avLst>
+              <a:gd name="adj" fmla="val 2795"/>
+            </a:avLst>
+          </a:prstGeom>
+          <a:solidFill>
+            <a:srgbClr val="FFFFFF">
+              <a:alpha val="0"/>
+            </a:srgbClr>
+          </a:solidFill>
+          <a:ln w="12700">
+            <a:solidFill>
+              <a:srgbClr val="D8D5C8"/>
+            </a:solidFill>
+            <a:prstDash val="solid"/>
+          </a:ln>
+        </p:spPr>
+      </p:sp>
+      <p:sp>
+        <p:nvSpPr>
+          <p:cNvPr id="11" name="Text 8"/>
+          <p:cNvSpPr/>
+          <p:nvPr/>
+        </p:nvSpPr>
+        <p:spPr>
+          <a:xfrm>
+            <a:off x="6309360" y="4983480"/>
+            <a:ext cx="5394960" cy="365760"/>
+          </a:xfrm>
+          <a:prstGeom prst="rect">
+            <a:avLst/>
+          </a:prstGeom>
+          <a:noFill/>
+          <a:ln/>
+        </p:spPr>
+        <p:txBody>
+          <a:bodyPr wrap="square" rtlCol="0" anchor="ctr"/>
+          <a:lstStyle/>
+          <a:p>
+            <a:pPr algn="ctr" indent="0" marL="0">
+              <a:buNone/>
+            </a:pPr>
+            <a:r>
+              <a:rPr lang="en-US" sz="1200" b="1" dirty="0">
+                <a:solidFill>
+                  <a:srgbClr val="123A2B"/>
+                </a:solidFill>
+                <a:latin typeface="Segoe UI" pitchFamily="34" charset="0"/>
+                <a:ea typeface="Segoe UI" pitchFamily="34" charset="-122"/>
+                <a:cs typeface="Segoe UI" pitchFamily="34" charset="-120"/>
+              </a:rPr>
+              <a:t>Analysing a scanned resume - live OCR</a:t>
+            </a:r>
+            <a:endParaRPr lang="en-US" sz="1200" dirty="0"/>
+          </a:p>
+        </p:txBody>
+      </p:sp>
+      <p:sp>
+        <p:nvSpPr>
+          <p:cNvPr id="12" name="Text 9"/>
           <p:cNvSpPr/>
           <p:nvPr/>
         </p:nvSpPr>
@@ -5552,7 +7402,7 @@
                               <p:par>
                                 <p:cTn id="8" presetID="10" presetClass="entr" presetSubtype="0" fill="hold" grpId="0" nodeType="withEffect">
                                   <p:stCondLst>
-                                    <p:cond delay="350"/>
+                                    <p:cond delay="320"/>
                                   </p:stCondLst>
                                   <p:childTnLst>
                                     <p:set>
@@ -5587,7 +7437,7 @@
                               <p:par>
                                 <p:cTn id="11" presetID="10" presetClass="entr" presetSubtype="0" fill="hold" grpId="0" nodeType="withEffect">
                                   <p:stCondLst>
-                                    <p:cond delay="700"/>
+                                    <p:cond delay="640"/>
                                   </p:stCondLst>
                                   <p:childTnLst>
                                     <p:set>
@@ -5622,7 +7472,7 @@
                               <p:par>
                                 <p:cTn id="14" presetID="10" presetClass="entr" presetSubtype="0" fill="hold" grpId="0" nodeType="withEffect">
                                   <p:stCondLst>
-                                    <p:cond delay="1050"/>
+                                    <p:cond delay="960"/>
                                   </p:stCondLst>
                                   <p:childTnLst>
                                     <p:set>
@@ -5657,7 +7507,7 @@
                               <p:par>
                                 <p:cTn id="17" presetID="10" presetClass="entr" presetSubtype="0" fill="hold" grpId="0" nodeType="withEffect">
                                   <p:stCondLst>
-                                    <p:cond delay="1400"/>
+                                    <p:cond delay="1280"/>
                                   </p:stCondLst>
                                   <p:childTnLst>
                                     <p:set>
@@ -5683,6 +7533,216 @@
                                         <p:cTn id="18" dur="500"/>
                                         <p:tgtEl>
                                           <p:spTgt spid="6"/>
+                                        </p:tgtEl>
+                                      </p:cBhvr>
+                                    </p:animEffect>
+                                  </p:childTnLst>
+                                </p:cTn>
+                              </p:par>
+                              <p:par>
+                                <p:cTn id="20" presetID="10" presetClass="entr" presetSubtype="0" fill="hold" grpId="0" nodeType="withEffect">
+                                  <p:stCondLst>
+                                    <p:cond delay="1600"/>
+                                  </p:stCondLst>
+                                  <p:childTnLst>
+                                    <p:set>
+                                      <p:cBhvr>
+                                        <p:cTn id="19" dur="1" fill="hold">
+                                          <p:stCondLst>
+                                            <p:cond delay="0"/>
+                                          </p:stCondLst>
+                                        </p:cTn>
+                                        <p:tgtEl>
+                                          <p:spTgt spid="7"/>
+                                        </p:tgtEl>
+                                        <p:attrNameLst>
+                                          <p:attrName>style.visibility</p:attrName>
+                                        </p:attrNameLst>
+                                      </p:cBhvr>
+                                      <p:to>
+                                        <p:strVal val="visible"/>
+                                      </p:to>
+                                    </p:set>
+                                    <p:animEffect transition="in" filter="fade">
+                                      <p:cBhvr>
+                                        <p:cTn id="21" dur="500"/>
+                                        <p:tgtEl>
+                                          <p:spTgt spid="7"/>
+                                        </p:tgtEl>
+                                      </p:cBhvr>
+                                    </p:animEffect>
+                                  </p:childTnLst>
+                                </p:cTn>
+                              </p:par>
+                              <p:par>
+                                <p:cTn id="23" presetID="10" presetClass="entr" presetSubtype="0" fill="hold" grpId="0" nodeType="withEffect">
+                                  <p:stCondLst>
+                                    <p:cond delay="1920"/>
+                                  </p:stCondLst>
+                                  <p:childTnLst>
+                                    <p:set>
+                                      <p:cBhvr>
+                                        <p:cTn id="22" dur="1" fill="hold">
+                                          <p:stCondLst>
+                                            <p:cond delay="0"/>
+                                          </p:stCondLst>
+                                        </p:cTn>
+                                        <p:tgtEl>
+                                          <p:spTgt spid="8"/>
+                                        </p:tgtEl>
+                                        <p:attrNameLst>
+                                          <p:attrName>style.visibility</p:attrName>
+                                        </p:attrNameLst>
+                                      </p:cBhvr>
+                                      <p:to>
+                                        <p:strVal val="visible"/>
+                                      </p:to>
+                                    </p:set>
+                                    <p:animEffect transition="in" filter="fade">
+                                      <p:cBhvr>
+                                        <p:cTn id="24" dur="500"/>
+                                        <p:tgtEl>
+                                          <p:spTgt spid="8"/>
+                                        </p:tgtEl>
+                                      </p:cBhvr>
+                                    </p:animEffect>
+                                  </p:childTnLst>
+                                </p:cTn>
+                              </p:par>
+                              <p:par>
+                                <p:cTn id="26" presetID="10" presetClass="entr" presetSubtype="0" fill="hold" grpId="0" nodeType="withEffect">
+                                  <p:stCondLst>
+                                    <p:cond delay="2240"/>
+                                  </p:stCondLst>
+                                  <p:childTnLst>
+                                    <p:set>
+                                      <p:cBhvr>
+                                        <p:cTn id="25" dur="1" fill="hold">
+                                          <p:stCondLst>
+                                            <p:cond delay="0"/>
+                                          </p:stCondLst>
+                                        </p:cTn>
+                                        <p:tgtEl>
+                                          <p:spTgt spid="9"/>
+                                        </p:tgtEl>
+                                        <p:attrNameLst>
+                                          <p:attrName>style.visibility</p:attrName>
+                                        </p:attrNameLst>
+                                      </p:cBhvr>
+                                      <p:to>
+                                        <p:strVal val="visible"/>
+                                      </p:to>
+                                    </p:set>
+                                    <p:animEffect transition="in" filter="fade">
+                                      <p:cBhvr>
+                                        <p:cTn id="27" dur="500"/>
+                                        <p:tgtEl>
+                                          <p:spTgt spid="9"/>
+                                        </p:tgtEl>
+                                      </p:cBhvr>
+                                    </p:animEffect>
+                                  </p:childTnLst>
+                                </p:cTn>
+                              </p:par>
+                              <p:par>
+                                <p:cTn id="29" presetID="10" presetClass="entr" presetSubtype="0" fill="hold" grpId="0" nodeType="withEffect">
+                                  <p:stCondLst>
+                                    <p:cond delay="2560"/>
+                                  </p:stCondLst>
+                                  <p:childTnLst>
+                                    <p:set>
+                                      <p:cBhvr>
+                                        <p:cTn id="28" dur="1" fill="hold">
+                                          <p:stCondLst>
+                                            <p:cond delay="0"/>
+                                          </p:stCondLst>
+                                        </p:cTn>
+                                        <p:tgtEl>
+                                          <p:spTgt spid="10"/>
+                                        </p:tgtEl>
+                                        <p:attrNameLst>
+                                          <p:attrName>style.visibility</p:attrName>
+                                        </p:attrNameLst>
+                                      </p:cBhvr>
+                                      <p:to>
+                                        <p:strVal val="visible"/>
+                                      </p:to>
+                                    </p:set>
+                                    <p:animEffect transition="in" filter="fade">
+                                      <p:cBhvr>
+                                        <p:cTn id="30" dur="500"/>
+                                        <p:tgtEl>
+                                          <p:spTgt spid="10"/>
+                                        </p:tgtEl>
+                                      </p:cBhvr>
+                                    </p:animEffect>
+                                  </p:childTnLst>
+                                </p:cTn>
+                              </p:par>
+                              <p:par>
+                                <p:cTn id="32" presetID="10" presetClass="entr" presetSubtype="0" fill="hold" grpId="0" nodeType="withEffect">
+                                  <p:stCondLst>
+                                    <p:cond delay="2880"/>
+                                  </p:stCondLst>
+                                  <p:childTnLst>
+                                    <p:set>
+                                      <p:cBhvr>
+                                        <p:cTn id="31" dur="1" fill="hold">
+                                          <p:stCondLst>
+                                            <p:cond delay="0"/>
+                                          </p:stCondLst>
+                                        </p:cTn>
+                                        <p:tgtEl>
+                                          <p:spTgt spid="11"/>
+                                        </p:tgtEl>
+                                        <p:attrNameLst>
+                                          <p:attrName>style.visibility</p:attrName>
+                                        </p:attrNameLst>
+                                      </p:cBhvr>
+                                      <p:to>
+                                        <p:strVal val="visible"/>
+                                      </p:to>
+                                    </p:set>
+                                    <p:animEffect transition="in" filter="fade">
+                                      <p:cBhvr>
+                                        <p:cTn id="33" dur="500"/>
+                                        <p:tgtEl>
+                                          <p:spTgt spid="11"/>
+                                        </p:tgtEl>
+                                      </p:cBhvr>
+                                    </p:animEffect>
+                                  </p:childTnLst>
+                                </p:cTn>
+                              </p:par>
+                              <p:par>
+                                <p:cTn id="35" presetID="10" presetClass="entr" presetSubtype="0" fill="hold" grpId="0" nodeType="withEffect">
+                                  <p:stCondLst>
+                                    <p:cond delay="3200"/>
+                                  </p:stCondLst>
+                                  <p:childTnLst>
+                                    <p:set>
+                                      <p:cBhvr>
+                                        <p:cTn id="34" dur="1" fill="hold">
+                                          <p:stCondLst>
+                                            <p:cond delay="0"/>
+                                          </p:stCondLst>
+                                        </p:cTn>
+                                        <p:tgtEl>
+                                          <p:spTgt spid="12"/>
+                                        </p:tgtEl>
+                                        <p:attrNameLst>
+                                          <p:attrName>style.visibility</p:attrName>
+                                        </p:attrNameLst>
+                                      </p:cBhvr>
+                                      <p:to>
+                                        <p:strVal val="visible"/>
+                                      </p:to>
+                                    </p:set>
+                                    <p:animEffect transition="in" filter="fade">
+                                      <p:cBhvr>
+                                        <p:cTn id="36" dur="500"/>
+                                        <p:tgtEl>
+                                          <p:spTgt spid="12"/>
                                         </p:tgtEl>
                                       </p:cBhvr>
                                     </p:animEffect>
@@ -5772,7 +7832,7 @@
         </p:nvSpPr>
         <p:spPr>
           <a:xfrm>
-            <a:off x="685800" y="502920"/>
+            <a:off x="685800" y="457200"/>
             <a:ext cx="10789920" cy="320040"/>
           </a:xfrm>
           <a:prstGeom prst="rect">
@@ -5811,8 +7871,8 @@
         </p:nvSpPr>
         <p:spPr>
           <a:xfrm>
-            <a:off x="685800" y="886968"/>
-            <a:ext cx="10789920" cy="914400"/>
+            <a:off x="685800" y="841248"/>
+            <a:ext cx="10789920" cy="731520"/>
           </a:xfrm>
           <a:prstGeom prst="rect">
             <a:avLst/>
@@ -5828,7 +7888,7 @@
               <a:buNone/>
             </a:pPr>
             <a:r>
-              <a:rPr lang="en-US" sz="3400" b="1" dirty="0">
+              <a:rPr lang="en-US" sz="3200" b="1" dirty="0">
                 <a:solidFill>
                   <a:srgbClr val="11372A"/>
                 </a:solidFill>
@@ -5838,7 +7898,7 @@
               </a:rPr>
               <a:t>Smart matching - with or without AI</a:t>
             </a:r>
-            <a:endParaRPr lang="en-US" sz="3400" dirty="0"/>
+            <a:endParaRPr lang="en-US" sz="3200" dirty="0"/>
           </a:p>
         </p:txBody>
       </p:sp>
@@ -5850,8 +7910,8 @@
         </p:nvSpPr>
         <p:spPr>
           <a:xfrm>
-            <a:off x="777240" y="1828800"/>
-            <a:ext cx="10515600" cy="4023360"/>
+            <a:off x="777240" y="2011680"/>
+            <a:ext cx="5120640" cy="3291840"/>
           </a:xfrm>
           <a:prstGeom prst="rect">
             <a:avLst/>
@@ -5865,13 +7925,13 @@
           <a:p>
             <a:pPr marL="228600" indent="-228600">
               <a:lnSpc>
-                <a:spcPct val="135000"/>
+                <a:spcPct val="130000"/>
               </a:lnSpc>
               <a:buSzPct val="100000"/>
               <a:buChar char="•"/>
             </a:pPr>
             <a:r>
-              <a:rPr lang="en-US" sz="1800" dirty="0">
+              <a:rPr lang="en-US" sz="1600" dirty="0">
                 <a:solidFill>
                   <a:srgbClr val="11372A"/>
                 </a:solidFill>
@@ -5879,20 +7939,20 @@
                 <a:ea typeface="Segoe UI" pitchFamily="34" charset="-122"/>
                 <a:cs typeface="Segoe UI" pitchFamily="34" charset="-120"/>
               </a:rPr>
-              <a:t>Alias normalisation: ReactJS / Node JS / k8s / postgres / HTML5 all map to catalogue skills.</a:t>
+              <a:t>Alias normalisation: ReactJS / Node JS / k8s / postgres all map to catalogue skills.</a:t>
             </a:r>
-            <a:endParaRPr lang="en-US" sz="1800" dirty="0"/>
+            <a:endParaRPr lang="en-US" sz="1600" dirty="0"/>
           </a:p>
           <a:p>
             <a:pPr marL="228600" indent="-228600">
               <a:lnSpc>
-                <a:spcPct val="135000"/>
+                <a:spcPct val="130000"/>
               </a:lnSpc>
               <a:buSzPct val="100000"/>
               <a:buChar char="•"/>
             </a:pPr>
             <a:r>
-              <a:rPr lang="en-US" sz="1800" dirty="0">
+              <a:rPr lang="en-US" sz="1600" dirty="0">
                 <a:solidFill>
                   <a:srgbClr val="11372A"/>
                 </a:solidFill>
@@ -5902,18 +7962,18 @@
               </a:rPr>
               <a:t>Title signals: "front end developer", "DevOps", "nurse" point straight at roles.</a:t>
             </a:r>
-            <a:endParaRPr lang="en-US" sz="1800" dirty="0"/>
+            <a:endParaRPr lang="en-US" sz="1600" dirty="0"/>
           </a:p>
           <a:p>
             <a:pPr marL="228600" indent="-228600">
               <a:lnSpc>
-                <a:spcPct val="135000"/>
+                <a:spcPct val="130000"/>
               </a:lnSpc>
               <a:buSzPct val="100000"/>
               <a:buChar char="•"/>
             </a:pPr>
             <a:r>
-              <a:rPr lang="en-US" sz="1800" dirty="0">
+              <a:rPr lang="en-US" sz="1600" dirty="0">
                 <a:solidFill>
                   <a:srgbClr val="11372A"/>
                 </a:solidFill>
@@ -5921,20 +7981,20 @@
                 <a:ea typeface="Segoe UI" pitchFamily="34" charset="-122"/>
                 <a:cs typeface="Segoe UI" pitchFamily="34" charset="-120"/>
               </a:rPr>
-              <a:t>Experience parsing: years of experience feed the summary and seniority context.</a:t>
+              <a:t>Experience parsing: years of experience feed summary and seniority.</a:t>
             </a:r>
-            <a:endParaRPr lang="en-US" sz="1800" dirty="0"/>
+            <a:endParaRPr lang="en-US" sz="1600" dirty="0"/>
           </a:p>
           <a:p>
             <a:pPr marL="228600" indent="-228600">
               <a:lnSpc>
-                <a:spcPct val="135000"/>
+                <a:spcPct val="130000"/>
               </a:lnSpc>
               <a:buSzPct val="100000"/>
               <a:buChar char="•"/>
             </a:pPr>
             <a:r>
-              <a:rPr lang="en-US" sz="1800" dirty="0">
+              <a:rPr lang="en-US" sz="1600" dirty="0">
                 <a:solidFill>
                   <a:srgbClr val="11372A"/>
                 </a:solidFill>
@@ -5942,20 +8002,20 @@
                 <a:ea typeface="Segoe UI" pitchFamily="34" charset="-122"/>
                 <a:cs typeface="Segoe UI" pitchFamily="34" charset="-120"/>
               </a:rPr>
-              <a:t>Skill-to-role graph: one skill can imply several roles; direct overlap outranks inference.</a:t>
+              <a:t>Skill-to-role graph: direct overlap outranks inference.</a:t>
             </a:r>
-            <a:endParaRPr lang="en-US" sz="1800" dirty="0"/>
+            <a:endParaRPr lang="en-US" sz="1600" dirty="0"/>
           </a:p>
           <a:p>
             <a:pPr marL="228600" indent="-228600">
               <a:lnSpc>
-                <a:spcPct val="135000"/>
+                <a:spcPct val="130000"/>
               </a:lnSpc>
               <a:buSzPct val="100000"/>
               <a:buChar char="•"/>
             </a:pPr>
             <a:r>
-              <a:rPr lang="en-US" sz="1800" dirty="0">
+              <a:rPr lang="en-US" sz="1600" dirty="0">
                 <a:solidFill>
                   <a:srgbClr val="11372A"/>
                 </a:solidFill>
@@ -5963,15 +8023,131 @@
                 <a:ea typeface="Segoe UI" pitchFamily="34" charset="-122"/>
                 <a:cs typeface="Segoe UI" pitchFamily="34" charset="-120"/>
               </a:rPr>
-              <a:t>Grok AI upgrades the same flow when GROK_API_KEY is set - the local matcher is the safety net.</a:t>
+              <a:t>Grok AI upgrades the same flow when a key is set.</a:t>
             </a:r>
-            <a:endParaRPr lang="en-US" sz="1800" dirty="0"/>
+            <a:endParaRPr lang="en-US" sz="1600" dirty="0"/>
           </a:p>
         </p:txBody>
       </p:sp>
       <p:sp>
         <p:nvSpPr>
-          <p:cNvPr id="6" name="Text 4"/>
+          <p:cNvPr id="6" name="Shape 4"/>
+          <p:cNvSpPr/>
+          <p:nvPr/>
+        </p:nvSpPr>
+        <p:spPr>
+          <a:xfrm>
+            <a:off x="6355080" y="2167128"/>
+            <a:ext cx="5394960" cy="2617555"/>
+          </a:xfrm>
+          <a:prstGeom prst="roundRect">
+            <a:avLst>
+              <a:gd name="adj" fmla="val 2795"/>
+            </a:avLst>
+          </a:prstGeom>
+          <a:solidFill>
+            <a:srgbClr val="0D2C20">
+              <a:alpha val="22000"/>
+            </a:srgbClr>
+          </a:solidFill>
+          <a:ln/>
+        </p:spPr>
+      </p:sp>
+      <p:pic>
+        <p:nvPicPr>
+          <p:cNvPr id="7" name="Image 0" descr="C:/Users/Komal Saxena/AppData/Local/Temp/opencode/deckimg/03-home-results.png">    </p:cNvPr>
+          <p:cNvPicPr>
+            <a:picLocks noChangeAspect="1"/>
+          </p:cNvPicPr>
+          <p:nvPr/>
+        </p:nvPicPr>
+        <p:blipFill>
+          <a:blip r:embed="rId1"/>
+          <a:stretch>
+            <a:fillRect/>
+          </a:stretch>
+        </p:blipFill>
+        <p:spPr>
+          <a:xfrm>
+            <a:off x="6309360" y="2103120"/>
+            <a:ext cx="5394960" cy="2617555"/>
+          </a:xfrm>
+          <a:prstGeom prst="rect">
+            <a:avLst/>
+          </a:prstGeom>
+        </p:spPr>
+      </p:pic>
+      <p:sp>
+        <p:nvSpPr>
+          <p:cNvPr id="8" name="Shape 5"/>
+          <p:cNvSpPr/>
+          <p:nvPr/>
+        </p:nvSpPr>
+        <p:spPr>
+          <a:xfrm>
+            <a:off x="6309360" y="2103120"/>
+            <a:ext cx="5394960" cy="2617555"/>
+          </a:xfrm>
+          <a:prstGeom prst="roundRect">
+            <a:avLst>
+              <a:gd name="adj" fmla="val 2795"/>
+            </a:avLst>
+          </a:prstGeom>
+          <a:solidFill>
+            <a:srgbClr val="FFFFFF">
+              <a:alpha val="0"/>
+            </a:srgbClr>
+          </a:solidFill>
+          <a:ln w="12700">
+            <a:solidFill>
+              <a:srgbClr val="D8D5C8"/>
+            </a:solidFill>
+            <a:prstDash val="solid"/>
+          </a:ln>
+        </p:spPr>
+      </p:sp>
+      <p:sp>
+        <p:nvSpPr>
+          <p:cNvPr id="9" name="Text 6"/>
+          <p:cNvSpPr/>
+          <p:nvPr/>
+        </p:nvSpPr>
+        <p:spPr>
+          <a:xfrm>
+            <a:off x="6309360" y="4983480"/>
+            <a:ext cx="5394960" cy="365760"/>
+          </a:xfrm>
+          <a:prstGeom prst="rect">
+            <a:avLst/>
+          </a:prstGeom>
+          <a:noFill/>
+          <a:ln/>
+        </p:spPr>
+        <p:txBody>
+          <a:bodyPr wrap="square" rtlCol="0" anchor="ctr"/>
+          <a:lstStyle/>
+          <a:p>
+            <a:pPr algn="ctr" indent="0" marL="0">
+              <a:buNone/>
+            </a:pPr>
+            <a:r>
+              <a:rPr lang="en-US" sz="1200" b="1" dirty="0">
+                <a:solidFill>
+                  <a:srgbClr val="123A2B"/>
+                </a:solidFill>
+                <a:latin typeface="Segoe UI" pitchFamily="34" charset="0"/>
+                <a:ea typeface="Segoe UI" pitchFamily="34" charset="-122"/>
+                <a:cs typeface="Segoe UI" pitchFamily="34" charset="-120"/>
+              </a:rPr>
+              <a:t>6 ranked roles, best fit first</a:t>
+            </a:r>
+            <a:endParaRPr lang="en-US" sz="1200" dirty="0"/>
+          </a:p>
+        </p:txBody>
+      </p:sp>
+      <p:sp>
+        <p:nvSpPr>
+          <p:cNvPr id="10" name="Text 7"/>
           <p:cNvSpPr/>
           <p:nvPr/>
         </p:nvSpPr>
@@ -6071,7 +8247,7 @@
                               <p:par>
                                 <p:cTn id="8" presetID="10" presetClass="entr" presetSubtype="0" fill="hold" grpId="0" nodeType="withEffect">
                                   <p:stCondLst>
-                                    <p:cond delay="350"/>
+                                    <p:cond delay="320"/>
                                   </p:stCondLst>
                                   <p:childTnLst>
                                     <p:set>
@@ -6106,7 +8282,7 @@
                               <p:par>
                                 <p:cTn id="11" presetID="10" presetClass="entr" presetSubtype="0" fill="hold" grpId="0" nodeType="withEffect">
                                   <p:stCondLst>
-                                    <p:cond delay="700"/>
+                                    <p:cond delay="640"/>
                                   </p:stCondLst>
                                   <p:childTnLst>
                                     <p:set>
@@ -6141,7 +8317,7 @@
                               <p:par>
                                 <p:cTn id="14" presetID="10" presetClass="entr" presetSubtype="0" fill="hold" grpId="0" nodeType="withEffect">
                                   <p:stCondLst>
-                                    <p:cond delay="1050"/>
+                                    <p:cond delay="960"/>
                                   </p:stCondLst>
                                   <p:childTnLst>
                                     <p:set>
@@ -6176,7 +8352,7 @@
                               <p:par>
                                 <p:cTn id="17" presetID="10" presetClass="entr" presetSubtype="0" fill="hold" grpId="0" nodeType="withEffect">
                                   <p:stCondLst>
-                                    <p:cond delay="1400"/>
+                                    <p:cond delay="1280"/>
                                   </p:stCondLst>
                                   <p:childTnLst>
                                     <p:set>
@@ -6202,6 +8378,146 @@
                                         <p:cTn id="18" dur="500"/>
                                         <p:tgtEl>
                                           <p:spTgt spid="6"/>
+                                        </p:tgtEl>
+                                      </p:cBhvr>
+                                    </p:animEffect>
+                                  </p:childTnLst>
+                                </p:cTn>
+                              </p:par>
+                              <p:par>
+                                <p:cTn id="20" presetID="10" presetClass="entr" presetSubtype="0" fill="hold" grpId="0" nodeType="withEffect">
+                                  <p:stCondLst>
+                                    <p:cond delay="1600"/>
+                                  </p:stCondLst>
+                                  <p:childTnLst>
+                                    <p:set>
+                                      <p:cBhvr>
+                                        <p:cTn id="19" dur="1" fill="hold">
+                                          <p:stCondLst>
+                                            <p:cond delay="0"/>
+                                          </p:stCondLst>
+                                        </p:cTn>
+                                        <p:tgtEl>
+                                          <p:spTgt spid="7"/>
+                                        </p:tgtEl>
+                                        <p:attrNameLst>
+                                          <p:attrName>style.visibility</p:attrName>
+                                        </p:attrNameLst>
+                                      </p:cBhvr>
+                                      <p:to>
+                                        <p:strVal val="visible"/>
+                                      </p:to>
+                                    </p:set>
+                                    <p:animEffect transition="in" filter="fade">
+                                      <p:cBhvr>
+                                        <p:cTn id="21" dur="500"/>
+                                        <p:tgtEl>
+                                          <p:spTgt spid="7"/>
+                                        </p:tgtEl>
+                                      </p:cBhvr>
+                                    </p:animEffect>
+                                  </p:childTnLst>
+                                </p:cTn>
+                              </p:par>
+                              <p:par>
+                                <p:cTn id="23" presetID="10" presetClass="entr" presetSubtype="0" fill="hold" grpId="0" nodeType="withEffect">
+                                  <p:stCondLst>
+                                    <p:cond delay="1920"/>
+                                  </p:stCondLst>
+                                  <p:childTnLst>
+                                    <p:set>
+                                      <p:cBhvr>
+                                        <p:cTn id="22" dur="1" fill="hold">
+                                          <p:stCondLst>
+                                            <p:cond delay="0"/>
+                                          </p:stCondLst>
+                                        </p:cTn>
+                                        <p:tgtEl>
+                                          <p:spTgt spid="8"/>
+                                        </p:tgtEl>
+                                        <p:attrNameLst>
+                                          <p:attrName>style.visibility</p:attrName>
+                                        </p:attrNameLst>
+                                      </p:cBhvr>
+                                      <p:to>
+                                        <p:strVal val="visible"/>
+                                      </p:to>
+                                    </p:set>
+                                    <p:animEffect transition="in" filter="fade">
+                                      <p:cBhvr>
+                                        <p:cTn id="24" dur="500"/>
+                                        <p:tgtEl>
+                                          <p:spTgt spid="8"/>
+                                        </p:tgtEl>
+                                      </p:cBhvr>
+                                    </p:animEffect>
+                                  </p:childTnLst>
+                                </p:cTn>
+                              </p:par>
+                              <p:par>
+                                <p:cTn id="26" presetID="10" presetClass="entr" presetSubtype="0" fill="hold" grpId="0" nodeType="withEffect">
+                                  <p:stCondLst>
+                                    <p:cond delay="2240"/>
+                                  </p:stCondLst>
+                                  <p:childTnLst>
+                                    <p:set>
+                                      <p:cBhvr>
+                                        <p:cTn id="25" dur="1" fill="hold">
+                                          <p:stCondLst>
+                                            <p:cond delay="0"/>
+                                          </p:stCondLst>
+                                        </p:cTn>
+                                        <p:tgtEl>
+                                          <p:spTgt spid="9"/>
+                                        </p:tgtEl>
+                                        <p:attrNameLst>
+                                          <p:attrName>style.visibility</p:attrName>
+                                        </p:attrNameLst>
+                                      </p:cBhvr>
+                                      <p:to>
+                                        <p:strVal val="visible"/>
+                                      </p:to>
+                                    </p:set>
+                                    <p:animEffect transition="in" filter="fade">
+                                      <p:cBhvr>
+                                        <p:cTn id="27" dur="500"/>
+                                        <p:tgtEl>
+                                          <p:spTgt spid="9"/>
+                                        </p:tgtEl>
+                                      </p:cBhvr>
+                                    </p:animEffect>
+                                  </p:childTnLst>
+                                </p:cTn>
+                              </p:par>
+                              <p:par>
+                                <p:cTn id="29" presetID="10" presetClass="entr" presetSubtype="0" fill="hold" grpId="0" nodeType="withEffect">
+                                  <p:stCondLst>
+                                    <p:cond delay="2560"/>
+                                  </p:stCondLst>
+                                  <p:childTnLst>
+                                    <p:set>
+                                      <p:cBhvr>
+                                        <p:cTn id="28" dur="1" fill="hold">
+                                          <p:stCondLst>
+                                            <p:cond delay="0"/>
+                                          </p:stCondLst>
+                                        </p:cTn>
+                                        <p:tgtEl>
+                                          <p:spTgt spid="10"/>
+                                        </p:tgtEl>
+                                        <p:attrNameLst>
+                                          <p:attrName>style.visibility</p:attrName>
+                                        </p:attrNameLst>
+                                      </p:cBhvr>
+                                      <p:to>
+                                        <p:strVal val="visible"/>
+                                      </p:to>
+                                    </p:set>
+                                    <p:animEffect transition="in" filter="fade">
+                                      <p:cBhvr>
+                                        <p:cTn id="30" dur="500"/>
+                                        <p:tgtEl>
+                                          <p:spTgt spid="10"/>
                                         </p:tgtEl>
                                       </p:cBhvr>
                                     </p:animEffect>
@@ -6291,7 +8607,7 @@
         </p:nvSpPr>
         <p:spPr>
           <a:xfrm>
-            <a:off x="685800" y="502920"/>
+            <a:off x="685800" y="457200"/>
             <a:ext cx="10789920" cy="320040"/>
           </a:xfrm>
           <a:prstGeom prst="rect">
@@ -6330,8 +8646,8 @@
         </p:nvSpPr>
         <p:spPr>
           <a:xfrm>
-            <a:off x="685800" y="886968"/>
-            <a:ext cx="10789920" cy="914400"/>
+            <a:off x="685800" y="841248"/>
+            <a:ext cx="10789920" cy="731520"/>
           </a:xfrm>
           <a:prstGeom prst="rect">
             <a:avLst/>
@@ -6347,7 +8663,7 @@
               <a:buNone/>
             </a:pPr>
             <a:r>
-              <a:rPr lang="en-US" sz="3400" b="1" dirty="0">
+              <a:rPr lang="en-US" sz="3200" b="1" dirty="0">
                 <a:solidFill>
                   <a:srgbClr val="11372A"/>
                 </a:solidFill>
@@ -6355,9 +8671,9 @@
                 <a:ea typeface="Segoe UI" pitchFamily="34" charset="-122"/>
                 <a:cs typeface="Segoe UI" pitchFamily="34" charset="-120"/>
               </a:rPr>
-              <a:t>Three sections, one clean interface</a:t>
+              <a:t>Home, Explore roles, Your profile</a:t>
             </a:r>
-            <a:endParaRPr lang="en-US" sz="3400" dirty="0"/>
+            <a:endParaRPr lang="en-US" sz="3200" dirty="0"/>
           </a:p>
         </p:txBody>
       </p:sp>
@@ -6369,20 +8685,70 @@
         </p:nvSpPr>
         <p:spPr>
           <a:xfrm>
-            <a:off x="777240" y="1874520"/>
-            <a:ext cx="3291840" cy="3108960"/>
+            <a:off x="822960" y="2167128"/>
+            <a:ext cx="3611880" cy="1752431"/>
           </a:xfrm>
           <a:prstGeom prst="roundRect">
             <a:avLst>
-              <a:gd name="adj" fmla="val 2941"/>
+              <a:gd name="adj" fmla="val 4174"/>
             </a:avLst>
           </a:prstGeom>
           <a:solidFill>
-            <a:srgbClr val="FFFFFF"/>
+            <a:srgbClr val="0D2C20">
+              <a:alpha val="22000"/>
+            </a:srgbClr>
           </a:solidFill>
-          <a:ln w="19050">
+          <a:ln/>
+        </p:spPr>
+      </p:sp>
+      <p:pic>
+        <p:nvPicPr>
+          <p:cNvPr id="6" name="Image 0" descr="C:/Users/Komal Saxena/AppData/Local/Temp/opencode/deckimg/04-roles.png">    </p:cNvPr>
+          <p:cNvPicPr>
+            <a:picLocks noChangeAspect="1"/>
+          </p:cNvPicPr>
+          <p:nvPr/>
+        </p:nvPicPr>
+        <p:blipFill>
+          <a:blip r:embed="rId1"/>
+          <a:stretch>
+            <a:fillRect/>
+          </a:stretch>
+        </p:blipFill>
+        <p:spPr>
+          <a:xfrm>
+            <a:off x="777240" y="2103120"/>
+            <a:ext cx="3611880" cy="1752431"/>
+          </a:xfrm>
+          <a:prstGeom prst="rect">
+            <a:avLst/>
+          </a:prstGeom>
+        </p:spPr>
+      </p:pic>
+      <p:sp>
+        <p:nvSpPr>
+          <p:cNvPr id="7" name="Shape 4"/>
+          <p:cNvSpPr/>
+          <p:nvPr/>
+        </p:nvSpPr>
+        <p:spPr>
+          <a:xfrm>
+            <a:off x="777240" y="2103120"/>
+            <a:ext cx="3611880" cy="1752431"/>
+          </a:xfrm>
+          <a:prstGeom prst="roundRect">
+            <a:avLst>
+              <a:gd name="adj" fmla="val 4174"/>
+            </a:avLst>
+          </a:prstGeom>
+          <a:solidFill>
+            <a:srgbClr val="FFFFFF">
+              <a:alpha val="0"/>
+            </a:srgbClr>
+          </a:solidFill>
+          <a:ln w="12700">
             <a:solidFill>
-              <a:srgbClr val="F1EFE6"/>
+              <a:srgbClr val="D8D5C8"/>
             </a:solidFill>
             <a:prstDash val="solid"/>
           </a:ln>
@@ -6390,14 +8756,285 @@
       </p:sp>
       <p:sp>
         <p:nvSpPr>
-          <p:cNvPr id="6" name="Text 4"/>
-          <p:cNvSpPr/>
-          <p:nvPr/>
-        </p:nvSpPr>
-        <p:spPr>
-          <a:xfrm>
-            <a:off x="960120" y="2057400"/>
-            <a:ext cx="2926080" cy="457200"/>
+          <p:cNvPr id="8" name="Text 5"/>
+          <p:cNvSpPr/>
+          <p:nvPr/>
+        </p:nvSpPr>
+        <p:spPr>
+          <a:xfrm>
+            <a:off x="777240" y="3965279"/>
+            <a:ext cx="3611880" cy="365760"/>
+          </a:xfrm>
+          <a:prstGeom prst="rect">
+            <a:avLst/>
+          </a:prstGeom>
+          <a:noFill/>
+          <a:ln/>
+        </p:spPr>
+        <p:txBody>
+          <a:bodyPr wrap="square" rtlCol="0" anchor="ctr"/>
+          <a:lstStyle/>
+          <a:p>
+            <a:pPr algn="ctr" indent="0" marL="0">
+              <a:buNone/>
+            </a:pPr>
+            <a:r>
+              <a:rPr lang="en-US" sz="1200" b="1" dirty="0">
+                <a:solidFill>
+                  <a:srgbClr val="123A2B"/>
+                </a:solidFill>
+                <a:latin typeface="Segoe UI" pitchFamily="34" charset="0"/>
+                <a:ea typeface="Segoe UI" pitchFamily="34" charset="-122"/>
+                <a:cs typeface="Segoe UI" pitchFamily="34" charset="-120"/>
+              </a:rPr>
+              <a:t>Explore roles - badges + search</a:t>
+            </a:r>
+            <a:endParaRPr lang="en-US" sz="1200" dirty="0"/>
+          </a:p>
+        </p:txBody>
+      </p:sp>
+      <p:sp>
+        <p:nvSpPr>
+          <p:cNvPr id="9" name="Shape 6"/>
+          <p:cNvSpPr/>
+          <p:nvPr/>
+        </p:nvSpPr>
+        <p:spPr>
+          <a:xfrm>
+            <a:off x="4572000" y="2167128"/>
+            <a:ext cx="3611880" cy="1752431"/>
+          </a:xfrm>
+          <a:prstGeom prst="roundRect">
+            <a:avLst>
+              <a:gd name="adj" fmla="val 4174"/>
+            </a:avLst>
+          </a:prstGeom>
+          <a:solidFill>
+            <a:srgbClr val="0D2C20">
+              <a:alpha val="22000"/>
+            </a:srgbClr>
+          </a:solidFill>
+          <a:ln/>
+        </p:spPr>
+      </p:sp>
+      <p:pic>
+        <p:nvPicPr>
+          <p:cNvPr id="10" name="Image 1" descr="C:/Users/Komal Saxena/AppData/Local/Temp/opencode/deckimg/05-role-detail.png">    </p:cNvPr>
+          <p:cNvPicPr>
+            <a:picLocks noChangeAspect="1"/>
+          </p:cNvPicPr>
+          <p:nvPr/>
+        </p:nvPicPr>
+        <p:blipFill>
+          <a:blip r:embed="rId2"/>
+          <a:stretch>
+            <a:fillRect/>
+          </a:stretch>
+        </p:blipFill>
+        <p:spPr>
+          <a:xfrm>
+            <a:off x="4526280" y="2103120"/>
+            <a:ext cx="3611880" cy="1752431"/>
+          </a:xfrm>
+          <a:prstGeom prst="rect">
+            <a:avLst/>
+          </a:prstGeom>
+        </p:spPr>
+      </p:pic>
+      <p:sp>
+        <p:nvSpPr>
+          <p:cNvPr id="11" name="Shape 7"/>
+          <p:cNvSpPr/>
+          <p:nvPr/>
+        </p:nvSpPr>
+        <p:spPr>
+          <a:xfrm>
+            <a:off x="4526280" y="2103120"/>
+            <a:ext cx="3611880" cy="1752431"/>
+          </a:xfrm>
+          <a:prstGeom prst="roundRect">
+            <a:avLst>
+              <a:gd name="adj" fmla="val 4174"/>
+            </a:avLst>
+          </a:prstGeom>
+          <a:solidFill>
+            <a:srgbClr val="FFFFFF">
+              <a:alpha val="0"/>
+            </a:srgbClr>
+          </a:solidFill>
+          <a:ln w="12700">
+            <a:solidFill>
+              <a:srgbClr val="D8D5C8"/>
+            </a:solidFill>
+            <a:prstDash val="solid"/>
+          </a:ln>
+        </p:spPr>
+      </p:sp>
+      <p:sp>
+        <p:nvSpPr>
+          <p:cNvPr id="12" name="Text 8"/>
+          <p:cNvSpPr/>
+          <p:nvPr/>
+        </p:nvSpPr>
+        <p:spPr>
+          <a:xfrm>
+            <a:off x="4526280" y="3965279"/>
+            <a:ext cx="3611880" cy="365760"/>
+          </a:xfrm>
+          <a:prstGeom prst="rect">
+            <a:avLst/>
+          </a:prstGeom>
+          <a:noFill/>
+          <a:ln/>
+        </p:spPr>
+        <p:txBody>
+          <a:bodyPr wrap="square" rtlCol="0" anchor="ctr"/>
+          <a:lstStyle/>
+          <a:p>
+            <a:pPr algn="ctr" indent="0" marL="0">
+              <a:buNone/>
+            </a:pPr>
+            <a:r>
+              <a:rPr lang="en-US" sz="1200" b="1" dirty="0">
+                <a:solidFill>
+                  <a:srgbClr val="123A2B"/>
+                </a:solidFill>
+                <a:latin typeface="Segoe UI" pitchFamily="34" charset="0"/>
+                <a:ea typeface="Segoe UI" pitchFamily="34" charset="-122"/>
+                <a:cs typeface="Segoe UI" pitchFamily="34" charset="-120"/>
+              </a:rPr>
+              <a:t>Role detail - skills checklist</a:t>
+            </a:r>
+            <a:endParaRPr lang="en-US" sz="1200" dirty="0"/>
+          </a:p>
+        </p:txBody>
+      </p:sp>
+      <p:sp>
+        <p:nvSpPr>
+          <p:cNvPr id="13" name="Shape 9"/>
+          <p:cNvSpPr/>
+          <p:nvPr/>
+        </p:nvSpPr>
+        <p:spPr>
+          <a:xfrm>
+            <a:off x="8321040" y="2167128"/>
+            <a:ext cx="3611880" cy="1752431"/>
+          </a:xfrm>
+          <a:prstGeom prst="roundRect">
+            <a:avLst>
+              <a:gd name="adj" fmla="val 4174"/>
+            </a:avLst>
+          </a:prstGeom>
+          <a:solidFill>
+            <a:srgbClr val="0D2C20">
+              <a:alpha val="22000"/>
+            </a:srgbClr>
+          </a:solidFill>
+          <a:ln/>
+        </p:spPr>
+      </p:sp>
+      <p:pic>
+        <p:nvPicPr>
+          <p:cNvPr id="14" name="Image 2" descr="C:/Users/Komal Saxena/AppData/Local/Temp/opencode/deckimg/08-profile.png">    </p:cNvPr>
+          <p:cNvPicPr>
+            <a:picLocks noChangeAspect="1"/>
+          </p:cNvPicPr>
+          <p:nvPr/>
+        </p:nvPicPr>
+        <p:blipFill>
+          <a:blip r:embed="rId3"/>
+          <a:stretch>
+            <a:fillRect/>
+          </a:stretch>
+        </p:blipFill>
+        <p:spPr>
+          <a:xfrm>
+            <a:off x="8275320" y="2103120"/>
+            <a:ext cx="3611880" cy="1752431"/>
+          </a:xfrm>
+          <a:prstGeom prst="rect">
+            <a:avLst/>
+          </a:prstGeom>
+        </p:spPr>
+      </p:pic>
+      <p:sp>
+        <p:nvSpPr>
+          <p:cNvPr id="15" name="Shape 10"/>
+          <p:cNvSpPr/>
+          <p:nvPr/>
+        </p:nvSpPr>
+        <p:spPr>
+          <a:xfrm>
+            <a:off x="8275320" y="2103120"/>
+            <a:ext cx="3611880" cy="1752431"/>
+          </a:xfrm>
+          <a:prstGeom prst="roundRect">
+            <a:avLst>
+              <a:gd name="adj" fmla="val 4174"/>
+            </a:avLst>
+          </a:prstGeom>
+          <a:solidFill>
+            <a:srgbClr val="FFFFFF">
+              <a:alpha val="0"/>
+            </a:srgbClr>
+          </a:solidFill>
+          <a:ln w="12700">
+            <a:solidFill>
+              <a:srgbClr val="D8D5C8"/>
+            </a:solidFill>
+            <a:prstDash val="solid"/>
+          </a:ln>
+        </p:spPr>
+      </p:sp>
+      <p:sp>
+        <p:nvSpPr>
+          <p:cNvPr id="16" name="Text 11"/>
+          <p:cNvSpPr/>
+          <p:nvPr/>
+        </p:nvSpPr>
+        <p:spPr>
+          <a:xfrm>
+            <a:off x="8275320" y="3965279"/>
+            <a:ext cx="3611880" cy="365760"/>
+          </a:xfrm>
+          <a:prstGeom prst="rect">
+            <a:avLst/>
+          </a:prstGeom>
+          <a:noFill/>
+          <a:ln/>
+        </p:spPr>
+        <p:txBody>
+          <a:bodyPr wrap="square" rtlCol="0" anchor="ctr"/>
+          <a:lstStyle/>
+          <a:p>
+            <a:pPr algn="ctr" indent="0" marL="0">
+              <a:buNone/>
+            </a:pPr>
+            <a:r>
+              <a:rPr lang="en-US" sz="1200" b="1" dirty="0">
+                <a:solidFill>
+                  <a:srgbClr val="123A2B"/>
+                </a:solidFill>
+                <a:latin typeface="Segoe UI" pitchFamily="34" charset="0"/>
+                <a:ea typeface="Segoe UI" pitchFamily="34" charset="-122"/>
+                <a:cs typeface="Segoe UI" pitchFamily="34" charset="-120"/>
+              </a:rPr>
+              <a:t>Your profile - saved analyses</a:t>
+            </a:r>
+            <a:endParaRPr lang="en-US" sz="1200" dirty="0"/>
+          </a:p>
+        </p:txBody>
+      </p:sp>
+      <p:sp>
+        <p:nvSpPr>
+          <p:cNvPr id="17" name="Text 12"/>
+          <p:cNvSpPr/>
+          <p:nvPr/>
+        </p:nvSpPr>
+        <p:spPr>
+          <a:xfrm>
+            <a:off x="777240" y="5394960"/>
+            <a:ext cx="10607040" cy="457200"/>
           </a:xfrm>
           <a:prstGeom prst="rect">
             <a:avLst/>
@@ -6413,54 +9050,15 @@
               <a:buNone/>
             </a:pPr>
             <a:r>
-              <a:rPr lang="en-US" sz="2000" b="1" dirty="0">
+              <a:rPr lang="en-US" sz="1400" i="1" dirty="0">
                 <a:solidFill>
-                  <a:srgbClr val="123A2B"/>
+                  <a:srgbClr val="75897D"/>
                 </a:solidFill>
                 <a:latin typeface="Segoe UI" pitchFamily="34" charset="0"/>
                 <a:ea typeface="Segoe UI" pitchFamily="34" charset="-122"/>
                 <a:cs typeface="Segoe UI" pitchFamily="34" charset="-120"/>
               </a:rPr>
-              <a:t>Home</a:t>
-            </a:r>
-            <a:endParaRPr lang="en-US" sz="2000" dirty="0"/>
-          </a:p>
-        </p:txBody>
-      </p:sp>
-      <p:sp>
-        <p:nvSpPr>
-          <p:cNvPr id="7" name="Text 5"/>
-          <p:cNvSpPr/>
-          <p:nvPr/>
-        </p:nvSpPr>
-        <p:spPr>
-          <a:xfrm>
-            <a:off x="960120" y="2560320"/>
-            <a:ext cx="2926080" cy="2194560"/>
-          </a:xfrm>
-          <a:prstGeom prst="rect">
-            <a:avLst/>
-          </a:prstGeom>
-          <a:noFill/>
-          <a:ln/>
-        </p:spPr>
-        <p:txBody>
-          <a:bodyPr wrap="square" rtlCol="0" anchor="ctr"/>
-          <a:lstStyle/>
-          <a:p>
-            <a:pPr indent="0" marL="0">
-              <a:buNone/>
-            </a:pPr>
-            <a:r>
-              <a:rPr lang="en-US" sz="1400" dirty="0">
-                <a:solidFill>
-                  <a:srgbClr val="11372A"/>
-                </a:solidFill>
-                <a:latin typeface="Segoe UI" pitchFamily="34" charset="0"/>
-                <a:ea typeface="Segoe UI" pitchFamily="34" charset="-122"/>
-                <a:cs typeface="Segoe UI" pitchFamily="34" charset="-120"/>
-              </a:rPr>
-              <a:t>The landing interface: hero, dark-green upload card, and the "Roles for you" results panel.</a:t>
+              <a:t>Every card links to a full detail page with fit breakdown and next-step CTA.</a:t>
             </a:r>
             <a:endParaRPr lang="en-US" sz="1400" dirty="0"/>
           </a:p>
@@ -6468,217 +9066,7 @@
       </p:sp>
       <p:sp>
         <p:nvSpPr>
-          <p:cNvPr id="8" name="Shape 6"/>
-          <p:cNvSpPr/>
-          <p:nvPr/>
-        </p:nvSpPr>
-        <p:spPr>
-          <a:xfrm>
-            <a:off x="4434840" y="1874520"/>
-            <a:ext cx="3291840" cy="3108960"/>
-          </a:xfrm>
-          <a:prstGeom prst="roundRect">
-            <a:avLst>
-              <a:gd name="adj" fmla="val 2941"/>
-            </a:avLst>
-          </a:prstGeom>
-          <a:solidFill>
-            <a:srgbClr val="FFFFFF"/>
-          </a:solidFill>
-          <a:ln w="19050">
-            <a:solidFill>
-              <a:srgbClr val="F1EFE6"/>
-            </a:solidFill>
-            <a:prstDash val="solid"/>
-          </a:ln>
-        </p:spPr>
-      </p:sp>
-      <p:sp>
-        <p:nvSpPr>
-          <p:cNvPr id="9" name="Text 7"/>
-          <p:cNvSpPr/>
-          <p:nvPr/>
-        </p:nvSpPr>
-        <p:spPr>
-          <a:xfrm>
-            <a:off x="4617720" y="2057400"/>
-            <a:ext cx="2926080" cy="457200"/>
-          </a:xfrm>
-          <a:prstGeom prst="rect">
-            <a:avLst/>
-          </a:prstGeom>
-          <a:noFill/>
-          <a:ln/>
-        </p:spPr>
-        <p:txBody>
-          <a:bodyPr wrap="square" rtlCol="0" anchor="ctr"/>
-          <a:lstStyle/>
-          <a:p>
-            <a:pPr indent="0" marL="0">
-              <a:buNone/>
-            </a:pPr>
-            <a:r>
-              <a:rPr lang="en-US" sz="2000" b="1" dirty="0">
-                <a:solidFill>
-                  <a:srgbClr val="123A2B"/>
-                </a:solidFill>
-                <a:latin typeface="Segoe UI" pitchFamily="34" charset="0"/>
-                <a:ea typeface="Segoe UI" pitchFamily="34" charset="-122"/>
-                <a:cs typeface="Segoe UI" pitchFamily="34" charset="-120"/>
-              </a:rPr>
-              <a:t>Explore roles</a:t>
-            </a:r>
-            <a:endParaRPr lang="en-US" sz="2000" dirty="0"/>
-          </a:p>
-        </p:txBody>
-      </p:sp>
-      <p:sp>
-        <p:nvSpPr>
-          <p:cNvPr id="10" name="Text 8"/>
-          <p:cNvSpPr/>
-          <p:nvPr/>
-        </p:nvSpPr>
-        <p:spPr>
-          <a:xfrm>
-            <a:off x="4617720" y="2560320"/>
-            <a:ext cx="2926080" cy="2194560"/>
-          </a:xfrm>
-          <a:prstGeom prst="rect">
-            <a:avLst/>
-          </a:prstGeom>
-          <a:noFill/>
-          <a:ln/>
-        </p:spPr>
-        <p:txBody>
-          <a:bodyPr wrap="square" rtlCol="0" anchor="ctr"/>
-          <a:lstStyle/>
-          <a:p>
-            <a:pPr indent="0" marL="0">
-              <a:buNone/>
-            </a:pPr>
-            <a:r>
-              <a:rPr lang="en-US" sz="1400" dirty="0">
-                <a:solidFill>
-                  <a:srgbClr val="11372A"/>
-                </a:solidFill>
-                <a:latin typeface="Segoe UI" pitchFamily="34" charset="0"/>
-                <a:ea typeface="Segoe UI" pitchFamily="34" charset="-122"/>
-                <a:cs typeface="Segoe UI" pitchFamily="34" charset="-120"/>
-              </a:rPr>
-              <a:t>Full 30-role library with search, match badges, and a role selector showing required skills.</a:t>
-            </a:r>
-            <a:endParaRPr lang="en-US" sz="1400" dirty="0"/>
-          </a:p>
-        </p:txBody>
-      </p:sp>
-      <p:sp>
-        <p:nvSpPr>
-          <p:cNvPr id="11" name="Shape 9"/>
-          <p:cNvSpPr/>
-          <p:nvPr/>
-        </p:nvSpPr>
-        <p:spPr>
-          <a:xfrm>
-            <a:off x="8092440" y="1874520"/>
-            <a:ext cx="3291840" cy="3108960"/>
-          </a:xfrm>
-          <a:prstGeom prst="roundRect">
-            <a:avLst>
-              <a:gd name="adj" fmla="val 2941"/>
-            </a:avLst>
-          </a:prstGeom>
-          <a:solidFill>
-            <a:srgbClr val="FFFFFF"/>
-          </a:solidFill>
-          <a:ln w="19050">
-            <a:solidFill>
-              <a:srgbClr val="F1EFE6"/>
-            </a:solidFill>
-            <a:prstDash val="solid"/>
-          </a:ln>
-        </p:spPr>
-      </p:sp>
-      <p:sp>
-        <p:nvSpPr>
-          <p:cNvPr id="12" name="Text 10"/>
-          <p:cNvSpPr/>
-          <p:nvPr/>
-        </p:nvSpPr>
-        <p:spPr>
-          <a:xfrm>
-            <a:off x="8275320" y="2057400"/>
-            <a:ext cx="2926080" cy="457200"/>
-          </a:xfrm>
-          <a:prstGeom prst="rect">
-            <a:avLst/>
-          </a:prstGeom>
-          <a:noFill/>
-          <a:ln/>
-        </p:spPr>
-        <p:txBody>
-          <a:bodyPr wrap="square" rtlCol="0" anchor="ctr"/>
-          <a:lstStyle/>
-          <a:p>
-            <a:pPr indent="0" marL="0">
-              <a:buNone/>
-            </a:pPr>
-            <a:r>
-              <a:rPr lang="en-US" sz="2000" b="1" dirty="0">
-                <a:solidFill>
-                  <a:srgbClr val="123A2B"/>
-                </a:solidFill>
-                <a:latin typeface="Segoe UI" pitchFamily="34" charset="0"/>
-                <a:ea typeface="Segoe UI" pitchFamily="34" charset="-122"/>
-                <a:cs typeface="Segoe UI" pitchFamily="34" charset="-120"/>
-              </a:rPr>
-              <a:t>Your profile</a:t>
-            </a:r>
-            <a:endParaRPr lang="en-US" sz="2000" dirty="0"/>
-          </a:p>
-        </p:txBody>
-      </p:sp>
-      <p:sp>
-        <p:nvSpPr>
-          <p:cNvPr id="13" name="Text 11"/>
-          <p:cNvSpPr/>
-          <p:nvPr/>
-        </p:nvSpPr>
-        <p:spPr>
-          <a:xfrm>
-            <a:off x="8275320" y="2560320"/>
-            <a:ext cx="2926080" cy="2194560"/>
-          </a:xfrm>
-          <a:prstGeom prst="rect">
-            <a:avLst/>
-          </a:prstGeom>
-          <a:noFill/>
-          <a:ln/>
-        </p:spPr>
-        <p:txBody>
-          <a:bodyPr wrap="square" rtlCol="0" anchor="ctr"/>
-          <a:lstStyle/>
-          <a:p>
-            <a:pPr indent="0" marL="0">
-              <a:buNone/>
-            </a:pPr>
-            <a:r>
-              <a:rPr lang="en-US" sz="1400" dirty="0">
-                <a:solidFill>
-                  <a:srgbClr val="11372A"/>
-                </a:solidFill>
-                <a:latin typeface="Segoe UI" pitchFamily="34" charset="0"/>
-                <a:ea typeface="Segoe UI" pitchFamily="34" charset="-122"/>
-                <a:cs typeface="Segoe UI" pitchFamily="34" charset="-120"/>
-              </a:rPr>
-              <a:t>Sign in with email + password, then find saved analyses, top match, dates and filenames - deletable anytime.</a:t>
-            </a:r>
-            <a:endParaRPr lang="en-US" sz="1400" dirty="0"/>
-          </a:p>
-        </p:txBody>
-      </p:sp>
-      <p:sp>
-        <p:nvSpPr>
-          <p:cNvPr id="14" name="Text 12"/>
+          <p:cNvPr id="18" name="Text 13"/>
           <p:cNvSpPr/>
           <p:nvPr/>
         </p:nvSpPr>
@@ -6778,7 +9166,7 @@
                               <p:par>
                                 <p:cTn id="8" presetID="10" presetClass="entr" presetSubtype="0" fill="hold" grpId="0" nodeType="withEffect">
                                   <p:stCondLst>
-                                    <p:cond delay="350"/>
+                                    <p:cond delay="320"/>
                                   </p:stCondLst>
                                   <p:childTnLst>
                                     <p:set>
@@ -6813,7 +9201,7 @@
                               <p:par>
                                 <p:cTn id="11" presetID="10" presetClass="entr" presetSubtype="0" fill="hold" grpId="0" nodeType="withEffect">
                                   <p:stCondLst>
-                                    <p:cond delay="700"/>
+                                    <p:cond delay="640"/>
                                   </p:stCondLst>
                                   <p:childTnLst>
                                     <p:set>
@@ -6848,7 +9236,7 @@
                               <p:par>
                                 <p:cTn id="14" presetID="10" presetClass="entr" presetSubtype="0" fill="hold" grpId="0" nodeType="withEffect">
                                   <p:stCondLst>
-                                    <p:cond delay="1050"/>
+                                    <p:cond delay="960"/>
                                   </p:stCondLst>
                                   <p:childTnLst>
                                     <p:set>
@@ -6883,7 +9271,7 @@
                               <p:par>
                                 <p:cTn id="17" presetID="10" presetClass="entr" presetSubtype="0" fill="hold" grpId="0" nodeType="withEffect">
                                   <p:stCondLst>
-                                    <p:cond delay="1400"/>
+                                    <p:cond delay="1280"/>
                                   </p:stCondLst>
                                   <p:childTnLst>
                                     <p:set>
@@ -6918,7 +9306,7 @@
                               <p:par>
                                 <p:cTn id="20" presetID="10" presetClass="entr" presetSubtype="0" fill="hold" grpId="0" nodeType="withEffect">
                                   <p:stCondLst>
-                                    <p:cond delay="1750"/>
+                                    <p:cond delay="1600"/>
                                   </p:stCondLst>
                                   <p:childTnLst>
                                     <p:set>
@@ -6953,7 +9341,7 @@
                               <p:par>
                                 <p:cTn id="23" presetID="10" presetClass="entr" presetSubtype="0" fill="hold" grpId="0" nodeType="withEffect">
                                   <p:stCondLst>
-                                    <p:cond delay="2100"/>
+                                    <p:cond delay="1920"/>
                                   </p:stCondLst>
                                   <p:childTnLst>
                                     <p:set>
@@ -6988,7 +9376,7 @@
                               <p:par>
                                 <p:cTn id="26" presetID="10" presetClass="entr" presetSubtype="0" fill="hold" grpId="0" nodeType="withEffect">
                                   <p:stCondLst>
-                                    <p:cond delay="2450"/>
+                                    <p:cond delay="2240"/>
                                   </p:stCondLst>
                                   <p:childTnLst>
                                     <p:set>
@@ -7023,7 +9411,7 @@
                               <p:par>
                                 <p:cTn id="29" presetID="10" presetClass="entr" presetSubtype="0" fill="hold" grpId="0" nodeType="withEffect">
                                   <p:stCondLst>
-                                    <p:cond delay="2800"/>
+                                    <p:cond delay="2560"/>
                                   </p:stCondLst>
                                   <p:childTnLst>
                                     <p:set>
@@ -7058,7 +9446,7 @@
                               <p:par>
                                 <p:cTn id="32" presetID="10" presetClass="entr" presetSubtype="0" fill="hold" grpId="0" nodeType="withEffect">
                                   <p:stCondLst>
-                                    <p:cond delay="3150"/>
+                                    <p:cond delay="2880"/>
                                   </p:stCondLst>
                                   <p:childTnLst>
                                     <p:set>
@@ -7093,7 +9481,7 @@
                               <p:par>
                                 <p:cTn id="35" presetID="10" presetClass="entr" presetSubtype="0" fill="hold" grpId="0" nodeType="withEffect">
                                   <p:stCondLst>
-                                    <p:cond delay="3500"/>
+                                    <p:cond delay="3200"/>
                                   </p:stCondLst>
                                   <p:childTnLst>
                                     <p:set>
@@ -7128,7 +9516,7 @@
                               <p:par>
                                 <p:cTn id="38" presetID="10" presetClass="entr" presetSubtype="0" fill="hold" grpId="0" nodeType="withEffect">
                                   <p:stCondLst>
-                                    <p:cond delay="3850"/>
+                                    <p:cond delay="3520"/>
                                   </p:stCondLst>
                                   <p:childTnLst>
                                     <p:set>
@@ -7163,7 +9551,7 @@
                               <p:par>
                                 <p:cTn id="41" presetID="10" presetClass="entr" presetSubtype="0" fill="hold" grpId="0" nodeType="withEffect">
                                   <p:stCondLst>
-                                    <p:cond delay="4200"/>
+                                    <p:cond delay="3840"/>
                                   </p:stCondLst>
                                   <p:childTnLst>
                                     <p:set>
@@ -7189,6 +9577,146 @@
                                         <p:cTn id="42" dur="500"/>
                                         <p:tgtEl>
                                           <p:spTgt spid="14"/>
+                                        </p:tgtEl>
+                                      </p:cBhvr>
+                                    </p:animEffect>
+                                  </p:childTnLst>
+                                </p:cTn>
+                              </p:par>
+                              <p:par>
+                                <p:cTn id="44" presetID="10" presetClass="entr" presetSubtype="0" fill="hold" grpId="0" nodeType="withEffect">
+                                  <p:stCondLst>
+                                    <p:cond delay="4160"/>
+                                  </p:stCondLst>
+                                  <p:childTnLst>
+                                    <p:set>
+                                      <p:cBhvr>
+                                        <p:cTn id="43" dur="1" fill="hold">
+                                          <p:stCondLst>
+                                            <p:cond delay="0"/>
+                                          </p:stCondLst>
+                                        </p:cTn>
+                                        <p:tgtEl>
+                                          <p:spTgt spid="15"/>
+                                        </p:tgtEl>
+                                        <p:attrNameLst>
+                                          <p:attrName>style.visibility</p:attrName>
+                                        </p:attrNameLst>
+                                      </p:cBhvr>
+                                      <p:to>
+                                        <p:strVal val="visible"/>
+                                      </p:to>
+                                    </p:set>
+                                    <p:animEffect transition="in" filter="fade">
+                                      <p:cBhvr>
+                                        <p:cTn id="45" dur="500"/>
+                                        <p:tgtEl>
+                                          <p:spTgt spid="15"/>
+                                        </p:tgtEl>
+                                      </p:cBhvr>
+                                    </p:animEffect>
+                                  </p:childTnLst>
+                                </p:cTn>
+                              </p:par>
+                              <p:par>
+                                <p:cTn id="47" presetID="10" presetClass="entr" presetSubtype="0" fill="hold" grpId="0" nodeType="withEffect">
+                                  <p:stCondLst>
+                                    <p:cond delay="4480"/>
+                                  </p:stCondLst>
+                                  <p:childTnLst>
+                                    <p:set>
+                                      <p:cBhvr>
+                                        <p:cTn id="46" dur="1" fill="hold">
+                                          <p:stCondLst>
+                                            <p:cond delay="0"/>
+                                          </p:stCondLst>
+                                        </p:cTn>
+                                        <p:tgtEl>
+                                          <p:spTgt spid="16"/>
+                                        </p:tgtEl>
+                                        <p:attrNameLst>
+                                          <p:attrName>style.visibility</p:attrName>
+                                        </p:attrNameLst>
+                                      </p:cBhvr>
+                                      <p:to>
+                                        <p:strVal val="visible"/>
+                                      </p:to>
+                                    </p:set>
+                                    <p:animEffect transition="in" filter="fade">
+                                      <p:cBhvr>
+                                        <p:cTn id="48" dur="500"/>
+                                        <p:tgtEl>
+                                          <p:spTgt spid="16"/>
+                                        </p:tgtEl>
+                                      </p:cBhvr>
+                                    </p:animEffect>
+                                  </p:childTnLst>
+                                </p:cTn>
+                              </p:par>
+                              <p:par>
+                                <p:cTn id="50" presetID="10" presetClass="entr" presetSubtype="0" fill="hold" grpId="0" nodeType="withEffect">
+                                  <p:stCondLst>
+                                    <p:cond delay="4800"/>
+                                  </p:stCondLst>
+                                  <p:childTnLst>
+                                    <p:set>
+                                      <p:cBhvr>
+                                        <p:cTn id="49" dur="1" fill="hold">
+                                          <p:stCondLst>
+                                            <p:cond delay="0"/>
+                                          </p:stCondLst>
+                                        </p:cTn>
+                                        <p:tgtEl>
+                                          <p:spTgt spid="17"/>
+                                        </p:tgtEl>
+                                        <p:attrNameLst>
+                                          <p:attrName>style.visibility</p:attrName>
+                                        </p:attrNameLst>
+                                      </p:cBhvr>
+                                      <p:to>
+                                        <p:strVal val="visible"/>
+                                      </p:to>
+                                    </p:set>
+                                    <p:animEffect transition="in" filter="fade">
+                                      <p:cBhvr>
+                                        <p:cTn id="51" dur="500"/>
+                                        <p:tgtEl>
+                                          <p:spTgt spid="17"/>
+                                        </p:tgtEl>
+                                      </p:cBhvr>
+                                    </p:animEffect>
+                                  </p:childTnLst>
+                                </p:cTn>
+                              </p:par>
+                              <p:par>
+                                <p:cTn id="53" presetID="10" presetClass="entr" presetSubtype="0" fill="hold" grpId="0" nodeType="withEffect">
+                                  <p:stCondLst>
+                                    <p:cond delay="5120"/>
+                                  </p:stCondLst>
+                                  <p:childTnLst>
+                                    <p:set>
+                                      <p:cBhvr>
+                                        <p:cTn id="52" dur="1" fill="hold">
+                                          <p:stCondLst>
+                                            <p:cond delay="0"/>
+                                          </p:stCondLst>
+                                        </p:cTn>
+                                        <p:tgtEl>
+                                          <p:spTgt spid="18"/>
+                                        </p:tgtEl>
+                                        <p:attrNameLst>
+                                          <p:attrName>style.visibility</p:attrName>
+                                        </p:attrNameLst>
+                                      </p:cBhvr>
+                                      <p:to>
+                                        <p:strVal val="visible"/>
+                                      </p:to>
+                                    </p:set>
+                                    <p:animEffect transition="in" filter="fade">
+                                      <p:cBhvr>
+                                        <p:cTn id="54" dur="500"/>
+                                        <p:tgtEl>
+                                          <p:spTgt spid="18"/>
                                         </p:tgtEl>
                                       </p:cBhvr>
                                     </p:animEffect>
@@ -7278,7 +9806,7 @@
         </p:nvSpPr>
         <p:spPr>
           <a:xfrm>
-            <a:off x="685800" y="502920"/>
+            <a:off x="685800" y="457200"/>
             <a:ext cx="10789920" cy="320040"/>
           </a:xfrm>
           <a:prstGeom prst="rect">
@@ -7317,8 +9845,8 @@
         </p:nvSpPr>
         <p:spPr>
           <a:xfrm>
-            <a:off x="685800" y="886968"/>
-            <a:ext cx="10789920" cy="914400"/>
+            <a:off x="685800" y="841248"/>
+            <a:ext cx="10789920" cy="731520"/>
           </a:xfrm>
           <a:prstGeom prst="rect">
             <a:avLst/>
@@ -7334,7 +9862,7 @@
               <a:buNone/>
             </a:pPr>
             <a:r>
-              <a:rPr lang="en-US" sz="3400" b="1" dirty="0">
+              <a:rPr lang="en-US" sz="3200" b="1" dirty="0">
                 <a:solidFill>
                   <a:srgbClr val="11372A"/>
                 </a:solidFill>
@@ -7342,9 +9870,9 @@
                 <a:ea typeface="Segoe UI" pitchFamily="34" charset="-122"/>
                 <a:cs typeface="Segoe UI" pitchFamily="34" charset="-120"/>
               </a:rPr>
-              <a:t>Pick a role - see exactly what it takes</a:t>
+              <a:t>Match % that means something</a:t>
             </a:r>
-            <a:endParaRPr lang="en-US" sz="3400" dirty="0"/>
+            <a:endParaRPr lang="en-US" sz="3200" dirty="0"/>
           </a:p>
         </p:txBody>
       </p:sp>
@@ -7356,8 +9884,8 @@
         </p:nvSpPr>
         <p:spPr>
           <a:xfrm>
-            <a:off x="777240" y="1828800"/>
-            <a:ext cx="10515600" cy="4023360"/>
+            <a:off x="777240" y="1965960"/>
+            <a:ext cx="5029200" cy="2743200"/>
           </a:xfrm>
           <a:prstGeom prst="rect">
             <a:avLst/>
@@ -7371,13 +9899,13 @@
           <a:p>
             <a:pPr marL="228600" indent="-228600">
               <a:lnSpc>
-                <a:spcPct val="135000"/>
+                <a:spcPct val="130000"/>
               </a:lnSpc>
               <a:buSzPct val="100000"/>
               <a:buChar char="•"/>
             </a:pPr>
             <a:r>
-              <a:rPr lang="en-US" sz="1800" dirty="0">
+              <a:rPr lang="en-US" sz="1600" dirty="0">
                 <a:solidFill>
                   <a:srgbClr val="11372A"/>
                 </a:solidFill>
@@ -7387,18 +9915,18 @@
               </a:rPr>
               <a:t>Search by role name, summary, or any skill.</a:t>
             </a:r>
-            <a:endParaRPr lang="en-US" sz="1800" dirty="0"/>
+            <a:endParaRPr lang="en-US" sz="1600" dirty="0"/>
           </a:p>
           <a:p>
             <a:pPr marL="228600" indent="-228600">
               <a:lnSpc>
-                <a:spcPct val="135000"/>
+                <a:spcPct val="130000"/>
               </a:lnSpc>
               <a:buSzPct val="100000"/>
               <a:buChar char="•"/>
             </a:pPr>
             <a:r>
-              <a:rPr lang="en-US" sz="1800" dirty="0">
+              <a:rPr lang="en-US" sz="1600" dirty="0">
                 <a:solidFill>
                   <a:srgbClr val="11372A"/>
                 </a:solidFill>
@@ -7406,20 +9934,20 @@
                 <a:ea typeface="Segoe UI" pitchFamily="34" charset="-122"/>
                 <a:cs typeface="Segoe UI" pitchFamily="34" charset="-120"/>
               </a:rPr>
-              <a:t>Match percentages appear ONLY after you upload or paste a resume - never before.</a:t>
+              <a:t>Once analysed, matched roles float to the top with an orange % badge.</a:t>
             </a:r>
-            <a:endParaRPr lang="en-US" sz="1800" dirty="0"/>
+            <a:endParaRPr lang="en-US" sz="1600" dirty="0"/>
           </a:p>
           <a:p>
             <a:pPr marL="228600" indent="-228600">
               <a:lnSpc>
-                <a:spcPct val="135000"/>
+                <a:spcPct val="130000"/>
               </a:lnSpc>
               <a:buSzPct val="100000"/>
               <a:buChar char="•"/>
             </a:pPr>
             <a:r>
-              <a:rPr lang="en-US" sz="1800" dirty="0">
+              <a:rPr lang="en-US" sz="1600" dirty="0">
                 <a:solidFill>
                   <a:srgbClr val="11372A"/>
                 </a:solidFill>
@@ -7427,20 +9955,20 @@
                 <a:ea typeface="Segoe UI" pitchFamily="34" charset="-122"/>
                 <a:cs typeface="Segoe UI" pitchFamily="34" charset="-120"/>
               </a:rPr>
-              <a:t>Once analysed, matched roles float to the top with an orange % match badge.</a:t>
+              <a:t>Pick any role to see its full required-skills checklist.</a:t>
             </a:r>
-            <a:endParaRPr lang="en-US" sz="1800" dirty="0"/>
+            <a:endParaRPr lang="en-US" sz="1600" dirty="0"/>
           </a:p>
           <a:p>
             <a:pPr marL="228600" indent="-228600">
               <a:lnSpc>
-                <a:spcPct val="135000"/>
+                <a:spcPct val="130000"/>
               </a:lnSpc>
               <a:buSzPct val="100000"/>
               <a:buChar char="•"/>
             </a:pPr>
             <a:r>
-              <a:rPr lang="en-US" sz="1800" dirty="0">
+              <a:rPr lang="en-US" sz="1600" dirty="0">
                 <a:solidFill>
                   <a:srgbClr val="11372A"/>
                 </a:solidFill>
@@ -7448,36 +9976,192 @@
                 <a:ea typeface="Segoe UI" pitchFamily="34" charset="-122"/>
                 <a:cs typeface="Segoe UI" pitchFamily="34" charset="-120"/>
               </a:rPr>
-              <a:t>The selector lists every role; choosing one reveals its full required-skills checklist.</a:t>
+              <a:t>Skills you have are ticked, with "You have 4 of 9" coverage.</a:t>
             </a:r>
-            <a:endParaRPr lang="en-US" sz="1800" dirty="0"/>
+            <a:endParaRPr lang="en-US" sz="1600" dirty="0"/>
           </a:p>
+        </p:txBody>
+      </p:sp>
+      <p:sp>
+        <p:nvSpPr>
+          <p:cNvPr id="6" name="Shape 4"/>
+          <p:cNvSpPr/>
+          <p:nvPr/>
+        </p:nvSpPr>
+        <p:spPr>
+          <a:xfrm>
+            <a:off x="777240" y="4892040"/>
+            <a:ext cx="5029200" cy="1143000"/>
+          </a:xfrm>
+          <a:prstGeom prst="roundRect">
+            <a:avLst>
+              <a:gd name="adj" fmla="val 9600"/>
+            </a:avLst>
+          </a:prstGeom>
+          <a:solidFill>
+            <a:srgbClr val="E2603C"/>
+          </a:solidFill>
+          <a:ln/>
+        </p:spPr>
+      </p:sp>
+      <p:sp>
+        <p:nvSpPr>
+          <p:cNvPr id="7" name="Text 5"/>
+          <p:cNvSpPr/>
+          <p:nvPr/>
+        </p:nvSpPr>
+        <p:spPr>
+          <a:xfrm>
+            <a:off x="1005840" y="4892040"/>
+            <a:ext cx="4572000" cy="1143000"/>
+          </a:xfrm>
+          <a:prstGeom prst="rect">
+            <a:avLst/>
+          </a:prstGeom>
+          <a:noFill/>
+          <a:ln/>
+        </p:spPr>
+        <p:txBody>
+          <a:bodyPr wrap="square" rtlCol="0" anchor="ctr"/>
+          <a:lstStyle/>
           <a:p>
-            <a:pPr marL="228600" indent="-228600">
-              <a:lnSpc>
-                <a:spcPct val="135000"/>
-              </a:lnSpc>
-              <a:buSzPct val="100000"/>
-              <a:buChar char="•"/>
+            <a:pPr indent="0" marL="0">
+              <a:buNone/>
             </a:pPr>
             <a:r>
-              <a:rPr lang="en-US" sz="1800" dirty="0">
+              <a:rPr lang="en-US" sz="1450" b="1" dirty="0">
                 <a:solidFill>
-                  <a:srgbClr val="11372A"/>
+                  <a:srgbClr val="FFFFFF"/>
                 </a:solidFill>
                 <a:latin typeface="Segoe UI" pitchFamily="34" charset="0"/>
                 <a:ea typeface="Segoe UI" pitchFamily="34" charset="-122"/>
                 <a:cs typeface="Segoe UI" pitchFamily="34" charset="-120"/>
               </a:rPr>
-              <a:t>Skills you already have are ticked: "You have 4 of 9 skills" with a progress line.</a:t>
+              <a:t>No resume, no percentage. Match % appears ONLY after you upload or paste - never before.</a:t>
             </a:r>
-            <a:endParaRPr lang="en-US" sz="1800" dirty="0"/>
+            <a:endParaRPr lang="en-US" sz="1450" dirty="0"/>
           </a:p>
         </p:txBody>
       </p:sp>
       <p:sp>
         <p:nvSpPr>
-          <p:cNvPr id="6" name="Text 4"/>
+          <p:cNvPr id="8" name="Shape 6"/>
+          <p:cNvSpPr/>
+          <p:nvPr/>
+        </p:nvSpPr>
+        <p:spPr>
+          <a:xfrm>
+            <a:off x="6400800" y="2075688"/>
+            <a:ext cx="5349240" cy="2595372"/>
+          </a:xfrm>
+          <a:prstGeom prst="roundRect">
+            <a:avLst>
+              <a:gd name="adj" fmla="val 2819"/>
+            </a:avLst>
+          </a:prstGeom>
+          <a:solidFill>
+            <a:srgbClr val="0D2C20">
+              <a:alpha val="22000"/>
+            </a:srgbClr>
+          </a:solidFill>
+          <a:ln/>
+        </p:spPr>
+      </p:sp>
+      <p:pic>
+        <p:nvPicPr>
+          <p:cNvPr id="9" name="Image 0" descr="C:/Users/Komal Saxena/AppData/Local/Temp/opencode/deckimg/05-role-detail.png">    </p:cNvPr>
+          <p:cNvPicPr>
+            <a:picLocks noChangeAspect="1"/>
+          </p:cNvPicPr>
+          <p:nvPr/>
+        </p:nvPicPr>
+        <p:blipFill>
+          <a:blip r:embed="rId1"/>
+          <a:stretch>
+            <a:fillRect/>
+          </a:stretch>
+        </p:blipFill>
+        <p:spPr>
+          <a:xfrm>
+            <a:off x="6355080" y="2011680"/>
+            <a:ext cx="5349240" cy="2595372"/>
+          </a:xfrm>
+          <a:prstGeom prst="rect">
+            <a:avLst/>
+          </a:prstGeom>
+        </p:spPr>
+      </p:pic>
+      <p:sp>
+        <p:nvSpPr>
+          <p:cNvPr id="10" name="Shape 7"/>
+          <p:cNvSpPr/>
+          <p:nvPr/>
+        </p:nvSpPr>
+        <p:spPr>
+          <a:xfrm>
+            <a:off x="6355080" y="2011680"/>
+            <a:ext cx="5349240" cy="2595372"/>
+          </a:xfrm>
+          <a:prstGeom prst="roundRect">
+            <a:avLst>
+              <a:gd name="adj" fmla="val 2819"/>
+            </a:avLst>
+          </a:prstGeom>
+          <a:solidFill>
+            <a:srgbClr val="FFFFFF">
+              <a:alpha val="0"/>
+            </a:srgbClr>
+          </a:solidFill>
+          <a:ln w="12700">
+            <a:solidFill>
+              <a:srgbClr val="D8D5C8"/>
+            </a:solidFill>
+            <a:prstDash val="solid"/>
+          </a:ln>
+        </p:spPr>
+      </p:sp>
+      <p:sp>
+        <p:nvSpPr>
+          <p:cNvPr id="11" name="Text 8"/>
+          <p:cNvSpPr/>
+          <p:nvPr/>
+        </p:nvSpPr>
+        <p:spPr>
+          <a:xfrm>
+            <a:off x="6355080" y="4846320"/>
+            <a:ext cx="5349240" cy="365760"/>
+          </a:xfrm>
+          <a:prstGeom prst="rect">
+            <a:avLst/>
+          </a:prstGeom>
+          <a:noFill/>
+          <a:ln/>
+        </p:spPr>
+        <p:txBody>
+          <a:bodyPr wrap="square" rtlCol="0" anchor="ctr"/>
+          <a:lstStyle/>
+          <a:p>
+            <a:pPr algn="ctr" indent="0" marL="0">
+              <a:buNone/>
+            </a:pPr>
+            <a:r>
+              <a:rPr lang="en-US" sz="1200" b="1" dirty="0">
+                <a:solidFill>
+                  <a:srgbClr val="123A2B"/>
+                </a:solidFill>
+                <a:latin typeface="Segoe UI" pitchFamily="34" charset="0"/>
+                <a:ea typeface="Segoe UI" pitchFamily="34" charset="-122"/>
+                <a:cs typeface="Segoe UI" pitchFamily="34" charset="-120"/>
+              </a:rPr>
+              <a:t>Fit breakdown for one role</a:t>
+            </a:r>
+            <a:endParaRPr lang="en-US" sz="1200" dirty="0"/>
+          </a:p>
+        </p:txBody>
+      </p:sp>
+      <p:sp>
+        <p:nvSpPr>
+          <p:cNvPr id="12" name="Text 9"/>
           <p:cNvSpPr/>
           <p:nvPr/>
         </p:nvSpPr>
@@ -7577,7 +10261,7 @@
                               <p:par>
                                 <p:cTn id="8" presetID="10" presetClass="entr" presetSubtype="0" fill="hold" grpId="0" nodeType="withEffect">
                                   <p:stCondLst>
-                                    <p:cond delay="350"/>
+                                    <p:cond delay="320"/>
                                   </p:stCondLst>
                                   <p:childTnLst>
                                     <p:set>
@@ -7612,7 +10296,7 @@
                               <p:par>
                                 <p:cTn id="11" presetID="10" presetClass="entr" presetSubtype="0" fill="hold" grpId="0" nodeType="withEffect">
                                   <p:stCondLst>
-                                    <p:cond delay="700"/>
+                                    <p:cond delay="640"/>
                                   </p:stCondLst>
                                   <p:childTnLst>
                                     <p:set>
@@ -7647,7 +10331,7 @@
                               <p:par>
                                 <p:cTn id="14" presetID="10" presetClass="entr" presetSubtype="0" fill="hold" grpId="0" nodeType="withEffect">
                                   <p:stCondLst>
-                                    <p:cond delay="1050"/>
+                                    <p:cond delay="960"/>
                                   </p:stCondLst>
                                   <p:childTnLst>
                                     <p:set>
@@ -7682,7 +10366,7 @@
                               <p:par>
                                 <p:cTn id="17" presetID="10" presetClass="entr" presetSubtype="0" fill="hold" grpId="0" nodeType="withEffect">
                                   <p:stCondLst>
-                                    <p:cond delay="1400"/>
+                                    <p:cond delay="1280"/>
                                   </p:stCondLst>
                                   <p:childTnLst>
                                     <p:set>
@@ -7708,6 +10392,216 @@
                                         <p:cTn id="18" dur="500"/>
                                         <p:tgtEl>
                                           <p:spTgt spid="6"/>
+                                        </p:tgtEl>
+                                      </p:cBhvr>
+                                    </p:animEffect>
+                                  </p:childTnLst>
+                                </p:cTn>
+                              </p:par>
+                              <p:par>
+                                <p:cTn id="20" presetID="10" presetClass="entr" presetSubtype="0" fill="hold" grpId="0" nodeType="withEffect">
+                                  <p:stCondLst>
+                                    <p:cond delay="1600"/>
+                                  </p:stCondLst>
+                                  <p:childTnLst>
+                                    <p:set>
+                                      <p:cBhvr>
+                                        <p:cTn id="19" dur="1" fill="hold">
+                                          <p:stCondLst>
+                                            <p:cond delay="0"/>
+                                          </p:stCondLst>
+                                        </p:cTn>
+                                        <p:tgtEl>
+                                          <p:spTgt spid="7"/>
+                                        </p:tgtEl>
+                                        <p:attrNameLst>
+                                          <p:attrName>style.visibility</p:attrName>
+                                        </p:attrNameLst>
+                                      </p:cBhvr>
+                                      <p:to>
+                                        <p:strVal val="visible"/>
+                                      </p:to>
+                                    </p:set>
+                                    <p:animEffect transition="in" filter="fade">
+                                      <p:cBhvr>
+                                        <p:cTn id="21" dur="500"/>
+                                        <p:tgtEl>
+                                          <p:spTgt spid="7"/>
+                                        </p:tgtEl>
+                                      </p:cBhvr>
+                                    </p:animEffect>
+                                  </p:childTnLst>
+                                </p:cTn>
+                              </p:par>
+                              <p:par>
+                                <p:cTn id="23" presetID="10" presetClass="entr" presetSubtype="0" fill="hold" grpId="0" nodeType="withEffect">
+                                  <p:stCondLst>
+                                    <p:cond delay="1920"/>
+                                  </p:stCondLst>
+                                  <p:childTnLst>
+                                    <p:set>
+                                      <p:cBhvr>
+                                        <p:cTn id="22" dur="1" fill="hold">
+                                          <p:stCondLst>
+                                            <p:cond delay="0"/>
+                                          </p:stCondLst>
+                                        </p:cTn>
+                                        <p:tgtEl>
+                                          <p:spTgt spid="8"/>
+                                        </p:tgtEl>
+                                        <p:attrNameLst>
+                                          <p:attrName>style.visibility</p:attrName>
+                                        </p:attrNameLst>
+                                      </p:cBhvr>
+                                      <p:to>
+                                        <p:strVal val="visible"/>
+                                      </p:to>
+                                    </p:set>
+                                    <p:animEffect transition="in" filter="fade">
+                                      <p:cBhvr>
+                                        <p:cTn id="24" dur="500"/>
+                                        <p:tgtEl>
+                                          <p:spTgt spid="8"/>
+                                        </p:tgtEl>
+                                      </p:cBhvr>
+                                    </p:animEffect>
+                                  </p:childTnLst>
+                                </p:cTn>
+                              </p:par>
+                              <p:par>
+                                <p:cTn id="26" presetID="10" presetClass="entr" presetSubtype="0" fill="hold" grpId="0" nodeType="withEffect">
+                                  <p:stCondLst>
+                                    <p:cond delay="2240"/>
+                                  </p:stCondLst>
+                                  <p:childTnLst>
+                                    <p:set>
+                                      <p:cBhvr>
+                                        <p:cTn id="25" dur="1" fill="hold">
+                                          <p:stCondLst>
+                                            <p:cond delay="0"/>
+                                          </p:stCondLst>
+                                        </p:cTn>
+                                        <p:tgtEl>
+                                          <p:spTgt spid="9"/>
+                                        </p:tgtEl>
+                                        <p:attrNameLst>
+                                          <p:attrName>style.visibility</p:attrName>
+                                        </p:attrNameLst>
+                                      </p:cBhvr>
+                                      <p:to>
+                                        <p:strVal val="visible"/>
+                                      </p:to>
+                                    </p:set>
+                                    <p:animEffect transition="in" filter="fade">
+                                      <p:cBhvr>
+                                        <p:cTn id="27" dur="500"/>
+                                        <p:tgtEl>
+                                          <p:spTgt spid="9"/>
+                                        </p:tgtEl>
+                                      </p:cBhvr>
+                                    </p:animEffect>
+                                  </p:childTnLst>
+                                </p:cTn>
+                              </p:par>
+                              <p:par>
+                                <p:cTn id="29" presetID="10" presetClass="entr" presetSubtype="0" fill="hold" grpId="0" nodeType="withEffect">
+                                  <p:stCondLst>
+                                    <p:cond delay="2560"/>
+                                  </p:stCondLst>
+                                  <p:childTnLst>
+                                    <p:set>
+                                      <p:cBhvr>
+                                        <p:cTn id="28" dur="1" fill="hold">
+                                          <p:stCondLst>
+                                            <p:cond delay="0"/>
+                                          </p:stCondLst>
+                                        </p:cTn>
+                                        <p:tgtEl>
+                                          <p:spTgt spid="10"/>
+                                        </p:tgtEl>
+                                        <p:attrNameLst>
+                                          <p:attrName>style.visibility</p:attrName>
+                                        </p:attrNameLst>
+                                      </p:cBhvr>
+                                      <p:to>
+                                        <p:strVal val="visible"/>
+                                      </p:to>
+                                    </p:set>
+                                    <p:animEffect transition="in" filter="fade">
+                                      <p:cBhvr>
+                                        <p:cTn id="30" dur="500"/>
+                                        <p:tgtEl>
+                                          <p:spTgt spid="10"/>
+                                        </p:tgtEl>
+                                      </p:cBhvr>
+                                    </p:animEffect>
+                                  </p:childTnLst>
+                                </p:cTn>
+                              </p:par>
+                              <p:par>
+                                <p:cTn id="32" presetID="10" presetClass="entr" presetSubtype="0" fill="hold" grpId="0" nodeType="withEffect">
+                                  <p:stCondLst>
+                                    <p:cond delay="2880"/>
+                                  </p:stCondLst>
+                                  <p:childTnLst>
+                                    <p:set>
+                                      <p:cBhvr>
+                                        <p:cTn id="31" dur="1" fill="hold">
+                                          <p:stCondLst>
+                                            <p:cond delay="0"/>
+                                          </p:stCondLst>
+                                        </p:cTn>
+                                        <p:tgtEl>
+                                          <p:spTgt spid="11"/>
+                                        </p:tgtEl>
+                                        <p:attrNameLst>
+                                          <p:attrName>style.visibility</p:attrName>
+                                        </p:attrNameLst>
+                                      </p:cBhvr>
+                                      <p:to>
+                                        <p:strVal val="visible"/>
+                                      </p:to>
+                                    </p:set>
+                                    <p:animEffect transition="in" filter="fade">
+                                      <p:cBhvr>
+                                        <p:cTn id="33" dur="500"/>
+                                        <p:tgtEl>
+                                          <p:spTgt spid="11"/>
+                                        </p:tgtEl>
+                                      </p:cBhvr>
+                                    </p:animEffect>
+                                  </p:childTnLst>
+                                </p:cTn>
+                              </p:par>
+                              <p:par>
+                                <p:cTn id="35" presetID="10" presetClass="entr" presetSubtype="0" fill="hold" grpId="0" nodeType="withEffect">
+                                  <p:stCondLst>
+                                    <p:cond delay="3200"/>
+                                  </p:stCondLst>
+                                  <p:childTnLst>
+                                    <p:set>
+                                      <p:cBhvr>
+                                        <p:cTn id="34" dur="1" fill="hold">
+                                          <p:stCondLst>
+                                            <p:cond delay="0"/>
+                                          </p:stCondLst>
+                                        </p:cTn>
+                                        <p:tgtEl>
+                                          <p:spTgt spid="12"/>
+                                        </p:tgtEl>
+                                        <p:attrNameLst>
+                                          <p:attrName>style.visibility</p:attrName>
+                                        </p:attrNameLst>
+                                      </p:cBhvr>
+                                      <p:to>
+                                        <p:strVal val="visible"/>
+                                      </p:to>
+                                    </p:set>
+                                    <p:animEffect transition="in" filter="fade">
+                                      <p:cBhvr>
+                                        <p:cTn id="36" dur="500"/>
+                                        <p:tgtEl>
+                                          <p:spTgt spid="12"/>
                                         </p:tgtEl>
                                       </p:cBhvr>
                                     </p:animEffect>
@@ -7797,7 +10691,7 @@
         </p:nvSpPr>
         <p:spPr>
           <a:xfrm>
-            <a:off x="685800" y="502920"/>
+            <a:off x="685800" y="457200"/>
             <a:ext cx="10789920" cy="320040"/>
           </a:xfrm>
           <a:prstGeom prst="rect">
@@ -7836,8 +10730,8 @@
         </p:nvSpPr>
         <p:spPr>
           <a:xfrm>
-            <a:off x="685800" y="886968"/>
-            <a:ext cx="10789920" cy="914400"/>
+            <a:off x="685800" y="841248"/>
+            <a:ext cx="10789920" cy="731520"/>
           </a:xfrm>
           <a:prstGeom prst="rect">
             <a:avLst/>
@@ -7853,7 +10747,7 @@
               <a:buNone/>
             </a:pPr>
             <a:r>
-              <a:rPr lang="en-US" sz="3400" b="1" dirty="0">
+              <a:rPr lang="en-US" sz="3200" b="1" dirty="0">
                 <a:solidFill>
                   <a:srgbClr val="11372A"/>
                 </a:solidFill>
@@ -7861,22 +10755,254 @@
                 <a:ea typeface="Segoe UI" pitchFamily="34" charset="-122"/>
                 <a:cs typeface="Segoe UI" pitchFamily="34" charset="-120"/>
               </a:rPr>
-              <a:t>Secure sign-in, everywhere</a:t>
+              <a:t>Sign in / Create account - everywhere</a:t>
             </a:r>
-            <a:endParaRPr lang="en-US" sz="3400" dirty="0"/>
+            <a:endParaRPr lang="en-US" sz="3200" dirty="0"/>
           </a:p>
         </p:txBody>
       </p:sp>
       <p:sp>
         <p:nvSpPr>
-          <p:cNvPr id="5" name="Text 3"/>
-          <p:cNvSpPr/>
-          <p:nvPr/>
-        </p:nvSpPr>
-        <p:spPr>
-          <a:xfrm>
-            <a:off x="777240" y="1828800"/>
-            <a:ext cx="10515600" cy="4023360"/>
+          <p:cNvPr id="5" name="Shape 3"/>
+          <p:cNvSpPr/>
+          <p:nvPr/>
+        </p:nvSpPr>
+        <p:spPr>
+          <a:xfrm>
+            <a:off x="822960" y="2029968"/>
+            <a:ext cx="5212080" cy="2528824"/>
+          </a:xfrm>
+          <a:prstGeom prst="roundRect">
+            <a:avLst>
+              <a:gd name="adj" fmla="val 2893"/>
+            </a:avLst>
+          </a:prstGeom>
+          <a:solidFill>
+            <a:srgbClr val="0D2C20">
+              <a:alpha val="22000"/>
+            </a:srgbClr>
+          </a:solidFill>
+          <a:ln/>
+        </p:spPr>
+      </p:sp>
+      <p:pic>
+        <p:nvPicPr>
+          <p:cNvPr id="6" name="Image 0" descr="C:/Users/Komal Saxena/AppData/Local/Temp/opencode/deckimg/06-signup.png">    </p:cNvPr>
+          <p:cNvPicPr>
+            <a:picLocks noChangeAspect="1"/>
+          </p:cNvPicPr>
+          <p:nvPr/>
+        </p:nvPicPr>
+        <p:blipFill>
+          <a:blip r:embed="rId1"/>
+          <a:stretch>
+            <a:fillRect/>
+          </a:stretch>
+        </p:blipFill>
+        <p:spPr>
+          <a:xfrm>
+            <a:off x="777240" y="1965960"/>
+            <a:ext cx="5212080" cy="2528824"/>
+          </a:xfrm>
+          <a:prstGeom prst="rect">
+            <a:avLst/>
+          </a:prstGeom>
+        </p:spPr>
+      </p:pic>
+      <p:sp>
+        <p:nvSpPr>
+          <p:cNvPr id="7" name="Shape 4"/>
+          <p:cNvSpPr/>
+          <p:nvPr/>
+        </p:nvSpPr>
+        <p:spPr>
+          <a:xfrm>
+            <a:off x="777240" y="1965960"/>
+            <a:ext cx="5212080" cy="2528824"/>
+          </a:xfrm>
+          <a:prstGeom prst="roundRect">
+            <a:avLst>
+              <a:gd name="adj" fmla="val 2893"/>
+            </a:avLst>
+          </a:prstGeom>
+          <a:solidFill>
+            <a:srgbClr val="FFFFFF">
+              <a:alpha val="0"/>
+            </a:srgbClr>
+          </a:solidFill>
+          <a:ln w="12700">
+            <a:solidFill>
+              <a:srgbClr val="D8D5C8"/>
+            </a:solidFill>
+            <a:prstDash val="solid"/>
+          </a:ln>
+        </p:spPr>
+      </p:sp>
+      <p:sp>
+        <p:nvSpPr>
+          <p:cNvPr id="8" name="Shape 5"/>
+          <p:cNvSpPr/>
+          <p:nvPr/>
+        </p:nvSpPr>
+        <p:spPr>
+          <a:xfrm>
+            <a:off x="6400800" y="2029968"/>
+            <a:ext cx="5212080" cy="2528824"/>
+          </a:xfrm>
+          <a:prstGeom prst="roundRect">
+            <a:avLst>
+              <a:gd name="adj" fmla="val 2893"/>
+            </a:avLst>
+          </a:prstGeom>
+          <a:solidFill>
+            <a:srgbClr val="0D2C20">
+              <a:alpha val="22000"/>
+            </a:srgbClr>
+          </a:solidFill>
+          <a:ln/>
+        </p:spPr>
+      </p:sp>
+      <p:pic>
+        <p:nvPicPr>
+          <p:cNvPr id="9" name="Image 1" descr="C:/Users/Komal Saxena/AppData/Local/Temp/opencode/deckimg/07-signin.png">    </p:cNvPr>
+          <p:cNvPicPr>
+            <a:picLocks noChangeAspect="1"/>
+          </p:cNvPicPr>
+          <p:nvPr/>
+        </p:nvPicPr>
+        <p:blipFill>
+          <a:blip r:embed="rId2"/>
+          <a:stretch>
+            <a:fillRect/>
+          </a:stretch>
+        </p:blipFill>
+        <p:spPr>
+          <a:xfrm>
+            <a:off x="6355080" y="1965960"/>
+            <a:ext cx="5212080" cy="2528824"/>
+          </a:xfrm>
+          <a:prstGeom prst="rect">
+            <a:avLst/>
+          </a:prstGeom>
+        </p:spPr>
+      </p:pic>
+      <p:sp>
+        <p:nvSpPr>
+          <p:cNvPr id="10" name="Shape 6"/>
+          <p:cNvSpPr/>
+          <p:nvPr/>
+        </p:nvSpPr>
+        <p:spPr>
+          <a:xfrm>
+            <a:off x="6355080" y="1965960"/>
+            <a:ext cx="5212080" cy="2528824"/>
+          </a:xfrm>
+          <a:prstGeom prst="roundRect">
+            <a:avLst>
+              <a:gd name="adj" fmla="val 2893"/>
+            </a:avLst>
+          </a:prstGeom>
+          <a:solidFill>
+            <a:srgbClr val="FFFFFF">
+              <a:alpha val="0"/>
+            </a:srgbClr>
+          </a:solidFill>
+          <a:ln w="12700">
+            <a:solidFill>
+              <a:srgbClr val="D8D5C8"/>
+            </a:solidFill>
+            <a:prstDash val="solid"/>
+          </a:ln>
+        </p:spPr>
+      </p:sp>
+      <p:sp>
+        <p:nvSpPr>
+          <p:cNvPr id="11" name="Text 7"/>
+          <p:cNvSpPr/>
+          <p:nvPr/>
+        </p:nvSpPr>
+        <p:spPr>
+          <a:xfrm>
+            <a:off x="777240" y="4586224"/>
+            <a:ext cx="5212080" cy="365760"/>
+          </a:xfrm>
+          <a:prstGeom prst="rect">
+            <a:avLst/>
+          </a:prstGeom>
+          <a:noFill/>
+          <a:ln/>
+        </p:spPr>
+        <p:txBody>
+          <a:bodyPr wrap="square" rtlCol="0" anchor="ctr"/>
+          <a:lstStyle/>
+          <a:p>
+            <a:pPr algn="ctr" indent="0" marL="0">
+              <a:buNone/>
+            </a:pPr>
+            <a:r>
+              <a:rPr lang="en-US" sz="1200" b="1" dirty="0">
+                <a:solidFill>
+                  <a:srgbClr val="123A2B"/>
+                </a:solidFill>
+                <a:latin typeface="Segoe UI" pitchFamily="34" charset="0"/>
+                <a:ea typeface="Segoe UI" pitchFamily="34" charset="-122"/>
+                <a:cs typeface="Segoe UI" pitchFamily="34" charset="-120"/>
+              </a:rPr>
+              <a:t>Create account: name + email + password</a:t>
+            </a:r>
+            <a:endParaRPr lang="en-US" sz="1200" dirty="0"/>
+          </a:p>
+        </p:txBody>
+      </p:sp>
+      <p:sp>
+        <p:nvSpPr>
+          <p:cNvPr id="12" name="Text 8"/>
+          <p:cNvSpPr/>
+          <p:nvPr/>
+        </p:nvSpPr>
+        <p:spPr>
+          <a:xfrm>
+            <a:off x="6355080" y="4586224"/>
+            <a:ext cx="5212080" cy="365760"/>
+          </a:xfrm>
+          <a:prstGeom prst="rect">
+            <a:avLst/>
+          </a:prstGeom>
+          <a:noFill/>
+          <a:ln/>
+        </p:spPr>
+        <p:txBody>
+          <a:bodyPr wrap="square" rtlCol="0" anchor="ctr"/>
+          <a:lstStyle/>
+          <a:p>
+            <a:pPr algn="ctr" indent="0" marL="0">
+              <a:buNone/>
+            </a:pPr>
+            <a:r>
+              <a:rPr lang="en-US" sz="1200" b="1" dirty="0">
+                <a:solidFill>
+                  <a:srgbClr val="123A2B"/>
+                </a:solidFill>
+                <a:latin typeface="Segoe UI" pitchFamily="34" charset="0"/>
+                <a:ea typeface="Segoe UI" pitchFamily="34" charset="-122"/>
+                <a:cs typeface="Segoe UI" pitchFamily="34" charset="-120"/>
+              </a:rPr>
+              <a:t>Sign in: email + password</a:t>
+            </a:r>
+            <a:endParaRPr lang="en-US" sz="1200" dirty="0"/>
+          </a:p>
+        </p:txBody>
+      </p:sp>
+      <p:sp>
+        <p:nvSpPr>
+          <p:cNvPr id="13" name="Text 9"/>
+          <p:cNvSpPr/>
+          <p:nvPr/>
+        </p:nvSpPr>
+        <p:spPr>
+          <a:xfrm>
+            <a:off x="777240" y="5074920"/>
+            <a:ext cx="10607040" cy="1188720"/>
           </a:xfrm>
           <a:prstGeom prst="rect">
             <a:avLst/>
@@ -7890,13 +11016,13 @@
           <a:p>
             <a:pPr marL="228600" indent="-228600">
               <a:lnSpc>
-                <a:spcPct val="135000"/>
+                <a:spcPct val="130000"/>
               </a:lnSpc>
               <a:buSzPct val="100000"/>
               <a:buChar char="•"/>
             </a:pPr>
             <a:r>
-              <a:rPr lang="en-US" sz="1800" dirty="0">
+              <a:rPr lang="en-US" sz="1450" dirty="0">
                 <a:solidFill>
                   <a:srgbClr val="11372A"/>
                 </a:solidFill>
@@ -7904,20 +11030,20 @@
                 <a:ea typeface="Segoe UI" pitchFamily="34" charset="-122"/>
                 <a:cs typeface="Segoe UI" pitchFamily="34" charset="-120"/>
               </a:rPr>
-              <a:t>Sign up: name + email + password. Sign in: email + password - on the web app AND the desktop app.</a:t>
+              <a:t>Desktop app: scrypt-hashed passwords, JWT sessions, MongoDB or file store.</a:t>
             </a:r>
-            <a:endParaRPr lang="en-US" sz="1800" dirty="0"/>
+            <a:endParaRPr lang="en-US" sz="1450" dirty="0"/>
           </a:p>
           <a:p>
             <a:pPr marL="228600" indent="-228600">
               <a:lnSpc>
-                <a:spcPct val="135000"/>
+                <a:spcPct val="130000"/>
               </a:lnSpc>
               <a:buSzPct val="100000"/>
               <a:buChar char="•"/>
             </a:pPr>
             <a:r>
-              <a:rPr lang="en-US" sz="1800" dirty="0">
+              <a:rPr lang="en-US" sz="1450" dirty="0">
                 <a:solidFill>
                   <a:srgbClr val="11372A"/>
                 </a:solidFill>
@@ -7925,20 +11051,20 @@
                 <a:ea typeface="Segoe UI" pitchFamily="34" charset="-122"/>
                 <a:cs typeface="Segoe UI" pitchFamily="34" charset="-120"/>
               </a:rPr>
-              <a:t>Full app: passwords hashed with scrypt (salted, constant-time compare); JWT sessions; MongoDB or file store.</a:t>
+              <a:t>Hosted app: browser-local accounts, salted SHA-256 via WebCrypto.</a:t>
             </a:r>
-            <a:endParaRPr lang="en-US" sz="1800" dirty="0"/>
+            <a:endParaRPr lang="en-US" sz="1450" dirty="0"/>
           </a:p>
           <a:p>
             <a:pPr marL="228600" indent="-228600">
               <a:lnSpc>
-                <a:spcPct val="135000"/>
+                <a:spcPct val="130000"/>
               </a:lnSpc>
               <a:buSzPct val="100000"/>
               <a:buChar char="•"/>
             </a:pPr>
             <a:r>
-              <a:rPr lang="en-US" sz="1800" dirty="0">
+              <a:rPr lang="en-US" sz="1450" dirty="0">
                 <a:solidFill>
                   <a:srgbClr val="11372A"/>
                 </a:solidFill>
@@ -7946,57 +11072,15 @@
                 <a:ea typeface="Segoe UI" pitchFamily="34" charset="-122"/>
                 <a:cs typeface="Segoe UI" pitchFamily="34" charset="-120"/>
               </a:rPr>
-              <a:t>Hosted app: browser-local accounts hashed with salted SHA-256 via WebCrypto - resumes never leave the device.</a:t>
+              <a:t>Resumes never leave your device on the hosted version.</a:t>
             </a:r>
-            <a:endParaRPr lang="en-US" sz="1800" dirty="0"/>
-          </a:p>
-          <a:p>
-            <a:pPr marL="228600" indent="-228600">
-              <a:lnSpc>
-                <a:spcPct val="135000"/>
-              </a:lnSpc>
-              <a:buSzPct val="100000"/>
-              <a:buChar char="•"/>
-            </a:pPr>
-            <a:r>
-              <a:rPr lang="en-US" sz="1800" dirty="0">
-                <a:solidFill>
-                  <a:srgbClr val="11372A"/>
-                </a:solidFill>
-                <a:latin typeface="Segoe UI" pitchFamily="34" charset="0"/>
-                <a:ea typeface="Segoe UI" pitchFamily="34" charset="-122"/>
-                <a:cs typeface="Segoe UI" pitchFamily="34" charset="-120"/>
-              </a:rPr>
-              <a:t>Google OAuth button appears automatically when a client ID is configured.</a:t>
-            </a:r>
-            <a:endParaRPr lang="en-US" sz="1800" dirty="0"/>
-          </a:p>
-          <a:p>
-            <a:pPr marL="228600" indent="-228600">
-              <a:lnSpc>
-                <a:spcPct val="135000"/>
-              </a:lnSpc>
-              <a:buSzPct val="100000"/>
-              <a:buChar char="•"/>
-            </a:pPr>
-            <a:r>
-              <a:rPr lang="en-US" sz="1800" dirty="0">
-                <a:solidFill>
-                  <a:srgbClr val="11372A"/>
-                </a:solidFill>
-                <a:latin typeface="Segoe UI" pitchFamily="34" charset="0"/>
-                <a:ea typeface="Segoe UI" pitchFamily="34" charset="-122"/>
-                <a:cs typeface="Segoe UI" pitchFamily="34" charset="-120"/>
-              </a:rPr>
-              <a:t>Session-scoped results: percentages never linger across visits.</a:t>
-            </a:r>
-            <a:endParaRPr lang="en-US" sz="1800" dirty="0"/>
+            <a:endParaRPr lang="en-US" sz="1450" dirty="0"/>
           </a:p>
         </p:txBody>
       </p:sp>
       <p:sp>
         <p:nvSpPr>
-          <p:cNvPr id="6" name="Text 4"/>
+          <p:cNvPr id="14" name="Text 10"/>
           <p:cNvSpPr/>
           <p:nvPr/>
         </p:nvSpPr>
@@ -8096,7 +11180,7 @@
                               <p:par>
                                 <p:cTn id="8" presetID="10" presetClass="entr" presetSubtype="0" fill="hold" grpId="0" nodeType="withEffect">
                                   <p:stCondLst>
-                                    <p:cond delay="350"/>
+                                    <p:cond delay="320"/>
                                   </p:stCondLst>
                                   <p:childTnLst>
                                     <p:set>
@@ -8131,7 +11215,7 @@
                               <p:par>
                                 <p:cTn id="11" presetID="10" presetClass="entr" presetSubtype="0" fill="hold" grpId="0" nodeType="withEffect">
                                   <p:stCondLst>
-                                    <p:cond delay="700"/>
+                                    <p:cond delay="640"/>
                                   </p:stCondLst>
                                   <p:childTnLst>
                                     <p:set>
@@ -8166,7 +11250,7 @@
                               <p:par>
                                 <p:cTn id="14" presetID="10" presetClass="entr" presetSubtype="0" fill="hold" grpId="0" nodeType="withEffect">
                                   <p:stCondLst>
-                                    <p:cond delay="1050"/>
+                                    <p:cond delay="960"/>
                                   </p:stCondLst>
                                   <p:childTnLst>
                                     <p:set>
@@ -8201,7 +11285,7 @@
                               <p:par>
                                 <p:cTn id="17" presetID="10" presetClass="entr" presetSubtype="0" fill="hold" grpId="0" nodeType="withEffect">
                                   <p:stCondLst>
-                                    <p:cond delay="1400"/>
+                                    <p:cond delay="1280"/>
                                   </p:stCondLst>
                                   <p:childTnLst>
                                     <p:set>
@@ -8227,6 +11311,286 @@
                                         <p:cTn id="18" dur="500"/>
                                         <p:tgtEl>
                                           <p:spTgt spid="6"/>
+                                        </p:tgtEl>
+                                      </p:cBhvr>
+                                    </p:animEffect>
+                                  </p:childTnLst>
+                                </p:cTn>
+                              </p:par>
+                              <p:par>
+                                <p:cTn id="20" presetID="10" presetClass="entr" presetSubtype="0" fill="hold" grpId="0" nodeType="withEffect">
+                                  <p:stCondLst>
+                                    <p:cond delay="1600"/>
+                                  </p:stCondLst>
+                                  <p:childTnLst>
+                                    <p:set>
+                                      <p:cBhvr>
+                                        <p:cTn id="19" dur="1" fill="hold">
+                                          <p:stCondLst>
+                                            <p:cond delay="0"/>
+                                          </p:stCondLst>
+                                        </p:cTn>
+                                        <p:tgtEl>
+                                          <p:spTgt spid="7"/>
+                                        </p:tgtEl>
+                                        <p:attrNameLst>
+                                          <p:attrName>style.visibility</p:attrName>
+                                        </p:attrNameLst>
+                                      </p:cBhvr>
+                                      <p:to>
+                                        <p:strVal val="visible"/>
+                                      </p:to>
+                                    </p:set>
+                                    <p:animEffect transition="in" filter="fade">
+                                      <p:cBhvr>
+                                        <p:cTn id="21" dur="500"/>
+                                        <p:tgtEl>
+                                          <p:spTgt spid="7"/>
+                                        </p:tgtEl>
+                                      </p:cBhvr>
+                                    </p:animEffect>
+                                  </p:childTnLst>
+                                </p:cTn>
+                              </p:par>
+                              <p:par>
+                                <p:cTn id="23" presetID="10" presetClass="entr" presetSubtype="0" fill="hold" grpId="0" nodeType="withEffect">
+                                  <p:stCondLst>
+                                    <p:cond delay="1920"/>
+                                  </p:stCondLst>
+                                  <p:childTnLst>
+                                    <p:set>
+                                      <p:cBhvr>
+                                        <p:cTn id="22" dur="1" fill="hold">
+                                          <p:stCondLst>
+                                            <p:cond delay="0"/>
+                                          </p:stCondLst>
+                                        </p:cTn>
+                                        <p:tgtEl>
+                                          <p:spTgt spid="8"/>
+                                        </p:tgtEl>
+                                        <p:attrNameLst>
+                                          <p:attrName>style.visibility</p:attrName>
+                                        </p:attrNameLst>
+                                      </p:cBhvr>
+                                      <p:to>
+                                        <p:strVal val="visible"/>
+                                      </p:to>
+                                    </p:set>
+                                    <p:animEffect transition="in" filter="fade">
+                                      <p:cBhvr>
+                                        <p:cTn id="24" dur="500"/>
+                                        <p:tgtEl>
+                                          <p:spTgt spid="8"/>
+                                        </p:tgtEl>
+                                      </p:cBhvr>
+                                    </p:animEffect>
+                                  </p:childTnLst>
+                                </p:cTn>
+                              </p:par>
+                              <p:par>
+                                <p:cTn id="26" presetID="10" presetClass="entr" presetSubtype="0" fill="hold" grpId="0" nodeType="withEffect">
+                                  <p:stCondLst>
+                                    <p:cond delay="2240"/>
+                                  </p:stCondLst>
+                                  <p:childTnLst>
+                                    <p:set>
+                                      <p:cBhvr>
+                                        <p:cTn id="25" dur="1" fill="hold">
+                                          <p:stCondLst>
+                                            <p:cond delay="0"/>
+                                          </p:stCondLst>
+                                        </p:cTn>
+                                        <p:tgtEl>
+                                          <p:spTgt spid="9"/>
+                                        </p:tgtEl>
+                                        <p:attrNameLst>
+                                          <p:attrName>style.visibility</p:attrName>
+                                        </p:attrNameLst>
+                                      </p:cBhvr>
+                                      <p:to>
+                                        <p:strVal val="visible"/>
+                                      </p:to>
+                                    </p:set>
+                                    <p:animEffect transition="in" filter="fade">
+                                      <p:cBhvr>
+                                        <p:cTn id="27" dur="500"/>
+                                        <p:tgtEl>
+                                          <p:spTgt spid="9"/>
+                                        </p:tgtEl>
+                                      </p:cBhvr>
+                                    </p:animEffect>
+                                  </p:childTnLst>
+                                </p:cTn>
+                              </p:par>
+                              <p:par>
+                                <p:cTn id="29" presetID="10" presetClass="entr" presetSubtype="0" fill="hold" grpId="0" nodeType="withEffect">
+                                  <p:stCondLst>
+                                    <p:cond delay="2560"/>
+                                  </p:stCondLst>
+                                  <p:childTnLst>
+                                    <p:set>
+                                      <p:cBhvr>
+                                        <p:cTn id="28" dur="1" fill="hold">
+                                          <p:stCondLst>
+                                            <p:cond delay="0"/>
+                                          </p:stCondLst>
+                                        </p:cTn>
+                                        <p:tgtEl>
+                                          <p:spTgt spid="10"/>
+                                        </p:tgtEl>
+                                        <p:attrNameLst>
+                                          <p:attrName>style.visibility</p:attrName>
+                                        </p:attrNameLst>
+                                      </p:cBhvr>
+                                      <p:to>
+                                        <p:strVal val="visible"/>
+                                      </p:to>
+                                    </p:set>
+                                    <p:animEffect transition="in" filter="fade">
+                                      <p:cBhvr>
+                                        <p:cTn id="30" dur="500"/>
+                                        <p:tgtEl>
+                                          <p:spTgt spid="10"/>
+                                        </p:tgtEl>
+                                      </p:cBhvr>
+                                    </p:animEffect>
+                                  </p:childTnLst>
+                                </p:cTn>
+                              </p:par>
+                              <p:par>
+                                <p:cTn id="32" presetID="10" presetClass="entr" presetSubtype="0" fill="hold" grpId="0" nodeType="withEffect">
+                                  <p:stCondLst>
+                                    <p:cond delay="2880"/>
+                                  </p:stCondLst>
+                                  <p:childTnLst>
+                                    <p:set>
+                                      <p:cBhvr>
+                                        <p:cTn id="31" dur="1" fill="hold">
+                                          <p:stCondLst>
+                                            <p:cond delay="0"/>
+                                          </p:stCondLst>
+                                        </p:cTn>
+                                        <p:tgtEl>
+                                          <p:spTgt spid="11"/>
+                                        </p:tgtEl>
+                                        <p:attrNameLst>
+                                          <p:attrName>style.visibility</p:attrName>
+                                        </p:attrNameLst>
+                                      </p:cBhvr>
+                                      <p:to>
+                                        <p:strVal val="visible"/>
+                                      </p:to>
+                                    </p:set>
+                                    <p:animEffect transition="in" filter="fade">
+                                      <p:cBhvr>
+                                        <p:cTn id="33" dur="500"/>
+                                        <p:tgtEl>
+                                          <p:spTgt spid="11"/>
+                                        </p:tgtEl>
+                                      </p:cBhvr>
+                                    </p:animEffect>
+                                  </p:childTnLst>
+                                </p:cTn>
+                              </p:par>
+                              <p:par>
+                                <p:cTn id="35" presetID="10" presetClass="entr" presetSubtype="0" fill="hold" grpId="0" nodeType="withEffect">
+                                  <p:stCondLst>
+                                    <p:cond delay="3200"/>
+                                  </p:stCondLst>
+                                  <p:childTnLst>
+                                    <p:set>
+                                      <p:cBhvr>
+                                        <p:cTn id="34" dur="1" fill="hold">
+                                          <p:stCondLst>
+                                            <p:cond delay="0"/>
+                                          </p:stCondLst>
+                                        </p:cTn>
+                                        <p:tgtEl>
+                                          <p:spTgt spid="12"/>
+                                        </p:tgtEl>
+                                        <p:attrNameLst>
+                                          <p:attrName>style.visibility</p:attrName>
+                                        </p:attrNameLst>
+                                      </p:cBhvr>
+                                      <p:to>
+                                        <p:strVal val="visible"/>
+                                      </p:to>
+                                    </p:set>
+                                    <p:animEffect transition="in" filter="fade">
+                                      <p:cBhvr>
+                                        <p:cTn id="36" dur="500"/>
+                                        <p:tgtEl>
+                                          <p:spTgt spid="12"/>
+                                        </p:tgtEl>
+                                      </p:cBhvr>
+                                    </p:animEffect>
+                                  </p:childTnLst>
+                                </p:cTn>
+                              </p:par>
+                              <p:par>
+                                <p:cTn id="38" presetID="10" presetClass="entr" presetSubtype="0" fill="hold" grpId="0" nodeType="withEffect">
+                                  <p:stCondLst>
+                                    <p:cond delay="3520"/>
+                                  </p:stCondLst>
+                                  <p:childTnLst>
+                                    <p:set>
+                                      <p:cBhvr>
+                                        <p:cTn id="37" dur="1" fill="hold">
+                                          <p:stCondLst>
+                                            <p:cond delay="0"/>
+                                          </p:stCondLst>
+                                        </p:cTn>
+                                        <p:tgtEl>
+                                          <p:spTgt spid="13"/>
+                                        </p:tgtEl>
+                                        <p:attrNameLst>
+                                          <p:attrName>style.visibility</p:attrName>
+                                        </p:attrNameLst>
+                                      </p:cBhvr>
+                                      <p:to>
+                                        <p:strVal val="visible"/>
+                                      </p:to>
+                                    </p:set>
+                                    <p:animEffect transition="in" filter="fade">
+                                      <p:cBhvr>
+                                        <p:cTn id="39" dur="500"/>
+                                        <p:tgtEl>
+                                          <p:spTgt spid="13"/>
+                                        </p:tgtEl>
+                                      </p:cBhvr>
+                                    </p:animEffect>
+                                  </p:childTnLst>
+                                </p:cTn>
+                              </p:par>
+                              <p:par>
+                                <p:cTn id="41" presetID="10" presetClass="entr" presetSubtype="0" fill="hold" grpId="0" nodeType="withEffect">
+                                  <p:stCondLst>
+                                    <p:cond delay="3840"/>
+                                  </p:stCondLst>
+                                  <p:childTnLst>
+                                    <p:set>
+                                      <p:cBhvr>
+                                        <p:cTn id="40" dur="1" fill="hold">
+                                          <p:stCondLst>
+                                            <p:cond delay="0"/>
+                                          </p:stCondLst>
+                                        </p:cTn>
+                                        <p:tgtEl>
+                                          <p:spTgt spid="14"/>
+                                        </p:tgtEl>
+                                        <p:attrNameLst>
+                                          <p:attrName>style.visibility</p:attrName>
+                                        </p:attrNameLst>
+                                      </p:cBhvr>
+                                      <p:to>
+                                        <p:strVal val="visible"/>
+                                      </p:to>
+                                    </p:set>
+                                    <p:animEffect transition="in" filter="fade">
+                                      <p:cBhvr>
+                                        <p:cTn id="42" dur="500"/>
+                                        <p:tgtEl>
+                                          <p:spTgt spid="14"/>
                                         </p:tgtEl>
                                       </p:cBhvr>
                                     </p:animEffect>
@@ -8316,7 +11680,7 @@
         </p:nvSpPr>
         <p:spPr>
           <a:xfrm>
-            <a:off x="685800" y="502920"/>
+            <a:off x="685800" y="457200"/>
             <a:ext cx="10789920" cy="320040"/>
           </a:xfrm>
           <a:prstGeom prst="rect">
@@ -8355,8 +11719,8 @@
         </p:nvSpPr>
         <p:spPr>
           <a:xfrm>
-            <a:off x="685800" y="886968"/>
-            <a:ext cx="10789920" cy="914400"/>
+            <a:off x="685800" y="841248"/>
+            <a:ext cx="10789920" cy="731520"/>
           </a:xfrm>
           <a:prstGeom prst="rect">
             <a:avLst/>
@@ -8372,7 +11736,7 @@
               <a:buNone/>
             </a:pPr>
             <a:r>
-              <a:rPr lang="en-US" sz="3400" b="1" dirty="0">
+              <a:rPr lang="en-US" sz="3200" b="1" dirty="0">
                 <a:solidFill>
                   <a:srgbClr val="11372A"/>
                 </a:solidFill>
@@ -8380,22 +11744,49 @@
                 <a:ea typeface="Segoe UI" pitchFamily="34" charset="-122"/>
                 <a:cs typeface="Segoe UI" pitchFamily="34" charset="-120"/>
               </a:rPr>
-              <a:t>Web, hosted, and desktop</a:t>
+              <a:t>Web, local, and desktop</a:t>
             </a:r>
-            <a:endParaRPr lang="en-US" sz="3400" dirty="0"/>
+            <a:endParaRPr lang="en-US" sz="3200" dirty="0"/>
           </a:p>
         </p:txBody>
       </p:sp>
       <p:sp>
         <p:nvSpPr>
-          <p:cNvPr id="5" name="Text 3"/>
-          <p:cNvSpPr/>
-          <p:nvPr/>
-        </p:nvSpPr>
-        <p:spPr>
-          <a:xfrm>
-            <a:off x="777240" y="1828800"/>
-            <a:ext cx="10515600" cy="4023360"/>
+          <p:cNvPr id="5" name="Shape 3"/>
+          <p:cNvSpPr/>
+          <p:nvPr/>
+        </p:nvSpPr>
+        <p:spPr>
+          <a:xfrm>
+            <a:off x="777240" y="2011680"/>
+            <a:ext cx="5212080" cy="1188720"/>
+          </a:xfrm>
+          <a:prstGeom prst="roundRect">
+            <a:avLst>
+              <a:gd name="adj" fmla="val 9231"/>
+            </a:avLst>
+          </a:prstGeom>
+          <a:solidFill>
+            <a:srgbClr val="FFFFFF"/>
+          </a:solidFill>
+          <a:ln w="19050">
+            <a:solidFill>
+              <a:srgbClr val="F1EFE6"/>
+            </a:solidFill>
+            <a:prstDash val="solid"/>
+          </a:ln>
+        </p:spPr>
+      </p:sp>
+      <p:sp>
+        <p:nvSpPr>
+          <p:cNvPr id="6" name="Text 4"/>
+          <p:cNvSpPr/>
+          <p:nvPr/>
+        </p:nvSpPr>
+        <p:spPr>
+          <a:xfrm>
+            <a:off x="1005840" y="2148840"/>
+            <a:ext cx="4754880" cy="365760"/>
           </a:xfrm>
           <a:prstGeom prst="rect">
             <a:avLst/>
@@ -8407,115 +11798,392 @@
           <a:bodyPr wrap="square" rtlCol="0" anchor="ctr"/>
           <a:lstStyle/>
           <a:p>
-            <a:pPr marL="228600" indent="-228600">
-              <a:lnSpc>
-                <a:spcPct val="135000"/>
-              </a:lnSpc>
-              <a:buSzPct val="100000"/>
-              <a:buChar char="•"/>
+            <a:pPr indent="0" marL="0">
+              <a:buNone/>
             </a:pPr>
             <a:r>
-              <a:rPr lang="en-US" sz="1800" dirty="0">
+              <a:rPr lang="en-US" sz="1700" b="1" dirty="0">
                 <a:solidFill>
-                  <a:srgbClr val="11372A"/>
+                  <a:srgbClr val="123A2B"/>
                 </a:solidFill>
                 <a:latin typeface="Segoe UI" pitchFamily="34" charset="0"/>
                 <a:ea typeface="Segoe UI" pitchFamily="34" charset="-122"/>
                 <a:cs typeface="Segoe UI" pitchFamily="34" charset="-120"/>
               </a:rPr>
-              <a:t>Live web app: saxenavansh070-droid.github.io/nextrole - full analysis in the browser, zero setup.</a:t>
+              <a:t>Live web app</a:t>
             </a:r>
-            <a:endParaRPr lang="en-US" sz="1800" dirty="0"/>
+            <a:endParaRPr lang="en-US" sz="1700" dirty="0"/>
           </a:p>
+        </p:txBody>
+      </p:sp>
+      <p:sp>
+        <p:nvSpPr>
+          <p:cNvPr id="7" name="Text 5"/>
+          <p:cNvSpPr/>
+          <p:nvPr/>
+        </p:nvSpPr>
+        <p:spPr>
+          <a:xfrm>
+            <a:off x="1005840" y="2542032"/>
+            <a:ext cx="4754880" cy="594360"/>
+          </a:xfrm>
+          <a:prstGeom prst="rect">
+            <a:avLst/>
+          </a:prstGeom>
+          <a:noFill/>
+          <a:ln/>
+        </p:spPr>
+        <p:txBody>
+          <a:bodyPr wrap="square" rtlCol="0" anchor="ctr"/>
+          <a:lstStyle/>
           <a:p>
-            <a:pPr marL="228600" indent="-228600">
-              <a:lnSpc>
-                <a:spcPct val="135000"/>
-              </a:lnSpc>
-              <a:buSzPct val="100000"/>
-              <a:buChar char="•"/>
+            <a:pPr indent="0" marL="0">
+              <a:buNone/>
             </a:pPr>
             <a:r>
-              <a:rPr lang="en-US" sz="1800" dirty="0">
+              <a:rPr lang="en-US" sz="1250" dirty="0">
                 <a:solidFill>
-                  <a:srgbClr val="11372A"/>
+                  <a:srgbClr val="75897D"/>
                 </a:solidFill>
                 <a:latin typeface="Segoe UI" pitchFamily="34" charset="0"/>
                 <a:ea typeface="Segoe UI" pitchFamily="34" charset="-122"/>
                 <a:cs typeface="Segoe UI" pitchFamily="34" charset="-120"/>
               </a:rPr>
-              <a:t>Local full stack: one Node process serves UI + API (npm run dev, or build + start).</a:t>
+              <a:t>saxenavansh070-droid.github.io/nextrole - full analysis in your browser.</a:t>
             </a:r>
-            <a:endParaRPr lang="en-US" sz="1800" dirty="0"/>
+            <a:endParaRPr lang="en-US" sz="1250" dirty="0"/>
           </a:p>
+        </p:txBody>
+      </p:sp>
+      <p:sp>
+        <p:nvSpPr>
+          <p:cNvPr id="8" name="Shape 6"/>
+          <p:cNvSpPr/>
+          <p:nvPr/>
+        </p:nvSpPr>
+        <p:spPr>
+          <a:xfrm>
+            <a:off x="777240" y="3383280"/>
+            <a:ext cx="5212080" cy="1188720"/>
+          </a:xfrm>
+          <a:prstGeom prst="roundRect">
+            <a:avLst>
+              <a:gd name="adj" fmla="val 9231"/>
+            </a:avLst>
+          </a:prstGeom>
+          <a:solidFill>
+            <a:srgbClr val="FFFFFF"/>
+          </a:solidFill>
+          <a:ln w="19050">
+            <a:solidFill>
+              <a:srgbClr val="F1EFE6"/>
+            </a:solidFill>
+            <a:prstDash val="solid"/>
+          </a:ln>
+        </p:spPr>
+      </p:sp>
+      <p:sp>
+        <p:nvSpPr>
+          <p:cNvPr id="9" name="Text 7"/>
+          <p:cNvSpPr/>
+          <p:nvPr/>
+        </p:nvSpPr>
+        <p:spPr>
+          <a:xfrm>
+            <a:off x="1005840" y="3520440"/>
+            <a:ext cx="4754880" cy="365760"/>
+          </a:xfrm>
+          <a:prstGeom prst="rect">
+            <a:avLst/>
+          </a:prstGeom>
+          <a:noFill/>
+          <a:ln/>
+        </p:spPr>
+        <p:txBody>
+          <a:bodyPr wrap="square" rtlCol="0" anchor="ctr"/>
+          <a:lstStyle/>
           <a:p>
-            <a:pPr marL="228600" indent="-228600">
-              <a:lnSpc>
-                <a:spcPct val="135000"/>
-              </a:lnSpc>
-              <a:buSzPct val="100000"/>
-              <a:buChar char="•"/>
+            <a:pPr indent="0" marL="0">
+              <a:buNone/>
             </a:pPr>
             <a:r>
-              <a:rPr lang="en-US" sz="1800" dirty="0">
+              <a:rPr lang="en-US" sz="1700" b="1" dirty="0">
                 <a:solidFill>
-                  <a:srgbClr val="11372A"/>
+                  <a:srgbClr val="123A2B"/>
                 </a:solidFill>
                 <a:latin typeface="Segoe UI" pitchFamily="34" charset="0"/>
                 <a:ea typeface="Segoe UI" pitchFamily="34" charset="-122"/>
                 <a:cs typeface="Segoe UI" pitchFamily="34" charset="-120"/>
               </a:rPr>
-              <a:t>Desktop: Electron wrapper - installs in one click via NextRole-Setup.exe, bundled server included.</a:t>
+              <a:t>Local full stack</a:t>
             </a:r>
-            <a:endParaRPr lang="en-US" sz="1800" dirty="0"/>
+            <a:endParaRPr lang="en-US" sz="1700" dirty="0"/>
           </a:p>
+        </p:txBody>
+      </p:sp>
+      <p:sp>
+        <p:nvSpPr>
+          <p:cNvPr id="10" name="Text 8"/>
+          <p:cNvSpPr/>
+          <p:nvPr/>
+        </p:nvSpPr>
+        <p:spPr>
+          <a:xfrm>
+            <a:off x="1005840" y="3913632"/>
+            <a:ext cx="4754880" cy="594360"/>
+          </a:xfrm>
+          <a:prstGeom prst="rect">
+            <a:avLst/>
+          </a:prstGeom>
+          <a:noFill/>
+          <a:ln/>
+        </p:spPr>
+        <p:txBody>
+          <a:bodyPr wrap="square" rtlCol="0" anchor="ctr"/>
+          <a:lstStyle/>
           <a:p>
-            <a:pPr marL="228600" indent="-228600">
-              <a:lnSpc>
-                <a:spcPct val="135000"/>
-              </a:lnSpc>
-              <a:buSzPct val="100000"/>
-              <a:buChar char="•"/>
+            <a:pPr indent="0" marL="0">
+              <a:buNone/>
             </a:pPr>
             <a:r>
-              <a:rPr lang="en-US" sz="1800" dirty="0">
+              <a:rPr lang="en-US" sz="1250" dirty="0">
                 <a:solidFill>
-                  <a:srgbClr val="11372A"/>
+                  <a:srgbClr val="75897D"/>
                 </a:solidFill>
                 <a:latin typeface="Segoe UI" pitchFamily="34" charset="0"/>
                 <a:ea typeface="Segoe UI" pitchFamily="34" charset="-122"/>
                 <a:cs typeface="Segoe UI" pitchFamily="34" charset="-120"/>
               </a:rPr>
-              <a:t>Icons, fonts and OCR language data bundle offline; Grok and MongoDB stay optional.</a:t>
+              <a:t>One Node process serves UI + API - npm run dev, or build + start.</a:t>
             </a:r>
-            <a:endParaRPr lang="en-US" sz="1800" dirty="0"/>
+            <a:endParaRPr lang="en-US" sz="1250" dirty="0"/>
           </a:p>
+        </p:txBody>
+      </p:sp>
+      <p:sp>
+        <p:nvSpPr>
+          <p:cNvPr id="11" name="Shape 9"/>
+          <p:cNvSpPr/>
+          <p:nvPr/>
+        </p:nvSpPr>
+        <p:spPr>
+          <a:xfrm>
+            <a:off x="777240" y="4754880"/>
+            <a:ext cx="5212080" cy="1188720"/>
+          </a:xfrm>
+          <a:prstGeom prst="roundRect">
+            <a:avLst>
+              <a:gd name="adj" fmla="val 9231"/>
+            </a:avLst>
+          </a:prstGeom>
+          <a:solidFill>
+            <a:srgbClr val="FFFFFF"/>
+          </a:solidFill>
+          <a:ln w="19050">
+            <a:solidFill>
+              <a:srgbClr val="F1EFE6"/>
+            </a:solidFill>
+            <a:prstDash val="solid"/>
+          </a:ln>
+        </p:spPr>
+      </p:sp>
+      <p:sp>
+        <p:nvSpPr>
+          <p:cNvPr id="12" name="Text 10"/>
+          <p:cNvSpPr/>
+          <p:nvPr/>
+        </p:nvSpPr>
+        <p:spPr>
+          <a:xfrm>
+            <a:off x="1005840" y="4892040"/>
+            <a:ext cx="4754880" cy="365760"/>
+          </a:xfrm>
+          <a:prstGeom prst="rect">
+            <a:avLst/>
+          </a:prstGeom>
+          <a:noFill/>
+          <a:ln/>
+        </p:spPr>
+        <p:txBody>
+          <a:bodyPr wrap="square" rtlCol="0" anchor="ctr"/>
+          <a:lstStyle/>
           <a:p>
-            <a:pPr marL="228600" indent="-228600">
-              <a:lnSpc>
-                <a:spcPct val="135000"/>
-              </a:lnSpc>
-              <a:buSzPct val="100000"/>
-              <a:buChar char="•"/>
+            <a:pPr indent="0" marL="0">
+              <a:buNone/>
             </a:pPr>
             <a:r>
-              <a:rPr lang="en-US" sz="1800" dirty="0">
+              <a:rPr lang="en-US" sz="1700" b="1" dirty="0">
                 <a:solidFill>
-                  <a:srgbClr val="11372A"/>
+                  <a:srgbClr val="123A2B"/>
                 </a:solidFill>
                 <a:latin typeface="Segoe UI" pitchFamily="34" charset="0"/>
                 <a:ea typeface="Segoe UI" pitchFamily="34" charset="-122"/>
                 <a:cs typeface="Segoe UI" pitchFamily="34" charset="-120"/>
               </a:rPr>
-              <a:t>Same codebase, same matching engine, three surfaces.</a:t>
+              <a:t>Desktop app</a:t>
             </a:r>
-            <a:endParaRPr lang="en-US" sz="1800" dirty="0"/>
+            <a:endParaRPr lang="en-US" sz="1700" dirty="0"/>
           </a:p>
         </p:txBody>
       </p:sp>
       <p:sp>
         <p:nvSpPr>
-          <p:cNvPr id="6" name="Text 4"/>
+          <p:cNvPr id="13" name="Text 11"/>
+          <p:cNvSpPr/>
+          <p:nvPr/>
+        </p:nvSpPr>
+        <p:spPr>
+          <a:xfrm>
+            <a:off x="1005840" y="5285232"/>
+            <a:ext cx="4754880" cy="594360"/>
+          </a:xfrm>
+          <a:prstGeom prst="rect">
+            <a:avLst/>
+          </a:prstGeom>
+          <a:noFill/>
+          <a:ln/>
+        </p:spPr>
+        <p:txBody>
+          <a:bodyPr wrap="square" rtlCol="0" anchor="ctr"/>
+          <a:lstStyle/>
+          <a:p>
+            <a:pPr indent="0" marL="0">
+              <a:buNone/>
+            </a:pPr>
+            <a:r>
+              <a:rPr lang="en-US" sz="1250" dirty="0">
+                <a:solidFill>
+                  <a:srgbClr val="75897D"/>
+                </a:solidFill>
+                <a:latin typeface="Segoe UI" pitchFamily="34" charset="0"/>
+                <a:ea typeface="Segoe UI" pitchFamily="34" charset="-122"/>
+                <a:cs typeface="Segoe UI" pitchFamily="34" charset="-120"/>
+              </a:rPr>
+              <a:t>One-click Windows installer via GitHub Releases; Electron window.</a:t>
+            </a:r>
+            <a:endParaRPr lang="en-US" sz="1250" dirty="0"/>
+          </a:p>
+        </p:txBody>
+      </p:sp>
+      <p:sp>
+        <p:nvSpPr>
+          <p:cNvPr id="14" name="Shape 12"/>
+          <p:cNvSpPr/>
+          <p:nvPr/>
+        </p:nvSpPr>
+        <p:spPr>
+          <a:xfrm>
+            <a:off x="6400800" y="2212848"/>
+            <a:ext cx="5349240" cy="2595372"/>
+          </a:xfrm>
+          <a:prstGeom prst="roundRect">
+            <a:avLst>
+              <a:gd name="adj" fmla="val 2819"/>
+            </a:avLst>
+          </a:prstGeom>
+          <a:solidFill>
+            <a:srgbClr val="0D2C20">
+              <a:alpha val="22000"/>
+            </a:srgbClr>
+          </a:solidFill>
+          <a:ln/>
+        </p:spPr>
+      </p:sp>
+      <p:pic>
+        <p:nvPicPr>
+          <p:cNvPr id="15" name="Image 0" descr="C:/Users/Komal Saxena/AppData/Local/Temp/opencode/deckimg/09-hosted.png">    </p:cNvPr>
+          <p:cNvPicPr>
+            <a:picLocks noChangeAspect="1"/>
+          </p:cNvPicPr>
+          <p:nvPr/>
+        </p:nvPicPr>
+        <p:blipFill>
+          <a:blip r:embed="rId1"/>
+          <a:stretch>
+            <a:fillRect/>
+          </a:stretch>
+        </p:blipFill>
+        <p:spPr>
+          <a:xfrm>
+            <a:off x="6355080" y="2148840"/>
+            <a:ext cx="5349240" cy="2595372"/>
+          </a:xfrm>
+          <a:prstGeom prst="rect">
+            <a:avLst/>
+          </a:prstGeom>
+        </p:spPr>
+      </p:pic>
+      <p:sp>
+        <p:nvSpPr>
+          <p:cNvPr id="16" name="Shape 13"/>
+          <p:cNvSpPr/>
+          <p:nvPr/>
+        </p:nvSpPr>
+        <p:spPr>
+          <a:xfrm>
+            <a:off x="6355080" y="2148840"/>
+            <a:ext cx="5349240" cy="2595372"/>
+          </a:xfrm>
+          <a:prstGeom prst="roundRect">
+            <a:avLst>
+              <a:gd name="adj" fmla="val 2819"/>
+            </a:avLst>
+          </a:prstGeom>
+          <a:solidFill>
+            <a:srgbClr val="FFFFFF">
+              <a:alpha val="0"/>
+            </a:srgbClr>
+          </a:solidFill>
+          <a:ln w="12700">
+            <a:solidFill>
+              <a:srgbClr val="D8D5C8"/>
+            </a:solidFill>
+            <a:prstDash val="solid"/>
+          </a:ln>
+        </p:spPr>
+      </p:sp>
+      <p:sp>
+        <p:nvSpPr>
+          <p:cNvPr id="17" name="Text 14"/>
+          <p:cNvSpPr/>
+          <p:nvPr/>
+        </p:nvSpPr>
+        <p:spPr>
+          <a:xfrm>
+            <a:off x="6355080" y="4983480"/>
+            <a:ext cx="5349240" cy="365760"/>
+          </a:xfrm>
+          <a:prstGeom prst="rect">
+            <a:avLst/>
+          </a:prstGeom>
+          <a:noFill/>
+          <a:ln/>
+        </p:spPr>
+        <p:txBody>
+          <a:bodyPr wrap="square" rtlCol="0" anchor="ctr"/>
+          <a:lstStyle/>
+          <a:p>
+            <a:pPr algn="ctr" indent="0" marL="0">
+              <a:buNone/>
+            </a:pPr>
+            <a:r>
+              <a:rPr lang="en-US" sz="1200" b="1" dirty="0">
+                <a:solidFill>
+                  <a:srgbClr val="123A2B"/>
+                </a:solidFill>
+                <a:latin typeface="Segoe UI" pitchFamily="34" charset="0"/>
+                <a:ea typeface="Segoe UI" pitchFamily="34" charset="-122"/>
+                <a:cs typeface="Segoe UI" pitchFamily="34" charset="-120"/>
+              </a:rPr>
+              <a:t>The hosted app - Install app button in the header</a:t>
+            </a:r>
+            <a:endParaRPr lang="en-US" sz="1200" dirty="0"/>
+          </a:p>
+        </p:txBody>
+      </p:sp>
+      <p:sp>
+        <p:nvSpPr>
+          <p:cNvPr id="18" name="Text 15"/>
           <p:cNvSpPr/>
           <p:nvPr/>
         </p:nvSpPr>
@@ -8615,7 +12283,7 @@
                               <p:par>
                                 <p:cTn id="8" presetID="10" presetClass="entr" presetSubtype="0" fill="hold" grpId="0" nodeType="withEffect">
                                   <p:stCondLst>
-                                    <p:cond delay="350"/>
+                                    <p:cond delay="320"/>
                                   </p:stCondLst>
                                   <p:childTnLst>
                                     <p:set>
@@ -8650,7 +12318,7 @@
                               <p:par>
                                 <p:cTn id="11" presetID="10" presetClass="entr" presetSubtype="0" fill="hold" grpId="0" nodeType="withEffect">
                                   <p:stCondLst>
-                                    <p:cond delay="700"/>
+                                    <p:cond delay="640"/>
                                   </p:stCondLst>
                                   <p:childTnLst>
                                     <p:set>
@@ -8685,7 +12353,7 @@
                               <p:par>
                                 <p:cTn id="14" presetID="10" presetClass="entr" presetSubtype="0" fill="hold" grpId="0" nodeType="withEffect">
                                   <p:stCondLst>
-                                    <p:cond delay="1050"/>
+                                    <p:cond delay="960"/>
                                   </p:stCondLst>
                                   <p:childTnLst>
                                     <p:set>
@@ -8720,7 +12388,7 @@
                               <p:par>
                                 <p:cTn id="17" presetID="10" presetClass="entr" presetSubtype="0" fill="hold" grpId="0" nodeType="withEffect">
                                   <p:stCondLst>
-                                    <p:cond delay="1400"/>
+                                    <p:cond delay="1280"/>
                                   </p:stCondLst>
                                   <p:childTnLst>
                                     <p:set>
@@ -8746,6 +12414,426 @@
                                         <p:cTn id="18" dur="500"/>
                                         <p:tgtEl>
                                           <p:spTgt spid="6"/>
+                                        </p:tgtEl>
+                                      </p:cBhvr>
+                                    </p:animEffect>
+                                  </p:childTnLst>
+                                </p:cTn>
+                              </p:par>
+                              <p:par>
+                                <p:cTn id="20" presetID="10" presetClass="entr" presetSubtype="0" fill="hold" grpId="0" nodeType="withEffect">
+                                  <p:stCondLst>
+                                    <p:cond delay="1600"/>
+                                  </p:stCondLst>
+                                  <p:childTnLst>
+                                    <p:set>
+                                      <p:cBhvr>
+                                        <p:cTn id="19" dur="1" fill="hold">
+                                          <p:stCondLst>
+                                            <p:cond delay="0"/>
+                                          </p:stCondLst>
+                                        </p:cTn>
+                                        <p:tgtEl>
+                                          <p:spTgt spid="7"/>
+                                        </p:tgtEl>
+                                        <p:attrNameLst>
+                                          <p:attrName>style.visibility</p:attrName>
+                                        </p:attrNameLst>
+                                      </p:cBhvr>
+                                      <p:to>
+                                        <p:strVal val="visible"/>
+                                      </p:to>
+                                    </p:set>
+                                    <p:animEffect transition="in" filter="fade">
+                                      <p:cBhvr>
+                                        <p:cTn id="21" dur="500"/>
+                                        <p:tgtEl>
+                                          <p:spTgt spid="7"/>
+                                        </p:tgtEl>
+                                      </p:cBhvr>
+                                    </p:animEffect>
+                                  </p:childTnLst>
+                                </p:cTn>
+                              </p:par>
+                              <p:par>
+                                <p:cTn id="23" presetID="10" presetClass="entr" presetSubtype="0" fill="hold" grpId="0" nodeType="withEffect">
+                                  <p:stCondLst>
+                                    <p:cond delay="1920"/>
+                                  </p:stCondLst>
+                                  <p:childTnLst>
+                                    <p:set>
+                                      <p:cBhvr>
+                                        <p:cTn id="22" dur="1" fill="hold">
+                                          <p:stCondLst>
+                                            <p:cond delay="0"/>
+                                          </p:stCondLst>
+                                        </p:cTn>
+                                        <p:tgtEl>
+                                          <p:spTgt spid="8"/>
+                                        </p:tgtEl>
+                                        <p:attrNameLst>
+                                          <p:attrName>style.visibility</p:attrName>
+                                        </p:attrNameLst>
+                                      </p:cBhvr>
+                                      <p:to>
+                                        <p:strVal val="visible"/>
+                                      </p:to>
+                                    </p:set>
+                                    <p:animEffect transition="in" filter="fade">
+                                      <p:cBhvr>
+                                        <p:cTn id="24" dur="500"/>
+                                        <p:tgtEl>
+                                          <p:spTgt spid="8"/>
+                                        </p:tgtEl>
+                                      </p:cBhvr>
+                                    </p:animEffect>
+                                  </p:childTnLst>
+                                </p:cTn>
+                              </p:par>
+                              <p:par>
+                                <p:cTn id="26" presetID="10" presetClass="entr" presetSubtype="0" fill="hold" grpId="0" nodeType="withEffect">
+                                  <p:stCondLst>
+                                    <p:cond delay="2240"/>
+                                  </p:stCondLst>
+                                  <p:childTnLst>
+                                    <p:set>
+                                      <p:cBhvr>
+                                        <p:cTn id="25" dur="1" fill="hold">
+                                          <p:stCondLst>
+                                            <p:cond delay="0"/>
+                                          </p:stCondLst>
+                                        </p:cTn>
+                                        <p:tgtEl>
+                                          <p:spTgt spid="9"/>
+                                        </p:tgtEl>
+                                        <p:attrNameLst>
+                                          <p:attrName>style.visibility</p:attrName>
+                                        </p:attrNameLst>
+                                      </p:cBhvr>
+                                      <p:to>
+                                        <p:strVal val="visible"/>
+                                      </p:to>
+                                    </p:set>
+                                    <p:animEffect transition="in" filter="fade">
+                                      <p:cBhvr>
+                                        <p:cTn id="27" dur="500"/>
+                                        <p:tgtEl>
+                                          <p:spTgt spid="9"/>
+                                        </p:tgtEl>
+                                      </p:cBhvr>
+                                    </p:animEffect>
+                                  </p:childTnLst>
+                                </p:cTn>
+                              </p:par>
+                              <p:par>
+                                <p:cTn id="29" presetID="10" presetClass="entr" presetSubtype="0" fill="hold" grpId="0" nodeType="withEffect">
+                                  <p:stCondLst>
+                                    <p:cond delay="2560"/>
+                                  </p:stCondLst>
+                                  <p:childTnLst>
+                                    <p:set>
+                                      <p:cBhvr>
+                                        <p:cTn id="28" dur="1" fill="hold">
+                                          <p:stCondLst>
+                                            <p:cond delay="0"/>
+                                          </p:stCondLst>
+                                        </p:cTn>
+                                        <p:tgtEl>
+                                          <p:spTgt spid="10"/>
+                                        </p:tgtEl>
+                                        <p:attrNameLst>
+                                          <p:attrName>style.visibility</p:attrName>
+                                        </p:attrNameLst>
+                                      </p:cBhvr>
+                                      <p:to>
+                                        <p:strVal val="visible"/>
+                                      </p:to>
+                                    </p:set>
+                                    <p:animEffect transition="in" filter="fade">
+                                      <p:cBhvr>
+                                        <p:cTn id="30" dur="500"/>
+                                        <p:tgtEl>
+                                          <p:spTgt spid="10"/>
+                                        </p:tgtEl>
+                                      </p:cBhvr>
+                                    </p:animEffect>
+                                  </p:childTnLst>
+                                </p:cTn>
+                              </p:par>
+                              <p:par>
+                                <p:cTn id="32" presetID="10" presetClass="entr" presetSubtype="0" fill="hold" grpId="0" nodeType="withEffect">
+                                  <p:stCondLst>
+                                    <p:cond delay="2880"/>
+                                  </p:stCondLst>
+                                  <p:childTnLst>
+                                    <p:set>
+                                      <p:cBhvr>
+                                        <p:cTn id="31" dur="1" fill="hold">
+                                          <p:stCondLst>
+                                            <p:cond delay="0"/>
+                                          </p:stCondLst>
+                                        </p:cTn>
+                                        <p:tgtEl>
+                                          <p:spTgt spid="11"/>
+                                        </p:tgtEl>
+                                        <p:attrNameLst>
+                                          <p:attrName>style.visibility</p:attrName>
+                                        </p:attrNameLst>
+                                      </p:cBhvr>
+                                      <p:to>
+                                        <p:strVal val="visible"/>
+                                      </p:to>
+                                    </p:set>
+                                    <p:animEffect transition="in" filter="fade">
+                                      <p:cBhvr>
+                                        <p:cTn id="33" dur="500"/>
+                                        <p:tgtEl>
+                                          <p:spTgt spid="11"/>
+                                        </p:tgtEl>
+                                      </p:cBhvr>
+                                    </p:animEffect>
+                                  </p:childTnLst>
+                                </p:cTn>
+                              </p:par>
+                              <p:par>
+                                <p:cTn id="35" presetID="10" presetClass="entr" presetSubtype="0" fill="hold" grpId="0" nodeType="withEffect">
+                                  <p:stCondLst>
+                                    <p:cond delay="3200"/>
+                                  </p:stCondLst>
+                                  <p:childTnLst>
+                                    <p:set>
+                                      <p:cBhvr>
+                                        <p:cTn id="34" dur="1" fill="hold">
+                                          <p:stCondLst>
+                                            <p:cond delay="0"/>
+                                          </p:stCondLst>
+                                        </p:cTn>
+                                        <p:tgtEl>
+                                          <p:spTgt spid="12"/>
+                                        </p:tgtEl>
+                                        <p:attrNameLst>
+                                          <p:attrName>style.visibility</p:attrName>
+                                        </p:attrNameLst>
+                                      </p:cBhvr>
+                                      <p:to>
+                                        <p:strVal val="visible"/>
+                                      </p:to>
+                                    </p:set>
+                                    <p:animEffect transition="in" filter="fade">
+                                      <p:cBhvr>
+                                        <p:cTn id="36" dur="500"/>
+                                        <p:tgtEl>
+                                          <p:spTgt spid="12"/>
+                                        </p:tgtEl>
+                                      </p:cBhvr>
+                                    </p:animEffect>
+                                  </p:childTnLst>
+                                </p:cTn>
+                              </p:par>
+                              <p:par>
+                                <p:cTn id="38" presetID="10" presetClass="entr" presetSubtype="0" fill="hold" grpId="0" nodeType="withEffect">
+                                  <p:stCondLst>
+                                    <p:cond delay="3520"/>
+                                  </p:stCondLst>
+                                  <p:childTnLst>
+                                    <p:set>
+                                      <p:cBhvr>
+                                        <p:cTn id="37" dur="1" fill="hold">
+                                          <p:stCondLst>
+                                            <p:cond delay="0"/>
+                                          </p:stCondLst>
+                                        </p:cTn>
+                                        <p:tgtEl>
+                                          <p:spTgt spid="13"/>
+                                        </p:tgtEl>
+                                        <p:attrNameLst>
+                                          <p:attrName>style.visibility</p:attrName>
+                                        </p:attrNameLst>
+                                      </p:cBhvr>
+                                      <p:to>
+                                        <p:strVal val="visible"/>
+                                      </p:to>
+                                    </p:set>
+                                    <p:animEffect transition="in" filter="fade">
+                                      <p:cBhvr>
+                                        <p:cTn id="39" dur="500"/>
+                                        <p:tgtEl>
+                                          <p:spTgt spid="13"/>
+                                        </p:tgtEl>
+                                      </p:cBhvr>
+                                    </p:animEffect>
+                                  </p:childTnLst>
+                                </p:cTn>
+                              </p:par>
+                              <p:par>
+                                <p:cTn id="41" presetID="10" presetClass="entr" presetSubtype="0" fill="hold" grpId="0" nodeType="withEffect">
+                                  <p:stCondLst>
+                                    <p:cond delay="3840"/>
+                                  </p:stCondLst>
+                                  <p:childTnLst>
+                                    <p:set>
+                                      <p:cBhvr>
+                                        <p:cTn id="40" dur="1" fill="hold">
+                                          <p:stCondLst>
+                                            <p:cond delay="0"/>
+                                          </p:stCondLst>
+                                        </p:cTn>
+                                        <p:tgtEl>
+                                          <p:spTgt spid="14"/>
+                                        </p:tgtEl>
+                                        <p:attrNameLst>
+                                          <p:attrName>style.visibility</p:attrName>
+                                        </p:attrNameLst>
+                                      </p:cBhvr>
+                                      <p:to>
+                                        <p:strVal val="visible"/>
+                                      </p:to>
+                                    </p:set>
+                                    <p:animEffect transition="in" filter="fade">
+                                      <p:cBhvr>
+                                        <p:cTn id="42" dur="500"/>
+                                        <p:tgtEl>
+                                          <p:spTgt spid="14"/>
+                                        </p:tgtEl>
+                                      </p:cBhvr>
+                                    </p:animEffect>
+                                  </p:childTnLst>
+                                </p:cTn>
+                              </p:par>
+                              <p:par>
+                                <p:cTn id="44" presetID="10" presetClass="entr" presetSubtype="0" fill="hold" grpId="0" nodeType="withEffect">
+                                  <p:stCondLst>
+                                    <p:cond delay="4160"/>
+                                  </p:stCondLst>
+                                  <p:childTnLst>
+                                    <p:set>
+                                      <p:cBhvr>
+                                        <p:cTn id="43" dur="1" fill="hold">
+                                          <p:stCondLst>
+                                            <p:cond delay="0"/>
+                                          </p:stCondLst>
+                                        </p:cTn>
+                                        <p:tgtEl>
+                                          <p:spTgt spid="15"/>
+                                        </p:tgtEl>
+                                        <p:attrNameLst>
+                                          <p:attrName>style.visibility</p:attrName>
+                                        </p:attrNameLst>
+                                      </p:cBhvr>
+                                      <p:to>
+                                        <p:strVal val="visible"/>
+                                      </p:to>
+                                    </p:set>
+                                    <p:animEffect transition="in" filter="fade">
+                                      <p:cBhvr>
+                                        <p:cTn id="45" dur="500"/>
+                                        <p:tgtEl>
+                                          <p:spTgt spid="15"/>
+                                        </p:tgtEl>
+                                      </p:cBhvr>
+                                    </p:animEffect>
+                                  </p:childTnLst>
+                                </p:cTn>
+                              </p:par>
+                              <p:par>
+                                <p:cTn id="47" presetID="10" presetClass="entr" presetSubtype="0" fill="hold" grpId="0" nodeType="withEffect">
+                                  <p:stCondLst>
+                                    <p:cond delay="4480"/>
+                                  </p:stCondLst>
+                                  <p:childTnLst>
+                                    <p:set>
+                                      <p:cBhvr>
+                                        <p:cTn id="46" dur="1" fill="hold">
+                                          <p:stCondLst>
+                                            <p:cond delay="0"/>
+                                          </p:stCondLst>
+                                        </p:cTn>
+                                        <p:tgtEl>
+                                          <p:spTgt spid="16"/>
+                                        </p:tgtEl>
+                                        <p:attrNameLst>
+                                          <p:attrName>style.visibility</p:attrName>
+                                        </p:attrNameLst>
+                                      </p:cBhvr>
+                                      <p:to>
+                                        <p:strVal val="visible"/>
+                                      </p:to>
+                                    </p:set>
+                                    <p:animEffect transition="in" filter="fade">
+                                      <p:cBhvr>
+                                        <p:cTn id="48" dur="500"/>
+                                        <p:tgtEl>
+                                          <p:spTgt spid="16"/>
+                                        </p:tgtEl>
+                                      </p:cBhvr>
+                                    </p:animEffect>
+                                  </p:childTnLst>
+                                </p:cTn>
+                              </p:par>
+                              <p:par>
+                                <p:cTn id="50" presetID="10" presetClass="entr" presetSubtype="0" fill="hold" grpId="0" nodeType="withEffect">
+                                  <p:stCondLst>
+                                    <p:cond delay="4800"/>
+                                  </p:stCondLst>
+                                  <p:childTnLst>
+                                    <p:set>
+                                      <p:cBhvr>
+                                        <p:cTn id="49" dur="1" fill="hold">
+                                          <p:stCondLst>
+                                            <p:cond delay="0"/>
+                                          </p:stCondLst>
+                                        </p:cTn>
+                                        <p:tgtEl>
+                                          <p:spTgt spid="17"/>
+                                        </p:tgtEl>
+                                        <p:attrNameLst>
+                                          <p:attrName>style.visibility</p:attrName>
+                                        </p:attrNameLst>
+                                      </p:cBhvr>
+                                      <p:to>
+                                        <p:strVal val="visible"/>
+                                      </p:to>
+                                    </p:set>
+                                    <p:animEffect transition="in" filter="fade">
+                                      <p:cBhvr>
+                                        <p:cTn id="51" dur="500"/>
+                                        <p:tgtEl>
+                                          <p:spTgt spid="17"/>
+                                        </p:tgtEl>
+                                      </p:cBhvr>
+                                    </p:animEffect>
+                                  </p:childTnLst>
+                                </p:cTn>
+                              </p:par>
+                              <p:par>
+                                <p:cTn id="53" presetID="10" presetClass="entr" presetSubtype="0" fill="hold" grpId="0" nodeType="withEffect">
+                                  <p:stCondLst>
+                                    <p:cond delay="5120"/>
+                                  </p:stCondLst>
+                                  <p:childTnLst>
+                                    <p:set>
+                                      <p:cBhvr>
+                                        <p:cTn id="52" dur="1" fill="hold">
+                                          <p:stCondLst>
+                                            <p:cond delay="0"/>
+                                          </p:stCondLst>
+                                        </p:cTn>
+                                        <p:tgtEl>
+                                          <p:spTgt spid="18"/>
+                                        </p:tgtEl>
+                                        <p:attrNameLst>
+                                          <p:attrName>style.visibility</p:attrName>
+                                        </p:attrNameLst>
+                                      </p:cBhvr>
+                                      <p:to>
+                                        <p:strVal val="visible"/>
+                                      </p:to>
+                                    </p:set>
+                                    <p:animEffect transition="in" filter="fade">
+                                      <p:cBhvr>
+                                        <p:cTn id="54" dur="500"/>
+                                        <p:tgtEl>
+                                          <p:spTgt spid="18"/>
                                         </p:tgtEl>
                                       </p:cBhvr>
                                     </p:animEffect>
